--- a/docs/專題期末報告.pptx
+++ b/docs/專題期末報告.pptx
@@ -27,19 +27,19 @@
   <p:notesSz cx="9874250" cy="6797675"/>
   <p:embeddedFontLst>
     <p:embeddedFont>
-      <p:font typeface="Microsoft JhengHei" panose="020B0604030504040204" pitchFamily="34" charset="-120"/>
+      <p:font typeface="Helvetica Neue" panose="020B0600070205080204" charset="0"/>
       <p:regular r:id="rId15"/>
       <p:bold r:id="rId16"/>
+      <p:italic r:id="rId17"/>
+      <p:boldItalic r:id="rId18"/>
     </p:embeddedFont>
     <p:embeddedFont>
-      <p:font typeface="Helvetica Neue" panose="02020500000000000000" charset="0"/>
-      <p:regular r:id="rId17"/>
-      <p:bold r:id="rId18"/>
-      <p:italic r:id="rId19"/>
-      <p:boldItalic r:id="rId20"/>
+      <p:font typeface="Microsoft JhengHei" panose="020B0604030504040204" pitchFamily="34" charset="-120"/>
+      <p:regular r:id="rId19"/>
+      <p:bold r:id="rId20"/>
     </p:embeddedFont>
     <p:embeddedFont>
-      <p:font typeface="Noto Sans Symbols" panose="02020500000000000000" charset="0"/>
+      <p:font typeface="Noto Sans Symbols" panose="020B0600070205080204" charset="0"/>
       <p:regular r:id="rId21"/>
       <p:bold r:id="rId22"/>
       <p:italic r:id="rId23"/>
@@ -294,7 +294,7 @@
       <p15:notesGuideLst xmlns:p15="http://schemas.microsoft.com/office/powerpoint/2012/main"/>
     </p:ext>
     <p:ext uri="GoogleSlidesCustomDataVersion2">
-      <go:slidesCustomData xmlns:go="http://customooxmlschemas.google.com/" xmlns:ahyp="http://schemas.microsoft.com/office/drawing/2018/hyperlinkcolor" xmlns:p15="http://schemas.microsoft.com/office/powerpoint/2012/main" xmlns:p14="http://schemas.microsoft.com/office/powerpoint/2010/main" xmlns:com="http://schemas.openxmlformats.org/drawingml/2006/compatibility" xmlns:pvml="urn:schemas-microsoft-com:office:powerpoint" xmlns:v="urn:schemas-microsoft-com:vml" xmlns:o="urn:schemas-microsoft-com:office:office" xmlns:dgm="http://schemas.openxmlformats.org/drawingml/2006/diagram" xmlns:c="http://schemas.openxmlformats.org/drawingml/2006/chart" xmlns:mv="urn:schemas-microsoft-com:mac:vml" xmlns:mc="http://schemas.openxmlformats.org/markup-compatibility/2006" xmlns="" r:id="rId64" roundtripDataSignature="AMtx7mgNlel+ZygXPW1yK/LuWkbTK5rvsg=="/>
+      <go:slidesCustomData xmlns="" xmlns:mc="http://schemas.openxmlformats.org/markup-compatibility/2006" xmlns:mv="urn:schemas-microsoft-com:mac:vml" xmlns:c="http://schemas.openxmlformats.org/drawingml/2006/chart" xmlns:dgm="http://schemas.openxmlformats.org/drawingml/2006/diagram" xmlns:o="urn:schemas-microsoft-com:office:office" xmlns:v="urn:schemas-microsoft-com:vml" xmlns:pvml="urn:schemas-microsoft-com:office:powerpoint" xmlns:com="http://schemas.openxmlformats.org/drawingml/2006/compatibility" xmlns:p14="http://schemas.microsoft.com/office/powerpoint/2010/main" xmlns:p15="http://schemas.microsoft.com/office/powerpoint/2012/main" xmlns:ahyp="http://schemas.microsoft.com/office/drawing/2018/hyperlinkcolor" xmlns:go="http://customooxmlschemas.google.com/" r:id="rId64" roundtripDataSignature="AMtx7mgNlel+ZygXPW1yK/LuWkbTK5rvsg=="/>
     </p:ext>
   </p:extLst>
 </p:presentation>
@@ -14022,7 +14022,7 @@
                 <a:ea typeface="標楷體" panose="03000509000000000000" pitchFamily="65" charset="-120"/>
                 <a:cs typeface="Times New Roman" panose="02020603050405020304" pitchFamily="18" charset="0"/>
               </a:rPr>
-              <a:t>Evaluation</a:t>
+              <a:t>Topo Evaluation: Scheduler Trace Replay</a:t>
             </a:r>
             <a:endParaRPr lang="zh-TW" altLang="en-US" sz="3200" dirty="0">
               <a:latin typeface="Times New Roman" panose="02020603050405020304" pitchFamily="18" charset="0"/>
@@ -14088,32 +14088,448 @@
         </p:nvSpPr>
         <p:spPr>
           <a:xfrm>
-            <a:off x="628650" y="914400"/>
-            <a:ext cx="7886700" cy="3638006"/>
+            <a:off x="234615" y="1022656"/>
+            <a:ext cx="7886700" cy="1657350"/>
           </a:xfrm>
         </p:spPr>
         <p:txBody>
-          <a:bodyPr/>
+          <a:bodyPr>
+            <a:normAutofit lnSpcReduction="10000"/>
+          </a:bodyPr>
           <a:lstStyle/>
           <a:p>
-            <a:endParaRPr lang="en-US" altLang="zh-TW" dirty="0"/>
-          </a:p>
-          <a:p>
-            <a:r>
-              <a:rPr lang="zh-TW" altLang="en-US" dirty="0"/>
-              <a:t>放你的</a:t>
-            </a:r>
-            <a:r>
-              <a:rPr lang="en-US" altLang="zh-TW" dirty="0"/>
-              <a:t>topo</a:t>
-            </a:r>
-            <a:r>
-              <a:rPr lang="zh-TW" altLang="en-US" dirty="0"/>
-              <a:t>結果</a:t>
-            </a:r>
+            <a:pPr marL="147600" indent="0">
+              <a:buNone/>
+            </a:pPr>
+            <a:r>
+              <a:rPr lang="zh-TW" altLang="zh-TW" sz="2000" b="1" dirty="0"/>
+              <a:t>Input trace: TA scheduler trace</a:t>
+            </a:r>
+            <a:br>
+              <a:rPr lang="zh-TW" altLang="zh-TW" sz="2000" dirty="0"/>
+            </a:br>
+            <a:r>
+              <a:rPr lang="zh-TW" altLang="zh-TW" sz="2000" dirty="0"/>
+              <a:t>UAVs: 4</a:t>
+            </a:r>
+            <a:br>
+              <a:rPr lang="zh-TW" altLang="zh-TW" sz="2000" dirty="0"/>
+            </a:br>
+            <a:r>
+              <a:rPr lang="zh-TW" altLang="zh-TW" sz="2000" dirty="0"/>
+              <a:t>Tasks: 619</a:t>
+            </a:r>
+            <a:br>
+              <a:rPr lang="zh-TW" altLang="zh-TW" sz="2000" dirty="0"/>
+            </a:br>
+            <a:r>
+              <a:rPr lang="zh-TW" altLang="zh-TW" sz="2000" dirty="0"/>
+              <a:t>Mission deadline: 5400 s</a:t>
+            </a:r>
+            <a:br>
+              <a:rPr lang="zh-TW" altLang="zh-TW" sz="2000" dirty="0"/>
+            </a:br>
+            <a:r>
+              <a:rPr lang="zh-TW" altLang="zh-TW" sz="2000" dirty="0"/>
+              <a:t>Pipeline: uav-vanet → master_buffer_trace.csv → uav-to-leo</a:t>
+            </a:r>
+            <a:endParaRPr lang="en-US" altLang="zh-TW" sz="2000" dirty="0"/>
           </a:p>
         </p:txBody>
       </p:sp>
+      <p:sp>
+        <p:nvSpPr>
+          <p:cNvPr id="3" name="文字版面配置區 5">
+            <a:extLst>
+              <a:ext uri="{FF2B5EF4-FFF2-40B4-BE49-F238E27FC236}">
+                <a16:creationId xmlns:a16="http://schemas.microsoft.com/office/drawing/2014/main" id="{9B983714-BA4A-450B-4F63-21C00626BEA6}"/>
+              </a:ext>
+            </a:extLst>
+          </p:cNvPr>
+          <p:cNvSpPr txBox="1">
+            <a:spLocks/>
+          </p:cNvSpPr>
+          <p:nvPr/>
+        </p:nvSpPr>
+        <p:spPr>
+          <a:xfrm>
+            <a:off x="234615" y="2571749"/>
+            <a:ext cx="7886700" cy="1870550"/>
+          </a:xfrm>
+          <a:prstGeom prst="rect">
+            <a:avLst/>
+          </a:prstGeom>
+          <a:noFill/>
+          <a:ln>
+            <a:noFill/>
+          </a:ln>
+        </p:spPr>
+        <p:txBody>
+          <a:bodyPr spcFirstLastPara="1" wrap="square" lIns="68575" tIns="34275" rIns="68575" bIns="34275" anchor="t" anchorCtr="0">
+            <a:noAutofit/>
+          </a:bodyPr>
+          <a:lstStyle>
+            <a:defPPr marR="0" lvl="0" algn="l" rtl="0">
+              <a:lnSpc>
+                <a:spcPct val="100000"/>
+              </a:lnSpc>
+              <a:spcBef>
+                <a:spcPts val="0"/>
+              </a:spcBef>
+              <a:spcAft>
+                <a:spcPts val="0"/>
+              </a:spcAft>
+            </a:defPPr>
+            <a:lvl1pPr marL="396000" marR="0" lvl="0" indent="-248400" algn="l" rtl="0">
+              <a:lnSpc>
+                <a:spcPct val="100000"/>
+              </a:lnSpc>
+              <a:spcBef>
+                <a:spcPts val="600"/>
+              </a:spcBef>
+              <a:spcAft>
+                <a:spcPts val="0"/>
+              </a:spcAft>
+              <a:buClr>
+                <a:schemeClr val="dk1"/>
+              </a:buClr>
+              <a:buSzPts val="2200"/>
+              <a:buFont typeface="Arial"/>
+              <a:buChar char="•"/>
+              <a:defRPr sz="2400" b="0" i="0" u="none" strike="noStrike" cap="none">
+                <a:solidFill>
+                  <a:schemeClr val="dk1"/>
+                </a:solidFill>
+                <a:latin typeface="Calibri"/>
+                <a:ea typeface="Calibri"/>
+                <a:cs typeface="Calibri"/>
+                <a:sym typeface="Calibri"/>
+              </a:defRPr>
+            </a:lvl1pPr>
+            <a:lvl2pPr marL="914400" marR="0" lvl="1" indent="-252000" algn="l" rtl="0">
+              <a:lnSpc>
+                <a:spcPct val="100000"/>
+              </a:lnSpc>
+              <a:spcBef>
+                <a:spcPts val="600"/>
+              </a:spcBef>
+              <a:spcAft>
+                <a:spcPts val="0"/>
+              </a:spcAft>
+              <a:buClr>
+                <a:schemeClr val="dk1"/>
+              </a:buClr>
+              <a:buSzPts val="1050"/>
+              <a:buFont typeface="Noto Sans Symbols"/>
+              <a:buChar char="■"/>
+              <a:defRPr sz="2200" b="0" i="0" u="none" strike="noStrike" cap="none">
+                <a:solidFill>
+                  <a:schemeClr val="dk1"/>
+                </a:solidFill>
+                <a:latin typeface="Calibri"/>
+                <a:ea typeface="Calibri"/>
+                <a:cs typeface="Calibri"/>
+                <a:sym typeface="Calibri"/>
+              </a:defRPr>
+            </a:lvl2pPr>
+            <a:lvl3pPr marL="1371600" marR="0" lvl="2" indent="-317500" algn="l" rtl="0">
+              <a:lnSpc>
+                <a:spcPct val="100000"/>
+              </a:lnSpc>
+              <a:spcBef>
+                <a:spcPts val="600"/>
+              </a:spcBef>
+              <a:spcAft>
+                <a:spcPts val="0"/>
+              </a:spcAft>
+              <a:buClr>
+                <a:schemeClr val="dk1"/>
+              </a:buClr>
+              <a:buSzPts val="1400"/>
+              <a:buFont typeface="Arial"/>
+              <a:buChar char="○"/>
+              <a:defRPr sz="1800" b="0" i="0" u="none" strike="noStrike" cap="none">
+                <a:solidFill>
+                  <a:schemeClr val="dk1"/>
+                </a:solidFill>
+                <a:latin typeface="Calibri"/>
+                <a:ea typeface="Calibri"/>
+                <a:cs typeface="Calibri"/>
+                <a:sym typeface="Calibri"/>
+              </a:defRPr>
+            </a:lvl3pPr>
+            <a:lvl4pPr marL="1828800" marR="0" lvl="3" indent="-317500" algn="l" rtl="0">
+              <a:lnSpc>
+                <a:spcPct val="90000"/>
+              </a:lnSpc>
+              <a:spcBef>
+                <a:spcPts val="400"/>
+              </a:spcBef>
+              <a:spcAft>
+                <a:spcPts val="0"/>
+              </a:spcAft>
+              <a:buClr>
+                <a:schemeClr val="dk1"/>
+              </a:buClr>
+              <a:buSzPts val="1400"/>
+              <a:buFont typeface="Arial"/>
+              <a:buChar char="•"/>
+              <a:defRPr sz="1400" b="0" i="0" u="none" strike="noStrike" cap="none">
+                <a:solidFill>
+                  <a:schemeClr val="dk1"/>
+                </a:solidFill>
+                <a:latin typeface="Calibri"/>
+                <a:ea typeface="Calibri"/>
+                <a:cs typeface="Calibri"/>
+                <a:sym typeface="Calibri"/>
+              </a:defRPr>
+            </a:lvl4pPr>
+            <a:lvl5pPr marL="2286000" marR="0" lvl="4" indent="-317500" algn="l" rtl="0">
+              <a:lnSpc>
+                <a:spcPct val="90000"/>
+              </a:lnSpc>
+              <a:spcBef>
+                <a:spcPts val="400"/>
+              </a:spcBef>
+              <a:spcAft>
+                <a:spcPts val="0"/>
+              </a:spcAft>
+              <a:buClr>
+                <a:schemeClr val="dk1"/>
+              </a:buClr>
+              <a:buSzPts val="1400"/>
+              <a:buFont typeface="Arial"/>
+              <a:buChar char="•"/>
+              <a:defRPr sz="1400" b="0" i="0" u="none" strike="noStrike" cap="none">
+                <a:solidFill>
+                  <a:schemeClr val="dk1"/>
+                </a:solidFill>
+                <a:latin typeface="Calibri"/>
+                <a:ea typeface="Calibri"/>
+                <a:cs typeface="Calibri"/>
+                <a:sym typeface="Calibri"/>
+              </a:defRPr>
+            </a:lvl5pPr>
+            <a:lvl6pPr marL="2743200" marR="0" lvl="5" indent="-317500" algn="l" rtl="0">
+              <a:lnSpc>
+                <a:spcPct val="90000"/>
+              </a:lnSpc>
+              <a:spcBef>
+                <a:spcPts val="400"/>
+              </a:spcBef>
+              <a:spcAft>
+                <a:spcPts val="0"/>
+              </a:spcAft>
+              <a:buClr>
+                <a:schemeClr val="dk1"/>
+              </a:buClr>
+              <a:buSzPts val="1400"/>
+              <a:buFont typeface="Arial"/>
+              <a:buChar char="•"/>
+              <a:defRPr sz="1400" b="0" i="0" u="none" strike="noStrike" cap="none">
+                <a:solidFill>
+                  <a:schemeClr val="dk1"/>
+                </a:solidFill>
+                <a:latin typeface="Calibri"/>
+                <a:ea typeface="Calibri"/>
+                <a:cs typeface="Calibri"/>
+                <a:sym typeface="Calibri"/>
+              </a:defRPr>
+            </a:lvl6pPr>
+            <a:lvl7pPr marL="3200400" marR="0" lvl="6" indent="-317500" algn="l" rtl="0">
+              <a:lnSpc>
+                <a:spcPct val="90000"/>
+              </a:lnSpc>
+              <a:spcBef>
+                <a:spcPts val="400"/>
+              </a:spcBef>
+              <a:spcAft>
+                <a:spcPts val="0"/>
+              </a:spcAft>
+              <a:buClr>
+                <a:schemeClr val="dk1"/>
+              </a:buClr>
+              <a:buSzPts val="1400"/>
+              <a:buFont typeface="Arial"/>
+              <a:buChar char="•"/>
+              <a:defRPr sz="1400" b="0" i="0" u="none" strike="noStrike" cap="none">
+                <a:solidFill>
+                  <a:schemeClr val="dk1"/>
+                </a:solidFill>
+                <a:latin typeface="Calibri"/>
+                <a:ea typeface="Calibri"/>
+                <a:cs typeface="Calibri"/>
+                <a:sym typeface="Calibri"/>
+              </a:defRPr>
+            </a:lvl7pPr>
+            <a:lvl8pPr marL="3657600" marR="0" lvl="7" indent="-317500" algn="l" rtl="0">
+              <a:lnSpc>
+                <a:spcPct val="90000"/>
+              </a:lnSpc>
+              <a:spcBef>
+                <a:spcPts val="400"/>
+              </a:spcBef>
+              <a:spcAft>
+                <a:spcPts val="0"/>
+              </a:spcAft>
+              <a:buClr>
+                <a:schemeClr val="dk1"/>
+              </a:buClr>
+              <a:buSzPts val="1400"/>
+              <a:buFont typeface="Arial"/>
+              <a:buChar char="•"/>
+              <a:defRPr sz="1400" b="0" i="0" u="none" strike="noStrike" cap="none">
+                <a:solidFill>
+                  <a:schemeClr val="dk1"/>
+                </a:solidFill>
+                <a:latin typeface="Calibri"/>
+                <a:ea typeface="Calibri"/>
+                <a:cs typeface="Calibri"/>
+                <a:sym typeface="Calibri"/>
+              </a:defRPr>
+            </a:lvl8pPr>
+            <a:lvl9pPr marL="4114800" marR="0" lvl="8" indent="-317500" algn="l" rtl="0">
+              <a:lnSpc>
+                <a:spcPct val="90000"/>
+              </a:lnSpc>
+              <a:spcBef>
+                <a:spcPts val="400"/>
+              </a:spcBef>
+              <a:spcAft>
+                <a:spcPts val="0"/>
+              </a:spcAft>
+              <a:buClr>
+                <a:schemeClr val="dk1"/>
+              </a:buClr>
+              <a:buSzPts val="1400"/>
+              <a:buFont typeface="Arial"/>
+              <a:buChar char="•"/>
+              <a:defRPr sz="1400" b="0" i="0" u="none" strike="noStrike" cap="none">
+                <a:solidFill>
+                  <a:schemeClr val="dk1"/>
+                </a:solidFill>
+                <a:latin typeface="Calibri"/>
+                <a:ea typeface="Calibri"/>
+                <a:cs typeface="Calibri"/>
+                <a:sym typeface="Calibri"/>
+              </a:defRPr>
+            </a:lvl9pPr>
+          </a:lstStyle>
+          <a:p>
+            <a:pPr marL="147600" indent="0">
+              <a:buNone/>
+            </a:pPr>
+            <a:r>
+              <a:rPr lang="en-US" altLang="zh-TW" sz="2000" b="1" dirty="0"/>
+              <a:t>Replat result</a:t>
+            </a:r>
+            <a:br>
+              <a:rPr lang="en-US" altLang="zh-TW" sz="2000" b="1" dirty="0"/>
+            </a:br>
+            <a:r>
+              <a:rPr lang="zh-TW" altLang="zh-TW" sz="2000" dirty="0"/>
+              <a:t>Task completion: 619 / 619</a:t>
+            </a:r>
+            <a:br>
+              <a:rPr lang="zh-TW" altLang="zh-TW" sz="2000" dirty="0"/>
+            </a:br>
+            <a:r>
+              <a:rPr lang="zh-TW" altLang="zh-TW" sz="2000" dirty="0"/>
+              <a:t>Sensor/Slave → Master: success</a:t>
+            </a:r>
+            <a:br>
+              <a:rPr lang="zh-TW" altLang="zh-TW" sz="2000" dirty="0"/>
+            </a:br>
+            <a:r>
+              <a:rPr lang="zh-TW" altLang="zh-TW" sz="2000" dirty="0"/>
+              <a:t>Master buffer: 1,238,529 B</a:t>
+            </a:r>
+            <a:br>
+              <a:rPr lang="zh-TW" altLang="zh-TW" sz="2000" dirty="0"/>
+            </a:br>
+            <a:r>
+              <a:rPr lang="zh-TW" altLang="zh-TW" sz="2000" dirty="0"/>
+              <a:t>Master → LEO Rx: 1,238,529 B</a:t>
+            </a:r>
+            <a:br>
+              <a:rPr lang="zh-TW" altLang="zh-TW" sz="2000" dirty="0"/>
+            </a:br>
+            <a:r>
+              <a:rPr lang="zh-TW" altLang="zh-TW" sz="2000" dirty="0"/>
+              <a:t>LEO done: YES</a:t>
+            </a:r>
+            <a:r>
+              <a:rPr lang="en-US" altLang="zh-TW" sz="2000" dirty="0"/>
+              <a:t>; </a:t>
+            </a:r>
+            <a:r>
+              <a:rPr lang="zh-TW" altLang="zh-TW" sz="2000" dirty="0"/>
+              <a:t>Deadline met: YES</a:t>
+            </a:r>
+            <a:endParaRPr lang="zh-TW" altLang="zh-TW" sz="2000" b="1" dirty="0"/>
+          </a:p>
+        </p:txBody>
+      </p:sp>
+      <p:pic>
+        <p:nvPicPr>
+          <p:cNvPr id="6" name="圖片 5">
+            <a:extLst>
+              <a:ext uri="{FF2B5EF4-FFF2-40B4-BE49-F238E27FC236}">
+                <a16:creationId xmlns:a16="http://schemas.microsoft.com/office/drawing/2014/main" id="{A70C8CBA-47CF-C952-F37F-75DFEBCC1388}"/>
+              </a:ext>
+            </a:extLst>
+          </p:cNvPr>
+          <p:cNvPicPr>
+            <a:picLocks noChangeAspect="1"/>
+          </p:cNvPicPr>
+          <p:nvPr/>
+        </p:nvPicPr>
+        <p:blipFill>
+          <a:blip r:embed="rId2"/>
+          <a:stretch>
+            <a:fillRect/>
+          </a:stretch>
+        </p:blipFill>
+        <p:spPr>
+          <a:xfrm>
+            <a:off x="4617261" y="2571749"/>
+            <a:ext cx="3681373" cy="2166549"/>
+          </a:xfrm>
+          <a:prstGeom prst="rect">
+            <a:avLst/>
+          </a:prstGeom>
+        </p:spPr>
+      </p:pic>
+      <p:pic>
+        <p:nvPicPr>
+          <p:cNvPr id="11" name="圖片 10">
+            <a:extLst>
+              <a:ext uri="{FF2B5EF4-FFF2-40B4-BE49-F238E27FC236}">
+                <a16:creationId xmlns:a16="http://schemas.microsoft.com/office/drawing/2014/main" id="{933DA310-1FC1-7003-2993-B2C9FEBE21A6}"/>
+              </a:ext>
+            </a:extLst>
+          </p:cNvPr>
+          <p:cNvPicPr>
+            <a:picLocks noChangeAspect="1"/>
+          </p:cNvPicPr>
+          <p:nvPr/>
+        </p:nvPicPr>
+        <p:blipFill>
+          <a:blip r:embed="rId3"/>
+          <a:stretch>
+            <a:fillRect/>
+          </a:stretch>
+        </p:blipFill>
+        <p:spPr>
+          <a:xfrm>
+            <a:off x="3835907" y="1073302"/>
+            <a:ext cx="5244083" cy="1026161"/>
+          </a:xfrm>
+          <a:prstGeom prst="rect">
+            <a:avLst/>
+          </a:prstGeom>
+        </p:spPr>
+      </p:pic>
     </p:spTree>
     <p:extLst>
       <p:ext uri="{BB962C8B-B14F-4D97-AF65-F5344CB8AC3E}">
@@ -18788,10 +19204,16 @@
         <p:nvGraphicFramePr>
           <p:cNvPr id="51" name="VerifyTable"/>
           <p:cNvGraphicFramePr/>
-          <p:nvPr/>
+          <p:nvPr>
+            <p:extLst>
+              <p:ext uri="{D42A27DB-BD31-4B8C-83A1-F6EECF244321}">
+                <p14:modId xmlns:p14="http://schemas.microsoft.com/office/powerpoint/2010/main" val="3346713128"/>
+              </p:ext>
+            </p:extLst>
+          </p:nvPr>
         </p:nvGraphicFramePr>
         <p:xfrm>
-          <a:off x="548640" y="3063240"/>
+          <a:off x="446049" y="2571750"/>
           <a:ext cx="7955280" cy="1463040"/>
         </p:xfrm>
         <a:graphic>
@@ -19930,6 +20352,54 @@
           </a:graphicData>
         </a:graphic>
       </p:graphicFrame>
+      <p:sp>
+        <p:nvSpPr>
+          <p:cNvPr id="5" name="文字方塊 4">
+            <a:extLst>
+              <a:ext uri="{FF2B5EF4-FFF2-40B4-BE49-F238E27FC236}">
+                <a16:creationId xmlns:a16="http://schemas.microsoft.com/office/drawing/2014/main" id="{85E10A05-0536-7B25-017B-09878615710F}"/>
+              </a:ext>
+            </a:extLst>
+          </p:cNvPr>
+          <p:cNvSpPr txBox="1"/>
+          <p:nvPr/>
+        </p:nvSpPr>
+        <p:spPr>
+          <a:xfrm>
+            <a:off x="1381233" y="4305301"/>
+            <a:ext cx="6380831" cy="307777"/>
+          </a:xfrm>
+          <a:prstGeom prst="rect">
+            <a:avLst/>
+          </a:prstGeom>
+          <a:noFill/>
+        </p:spPr>
+        <p:txBody>
+          <a:bodyPr wrap="square" rtlCol="0">
+            <a:spAutoFit/>
+          </a:bodyPr>
+          <a:lstStyle/>
+          <a:p>
+            <a:r>
+              <a:rPr lang="zh-TW" altLang="zh-TW" b="1" dirty="0">
+                <a:solidFill>
+                  <a:schemeClr val="accent3">
+                    <a:lumMod val="50000"/>
+                  </a:schemeClr>
+                </a:solidFill>
+              </a:rPr>
+              <a:t>Our role: build an NS-3 validation pipeline for scheduler-generated traces.</a:t>
+            </a:r>
+            <a:endParaRPr lang="zh-TW" altLang="en-US" b="1" dirty="0">
+              <a:solidFill>
+                <a:schemeClr val="accent3">
+                  <a:lumMod val="50000"/>
+                </a:schemeClr>
+              </a:solidFill>
+            </a:endParaRPr>
+          </a:p>
+        </p:txBody>
+      </p:sp>
     </p:spTree>
     <p:extLst>
       <p:ext uri="{BB962C8B-B14F-4D97-AF65-F5344CB8AC3E}">

--- a/docs/專題期末報告.pptx
+++ b/docs/專題期末報告.pptx
@@ -5,45 +5,47 @@
     <p:sldMasterId id="2147483648" r:id="rId1"/>
   </p:sldMasterIdLst>
   <p:notesMasterIdLst>
-    <p:notesMasterId r:id="rId13"/>
+    <p:notesMasterId r:id="rId15"/>
   </p:notesMasterIdLst>
   <p:handoutMasterIdLst>
-    <p:handoutMasterId r:id="rId14"/>
+    <p:handoutMasterId r:id="rId16"/>
   </p:handoutMasterIdLst>
   <p:sldIdLst>
     <p:sldId id="256" r:id="rId2"/>
     <p:sldId id="323" r:id="rId3"/>
-    <p:sldId id="329" r:id="rId4"/>
+    <p:sldId id="383" r:id="rId4"/>
     <p:sldId id="331" r:id="rId5"/>
     <p:sldId id="369" r:id="rId6"/>
     <p:sldId id="376" r:id="rId7"/>
     <p:sldId id="375" r:id="rId8"/>
     <p:sldId id="377" r:id="rId9"/>
-    <p:sldId id="378" r:id="rId10"/>
-    <p:sldId id="379" r:id="rId11"/>
-    <p:sldId id="351" r:id="rId12"/>
+    <p:sldId id="379" r:id="rId10"/>
+    <p:sldId id="381" r:id="rId11"/>
+    <p:sldId id="382" r:id="rId12"/>
+    <p:sldId id="378" r:id="rId13"/>
+    <p:sldId id="351" r:id="rId14"/>
   </p:sldIdLst>
   <p:sldSz cx="9144000" cy="5143500" type="screen16x9"/>
   <p:notesSz cx="9874250" cy="6797675"/>
   <p:embeddedFontLst>
     <p:embeddedFont>
-      <p:font typeface="Helvetica Neue" panose="020B0600070205080204" charset="0"/>
-      <p:regular r:id="rId15"/>
-      <p:bold r:id="rId16"/>
-      <p:italic r:id="rId17"/>
-      <p:boldItalic r:id="rId18"/>
+      <p:font typeface="Microsoft JhengHei" panose="020B0604030504040204" pitchFamily="34" charset="-120"/>
+      <p:regular r:id="rId17"/>
+      <p:bold r:id="rId18"/>
     </p:embeddedFont>
     <p:embeddedFont>
-      <p:font typeface="Microsoft JhengHei" panose="020B0604030504040204" pitchFamily="34" charset="-120"/>
+      <p:font typeface="Helvetica Neue" panose="02020500000000000000" charset="0"/>
       <p:regular r:id="rId19"/>
       <p:bold r:id="rId20"/>
+      <p:italic r:id="rId21"/>
+      <p:boldItalic r:id="rId22"/>
     </p:embeddedFont>
     <p:embeddedFont>
-      <p:font typeface="Noto Sans Symbols" panose="020B0600070205080204" charset="0"/>
-      <p:regular r:id="rId21"/>
-      <p:bold r:id="rId22"/>
-      <p:italic r:id="rId23"/>
-      <p:boldItalic r:id="rId24"/>
+      <p:font typeface="Noto Sans Symbols" panose="02020500000000000000" charset="0"/>
+      <p:regular r:id="rId23"/>
+      <p:bold r:id="rId24"/>
+      <p:italic r:id="rId25"/>
+      <p:boldItalic r:id="rId26"/>
     </p:embeddedFont>
   </p:embeddedFontLst>
   <p:defaultTextStyle>
@@ -294,7 +296,7 @@
       <p15:notesGuideLst xmlns:p15="http://schemas.microsoft.com/office/powerpoint/2012/main"/>
     </p:ext>
     <p:ext uri="GoogleSlidesCustomDataVersion2">
-      <go:slidesCustomData xmlns="" xmlns:mc="http://schemas.openxmlformats.org/markup-compatibility/2006" xmlns:mv="urn:schemas-microsoft-com:mac:vml" xmlns:c="http://schemas.openxmlformats.org/drawingml/2006/chart" xmlns:dgm="http://schemas.openxmlformats.org/drawingml/2006/diagram" xmlns:o="urn:schemas-microsoft-com:office:office" xmlns:v="urn:schemas-microsoft-com:vml" xmlns:pvml="urn:schemas-microsoft-com:office:powerpoint" xmlns:com="http://schemas.openxmlformats.org/drawingml/2006/compatibility" xmlns:p14="http://schemas.microsoft.com/office/powerpoint/2010/main" xmlns:p15="http://schemas.microsoft.com/office/powerpoint/2012/main" xmlns:ahyp="http://schemas.microsoft.com/office/drawing/2018/hyperlinkcolor" xmlns:go="http://customooxmlschemas.google.com/" r:id="rId64" roundtripDataSignature="AMtx7mgNlel+ZygXPW1yK/LuWkbTK5rvsg=="/>
+      <go:slidesCustomData xmlns:go="http://customooxmlschemas.google.com/" xmlns:ahyp="http://schemas.microsoft.com/office/drawing/2018/hyperlinkcolor" xmlns:p15="http://schemas.microsoft.com/office/powerpoint/2012/main" xmlns:p14="http://schemas.microsoft.com/office/powerpoint/2010/main" xmlns:com="http://schemas.openxmlformats.org/drawingml/2006/compatibility" xmlns:pvml="urn:schemas-microsoft-com:office:powerpoint" xmlns:v="urn:schemas-microsoft-com:vml" xmlns:o="urn:schemas-microsoft-com:office:office" xmlns:dgm="http://schemas.openxmlformats.org/drawingml/2006/diagram" xmlns:c="http://schemas.openxmlformats.org/drawingml/2006/chart" xmlns:mv="urn:schemas-microsoft-com:mac:vml" xmlns:mc="http://schemas.openxmlformats.org/markup-compatibility/2006" xmlns="" r:id="rId64" roundtripDataSignature="AMtx7mgNlel+ZygXPW1yK/LuWkbTK5rvsg=="/>
     </p:ext>
   </p:extLst>
 </p:presentation>
@@ -13978,6 +13980,496 @@
         <p:cNvPr id="1" name="">
           <a:extLst>
             <a:ext uri="{FF2B5EF4-FFF2-40B4-BE49-F238E27FC236}">
+              <a16:creationId xmlns:a16="http://schemas.microsoft.com/office/drawing/2014/main" id="{D5FAAFED-2AC9-8410-C3B8-BC5523F4E365}"/>
+            </a:ext>
+          </a:extLst>
+        </p:cNvPr>
+        <p:cNvGrpSpPr/>
+        <p:nvPr/>
+      </p:nvGrpSpPr>
+      <p:grpSpPr>
+        <a:xfrm>
+          <a:off x="0" y="0"/>
+          <a:ext cx="0" cy="0"/>
+          <a:chOff x="0" y="0"/>
+          <a:chExt cx="0" cy="0"/>
+        </a:xfrm>
+      </p:grpSpPr>
+      <p:sp>
+        <p:nvSpPr>
+          <p:cNvPr id="2" name="標題 1">
+            <a:extLst>
+              <a:ext uri="{FF2B5EF4-FFF2-40B4-BE49-F238E27FC236}">
+                <a16:creationId xmlns:a16="http://schemas.microsoft.com/office/drawing/2014/main" id="{33F4EED2-97E1-FDA4-BD2A-1EDAAC915656}"/>
+              </a:ext>
+            </a:extLst>
+          </p:cNvPr>
+          <p:cNvSpPr>
+            <a:spLocks noGrp="1"/>
+          </p:cNvSpPr>
+          <p:nvPr>
+            <p:ph type="title"/>
+          </p:nvPr>
+        </p:nvSpPr>
+        <p:spPr/>
+        <p:txBody>
+          <a:bodyPr>
+            <a:normAutofit/>
+          </a:bodyPr>
+          <a:lstStyle/>
+          <a:p>
+            <a:r>
+              <a:rPr lang="en-US" altLang="zh-TW" sz="3200" dirty="0">
+                <a:latin typeface="Times New Roman" panose="02020603050405020304" pitchFamily="18" charset="0"/>
+                <a:ea typeface="標楷體" panose="03000509000000000000" pitchFamily="65" charset="-120"/>
+                <a:cs typeface="Times New Roman" panose="02020603050405020304" pitchFamily="18" charset="0"/>
+              </a:rPr>
+              <a:t>Topo Evaluation: Result</a:t>
+            </a:r>
+            <a:endParaRPr lang="zh-TW" altLang="en-US" sz="3200" dirty="0">
+              <a:latin typeface="Times New Roman" panose="02020603050405020304" pitchFamily="18" charset="0"/>
+              <a:ea typeface="標楷體" panose="03000509000000000000" pitchFamily="65" charset="-120"/>
+              <a:cs typeface="Times New Roman" panose="02020603050405020304" pitchFamily="18" charset="0"/>
+            </a:endParaRPr>
+          </a:p>
+        </p:txBody>
+      </p:sp>
+      <p:sp>
+        <p:nvSpPr>
+          <p:cNvPr id="4" name="投影片編號版面配置區 3">
+            <a:extLst>
+              <a:ext uri="{FF2B5EF4-FFF2-40B4-BE49-F238E27FC236}">
+                <a16:creationId xmlns:a16="http://schemas.microsoft.com/office/drawing/2014/main" id="{A6BCF61D-FEDA-C171-AA05-C157F7887EB9}"/>
+              </a:ext>
+            </a:extLst>
+          </p:cNvPr>
+          <p:cNvSpPr>
+            <a:spLocks noGrp="1"/>
+          </p:cNvSpPr>
+          <p:nvPr>
+            <p:ph type="sldNum" idx="12"/>
+          </p:nvPr>
+        </p:nvSpPr>
+        <p:spPr/>
+        <p:txBody>
+          <a:bodyPr/>
+          <a:lstStyle/>
+          <a:p>
+            <a:pPr marL="0" lvl="0" indent="0" algn="r" rtl="0">
+              <a:spcBef>
+                <a:spcPts val="0"/>
+              </a:spcBef>
+              <a:spcAft>
+                <a:spcPts val="0"/>
+              </a:spcAft>
+              <a:buNone/>
+            </a:pPr>
+            <a:fld id="{00000000-1234-1234-1234-123412341234}" type="slidenum">
+              <a:rPr lang="en-US" smtClean="0"/>
+              <a:t>10</a:t>
+            </a:fld>
+            <a:endParaRPr lang="en-US"/>
+          </a:p>
+        </p:txBody>
+      </p:sp>
+      <p:sp>
+        <p:nvSpPr>
+          <p:cNvPr id="70" name="stat70">
+            <a:extLst>
+              <a:ext uri="{FF2B5EF4-FFF2-40B4-BE49-F238E27FC236}">
+                <a16:creationId xmlns:a16="http://schemas.microsoft.com/office/drawing/2014/main" id="{EC8862A8-BA9C-4356-3B50-D3619D52F49B}"/>
+              </a:ext>
+            </a:extLst>
+          </p:cNvPr>
+          <p:cNvSpPr/>
+          <p:nvPr/>
+        </p:nvSpPr>
+        <p:spPr>
+          <a:xfrm>
+            <a:off x="457200" y="1921386"/>
+            <a:ext cx="2697480" cy="2057400"/>
+          </a:xfrm>
+          <a:prstGeom prst="roundRect">
+            <a:avLst>
+              <a:gd name="adj" fmla="val 6000"/>
+            </a:avLst>
+          </a:prstGeom>
+          <a:solidFill>
+            <a:srgbClr val="E7F4E9"/>
+          </a:solidFill>
+          <a:ln w="15875">
+            <a:solidFill>
+              <a:srgbClr val="7DBF86"/>
+            </a:solidFill>
+          </a:ln>
+        </p:spPr>
+        <p:txBody>
+          <a:bodyPr rtlCol="0" anchor="ctr"/>
+          <a:lstStyle/>
+          <a:p>
+            <a:pPr algn="ctr"/>
+            <a:r>
+              <a:rPr lang="en-US" sz="2600" b="1" dirty="0">
+                <a:solidFill>
+                  <a:srgbClr val="2E7D32"/>
+                </a:solidFill>
+              </a:rPr>
+              <a:t>619</a:t>
+            </a:r>
+            <a:r>
+              <a:rPr lang="en-US" sz="2600" b="1" dirty="0">
+                <a:solidFill>
+                  <a:srgbClr val="2E7D32"/>
+                </a:solidFill>
+                <a:latin typeface="Arial"/>
+                <a:cs typeface="Arial"/>
+              </a:rPr>
+              <a:t> / 619</a:t>
+            </a:r>
+          </a:p>
+          <a:p>
+            <a:pPr algn="ctr">
+              <a:spcBef>
+                <a:spcPts val="300"/>
+              </a:spcBef>
+            </a:pPr>
+            <a:r>
+              <a:rPr lang="en-US" sz="1300" b="1" dirty="0">
+                <a:solidFill>
+                  <a:srgbClr val="404040"/>
+                </a:solidFill>
+                <a:latin typeface="Arial"/>
+                <a:cs typeface="Arial"/>
+              </a:rPr>
+              <a:t>tasks met deadline</a:t>
+            </a:r>
+          </a:p>
+          <a:p>
+            <a:pPr algn="ctr">
+              <a:spcBef>
+                <a:spcPts val="200"/>
+              </a:spcBef>
+            </a:pPr>
+            <a:r>
+              <a:rPr lang="en-US" sz="1050" i="1" dirty="0">
+                <a:solidFill>
+                  <a:srgbClr val="595959"/>
+                </a:solidFill>
+                <a:latin typeface="Arial"/>
+                <a:cs typeface="Arial"/>
+              </a:rPr>
+              <a:t>finish 3486.36 s  &lt;  3600 s</a:t>
+            </a:r>
+          </a:p>
+        </p:txBody>
+      </p:sp>
+      <p:sp>
+        <p:nvSpPr>
+          <p:cNvPr id="71" name="stat71">
+            <a:extLst>
+              <a:ext uri="{FF2B5EF4-FFF2-40B4-BE49-F238E27FC236}">
+                <a16:creationId xmlns:a16="http://schemas.microsoft.com/office/drawing/2014/main" id="{A114D7E4-F046-59AD-90AC-BF1A18054107}"/>
+              </a:ext>
+            </a:extLst>
+          </p:cNvPr>
+          <p:cNvSpPr/>
+          <p:nvPr/>
+        </p:nvSpPr>
+        <p:spPr>
+          <a:xfrm>
+            <a:off x="3246120" y="1921386"/>
+            <a:ext cx="2697480" cy="2057400"/>
+          </a:xfrm>
+          <a:prstGeom prst="roundRect">
+            <a:avLst>
+              <a:gd name="adj" fmla="val 6000"/>
+            </a:avLst>
+          </a:prstGeom>
+          <a:solidFill>
+            <a:srgbClr val="E8F1FA"/>
+          </a:solidFill>
+          <a:ln w="15875">
+            <a:solidFill>
+              <a:srgbClr val="6FA8DC"/>
+            </a:solidFill>
+          </a:ln>
+        </p:spPr>
+        <p:txBody>
+          <a:bodyPr rtlCol="0" anchor="ctr"/>
+          <a:lstStyle/>
+          <a:p>
+            <a:pPr algn="ctr"/>
+            <a:r>
+              <a:rPr lang="en-US" sz="2600" b="1" dirty="0">
+                <a:solidFill>
+                  <a:srgbClr val="1F5FA8"/>
+                </a:solidFill>
+                <a:latin typeface="Arial"/>
+                <a:cs typeface="Arial"/>
+              </a:rPr>
+              <a:t>1,238,529 B</a:t>
+            </a:r>
+          </a:p>
+          <a:p>
+            <a:pPr algn="ctr">
+              <a:spcBef>
+                <a:spcPts val="300"/>
+              </a:spcBef>
+            </a:pPr>
+            <a:r>
+              <a:rPr lang="en-US" sz="1300" b="1" dirty="0">
+                <a:solidFill>
+                  <a:srgbClr val="404040"/>
+                </a:solidFill>
+                <a:latin typeface="Arial"/>
+                <a:cs typeface="Arial"/>
+              </a:rPr>
+              <a:t>handed off to CH UAV</a:t>
+            </a:r>
+          </a:p>
+          <a:p>
+            <a:pPr algn="ctr">
+              <a:spcBef>
+                <a:spcPts val="200"/>
+              </a:spcBef>
+            </a:pPr>
+            <a:r>
+              <a:rPr lang="en-US" sz="1050" i="1" dirty="0">
+                <a:solidFill>
+                  <a:srgbClr val="595959"/>
+                </a:solidFill>
+                <a:latin typeface="Arial"/>
+                <a:cs typeface="Arial"/>
+              </a:rPr>
+              <a:t>via master_buffer_trace.csv</a:t>
+            </a:r>
+          </a:p>
+        </p:txBody>
+      </p:sp>
+      <p:sp>
+        <p:nvSpPr>
+          <p:cNvPr id="72" name="stat72">
+            <a:extLst>
+              <a:ext uri="{FF2B5EF4-FFF2-40B4-BE49-F238E27FC236}">
+                <a16:creationId xmlns:a16="http://schemas.microsoft.com/office/drawing/2014/main" id="{E49C843F-1FF4-0E41-A284-B299875D6043}"/>
+              </a:ext>
+            </a:extLst>
+          </p:cNvPr>
+          <p:cNvSpPr/>
+          <p:nvPr/>
+        </p:nvSpPr>
+        <p:spPr>
+          <a:xfrm>
+            <a:off x="6035040" y="1921386"/>
+            <a:ext cx="2697480" cy="2057400"/>
+          </a:xfrm>
+          <a:prstGeom prst="roundRect">
+            <a:avLst>
+              <a:gd name="adj" fmla="val 6000"/>
+            </a:avLst>
+          </a:prstGeom>
+          <a:solidFill>
+            <a:srgbClr val="FFF3DC"/>
+          </a:solidFill>
+          <a:ln w="15875">
+            <a:solidFill>
+              <a:srgbClr val="E0A93C"/>
+            </a:solidFill>
+          </a:ln>
+        </p:spPr>
+        <p:txBody>
+          <a:bodyPr rtlCol="0" anchor="ctr"/>
+          <a:lstStyle/>
+          <a:p>
+            <a:pPr algn="ctr"/>
+            <a:r>
+              <a:rPr lang="en-US" sz="2600" b="1" dirty="0">
+                <a:solidFill>
+                  <a:srgbClr val="B5781C"/>
+                </a:solidFill>
+                <a:latin typeface="Arial"/>
+                <a:cs typeface="Arial"/>
+              </a:rPr>
+              <a:t>leo_done = YES</a:t>
+            </a:r>
+          </a:p>
+          <a:p>
+            <a:pPr algn="ctr">
+              <a:spcBef>
+                <a:spcPts val="300"/>
+              </a:spcBef>
+            </a:pPr>
+            <a:r>
+              <a:rPr lang="en-US" sz="1300" b="1" dirty="0">
+                <a:solidFill>
+                  <a:srgbClr val="404040"/>
+                </a:solidFill>
+                <a:latin typeface="Arial"/>
+                <a:cs typeface="Arial"/>
+              </a:rPr>
+              <a:t>uploaded to LEO</a:t>
+            </a:r>
+          </a:p>
+          <a:p>
+            <a:pPr algn="ctr">
+              <a:spcBef>
+                <a:spcPts val="300"/>
+              </a:spcBef>
+            </a:pPr>
+            <a:r>
+              <a:rPr lang="en-US" altLang="zh-TW" sz="1050" i="1" dirty="0">
+                <a:solidFill>
+                  <a:srgbClr val="595959"/>
+                </a:solidFill>
+              </a:rPr>
+              <a:t>Effective throughput = 121.048 Mbps</a:t>
+            </a:r>
+          </a:p>
+          <a:p>
+            <a:pPr algn="ctr">
+              <a:spcBef>
+                <a:spcPts val="300"/>
+              </a:spcBef>
+            </a:pPr>
+            <a:r>
+              <a:rPr lang="en-US" sz="1050" i="1" dirty="0">
+                <a:solidFill>
+                  <a:srgbClr val="595959"/>
+                </a:solidFill>
+                <a:latin typeface="Arial"/>
+                <a:cs typeface="Arial"/>
+              </a:rPr>
+              <a:t>Duration = 81.854 </a:t>
+            </a:r>
+            <a:r>
+              <a:rPr lang="en-US" sz="1050" i="1" dirty="0" err="1">
+                <a:solidFill>
+                  <a:srgbClr val="595959"/>
+                </a:solidFill>
+                <a:latin typeface="Arial"/>
+                <a:cs typeface="Arial"/>
+              </a:rPr>
+              <a:t>ms</a:t>
+            </a:r>
+            <a:endParaRPr lang="en-US" sz="1050" dirty="0">
+              <a:solidFill>
+                <a:srgbClr val="404040"/>
+              </a:solidFill>
+              <a:latin typeface="Arial"/>
+              <a:cs typeface="Arial"/>
+            </a:endParaRPr>
+          </a:p>
+        </p:txBody>
+      </p:sp>
+      <p:sp>
+        <p:nvSpPr>
+          <p:cNvPr id="73" name="takeaway">
+            <a:extLst>
+              <a:ext uri="{FF2B5EF4-FFF2-40B4-BE49-F238E27FC236}">
+                <a16:creationId xmlns:a16="http://schemas.microsoft.com/office/drawing/2014/main" id="{D972EE02-F075-697E-E64E-F9BFDA10FE9C}"/>
+              </a:ext>
+            </a:extLst>
+          </p:cNvPr>
+          <p:cNvSpPr/>
+          <p:nvPr/>
+        </p:nvSpPr>
+        <p:spPr>
+          <a:xfrm>
+            <a:off x="457200" y="978508"/>
+            <a:ext cx="8275320" cy="548640"/>
+          </a:xfrm>
+          <a:prstGeom prst="rect">
+            <a:avLst/>
+          </a:prstGeom>
+          <a:noFill/>
+        </p:spPr>
+        <p:txBody>
+          <a:bodyPr rtlCol="0" anchor="ctr"/>
+          <a:lstStyle/>
+          <a:p>
+            <a:pPr algn="ctr"/>
+            <a:r>
+              <a:rPr lang="en-US" sz="2000" dirty="0">
+                <a:solidFill>
+                  <a:schemeClr val="tx1"/>
+                </a:solidFill>
+                <a:latin typeface="Calibri" panose="020F0502020204030204" pitchFamily="34" charset="0"/>
+                <a:ea typeface="Calibri" panose="020F0502020204030204" pitchFamily="34" charset="0"/>
+                <a:cs typeface="Calibri" panose="020F0502020204030204" pitchFamily="34" charset="0"/>
+              </a:rPr>
+              <a:t>One CSV decouples the two simulators</a:t>
+            </a:r>
+            <a:r>
+              <a:rPr lang="en-US" altLang="zh-TW" sz="2000" dirty="0">
+                <a:solidFill>
+                  <a:schemeClr val="tx1"/>
+                </a:solidFill>
+                <a:latin typeface="Calibri" panose="020F0502020204030204" pitchFamily="34" charset="0"/>
+                <a:ea typeface="Calibri" panose="020F0502020204030204" pitchFamily="34" charset="0"/>
+                <a:cs typeface="Calibri" panose="020F0502020204030204" pitchFamily="34" charset="0"/>
+              </a:rPr>
+              <a:t>:</a:t>
+            </a:r>
+          </a:p>
+          <a:p>
+            <a:pPr algn="ctr"/>
+            <a:r>
+              <a:rPr lang="en-US" sz="2000" dirty="0">
+                <a:solidFill>
+                  <a:schemeClr val="tx1"/>
+                </a:solidFill>
+                <a:latin typeface="Calibri" panose="020F0502020204030204" pitchFamily="34" charset="0"/>
+                <a:ea typeface="Calibri" panose="020F0502020204030204" pitchFamily="34" charset="0"/>
+                <a:cs typeface="Calibri" panose="020F0502020204030204" pitchFamily="34" charset="0"/>
+              </a:rPr>
+              <a:t> a </a:t>
+            </a:r>
+            <a:r>
+              <a:rPr lang="en-US" sz="2000" b="1" dirty="0">
+                <a:solidFill>
+                  <a:schemeClr val="accent2"/>
+                </a:solidFill>
+                <a:latin typeface="Calibri" panose="020F0502020204030204" pitchFamily="34" charset="0"/>
+                <a:ea typeface="Calibri" panose="020F0502020204030204" pitchFamily="34" charset="0"/>
+                <a:cs typeface="Calibri" panose="020F0502020204030204" pitchFamily="34" charset="0"/>
+              </a:rPr>
+              <a:t>reusable framework</a:t>
+            </a:r>
+            <a:r>
+              <a:rPr lang="en-US" sz="2000" dirty="0">
+                <a:solidFill>
+                  <a:schemeClr val="tx1"/>
+                </a:solidFill>
+                <a:latin typeface="Calibri" panose="020F0502020204030204" pitchFamily="34" charset="0"/>
+                <a:ea typeface="Calibri" panose="020F0502020204030204" pitchFamily="34" charset="0"/>
+                <a:cs typeface="Calibri" panose="020F0502020204030204" pitchFamily="34" charset="0"/>
+              </a:rPr>
+              <a:t> for any schedule</a:t>
+            </a:r>
+          </a:p>
+        </p:txBody>
+      </p:sp>
+    </p:spTree>
+    <p:extLst>
+      <p:ext uri="{BB962C8B-B14F-4D97-AF65-F5344CB8AC3E}">
+        <p14:creationId xmlns:p14="http://schemas.microsoft.com/office/powerpoint/2010/main" val="1424956957"/>
+      </p:ext>
+    </p:extLst>
+  </p:cSld>
+  <p:clrMapOvr>
+    <a:masterClrMapping/>
+  </p:clrMapOvr>
+</p:sld>
+</file>
+
+<file path=ppt/slides/slide11.xml><?xml version="1.0" encoding="utf-8"?>
+<p:sld xmlns:a="http://schemas.openxmlformats.org/drawingml/2006/main" xmlns:r="http://schemas.openxmlformats.org/officeDocument/2006/relationships" xmlns:p="http://schemas.openxmlformats.org/presentationml/2006/main" show="0">
+  <p:cSld>
+    <p:spTree>
+      <p:nvGrpSpPr>
+        <p:cNvPr id="1" name="">
+          <a:extLst>
+            <a:ext uri="{FF2B5EF4-FFF2-40B4-BE49-F238E27FC236}">
               <a16:creationId xmlns:a16="http://schemas.microsoft.com/office/drawing/2014/main" id="{73843AB9-F164-B994-FBDF-61FD16A1998A}"/>
             </a:ext>
           </a:extLst>
@@ -14064,7 +14556,7 @@
             </a:pPr>
             <a:fld id="{00000000-1234-1234-1234-123412341234}" type="slidenum">
               <a:rPr lang="en-US" smtClean="0"/>
-              <a:t>10</a:t>
+              <a:t>11</a:t>
             </a:fld>
             <a:endParaRPr lang="en-US"/>
           </a:p>
@@ -14533,7 +15025,7 @@
     </p:spTree>
     <p:extLst>
       <p:ext uri="{BB962C8B-B14F-4D97-AF65-F5344CB8AC3E}">
-        <p14:creationId xmlns:p14="http://schemas.microsoft.com/office/powerpoint/2010/main" val="1131897745"/>
+        <p14:creationId xmlns:p14="http://schemas.microsoft.com/office/powerpoint/2010/main" val="2676522340"/>
       </p:ext>
     </p:extLst>
   </p:cSld>
@@ -14543,7 +15035,418 @@
 </p:sld>
 </file>
 
-<file path=ppt/slides/slide11.xml><?xml version="1.0" encoding="utf-8"?>
+<file path=ppt/slides/slide12.xml><?xml version="1.0" encoding="utf-8"?>
+<p:sld xmlns:a="http://schemas.openxmlformats.org/drawingml/2006/main" xmlns:r="http://schemas.openxmlformats.org/officeDocument/2006/relationships" xmlns:p="http://schemas.openxmlformats.org/presentationml/2006/main" show="0">
+  <p:cSld>
+    <p:spTree>
+      <p:nvGrpSpPr>
+        <p:cNvPr id="1" name="">
+          <a:extLst>
+            <a:ext uri="{FF2B5EF4-FFF2-40B4-BE49-F238E27FC236}">
+              <a16:creationId xmlns:a16="http://schemas.microsoft.com/office/drawing/2014/main" id="{44A1C439-22A6-EC30-115E-2B4684CA13F2}"/>
+            </a:ext>
+          </a:extLst>
+        </p:cNvPr>
+        <p:cNvGrpSpPr/>
+        <p:nvPr/>
+      </p:nvGrpSpPr>
+      <p:grpSpPr>
+        <a:xfrm>
+          <a:off x="0" y="0"/>
+          <a:ext cx="0" cy="0"/>
+          <a:chOff x="0" y="0"/>
+          <a:chExt cx="0" cy="0"/>
+        </a:xfrm>
+      </p:grpSpPr>
+      <p:sp>
+        <p:nvSpPr>
+          <p:cNvPr id="2" name="標題 1">
+            <a:extLst>
+              <a:ext uri="{FF2B5EF4-FFF2-40B4-BE49-F238E27FC236}">
+                <a16:creationId xmlns:a16="http://schemas.microsoft.com/office/drawing/2014/main" id="{78F6394E-5B91-EC03-17BC-34B4487EA42F}"/>
+              </a:ext>
+            </a:extLst>
+          </p:cNvPr>
+          <p:cNvSpPr>
+            <a:spLocks noGrp="1"/>
+          </p:cNvSpPr>
+          <p:nvPr>
+            <p:ph type="title"/>
+          </p:nvPr>
+        </p:nvSpPr>
+        <p:spPr/>
+        <p:txBody>
+          <a:bodyPr>
+            <a:normAutofit/>
+          </a:bodyPr>
+          <a:lstStyle/>
+          <a:p>
+            <a:r>
+              <a:rPr lang="en-US" altLang="zh-TW" sz="3200" dirty="0">
+                <a:latin typeface="Times New Roman" panose="02020603050405020304" pitchFamily="18" charset="0"/>
+                <a:ea typeface="標楷體" panose="03000509000000000000" pitchFamily="65" charset="-120"/>
+                <a:cs typeface="Times New Roman" panose="02020603050405020304" pitchFamily="18" charset="0"/>
+              </a:rPr>
+              <a:t>End-to-End Pipeline Evaluation</a:t>
+            </a:r>
+            <a:endParaRPr lang="zh-TW" altLang="en-US" sz="3200" dirty="0">
+              <a:latin typeface="Times New Roman" panose="02020603050405020304" pitchFamily="18" charset="0"/>
+              <a:ea typeface="標楷體" panose="03000509000000000000" pitchFamily="65" charset="-120"/>
+              <a:cs typeface="Times New Roman" panose="02020603050405020304" pitchFamily="18" charset="0"/>
+            </a:endParaRPr>
+          </a:p>
+        </p:txBody>
+      </p:sp>
+      <p:sp>
+        <p:nvSpPr>
+          <p:cNvPr id="3" name="文字版面配置區 2">
+            <a:extLst>
+              <a:ext uri="{FF2B5EF4-FFF2-40B4-BE49-F238E27FC236}">
+                <a16:creationId xmlns:a16="http://schemas.microsoft.com/office/drawing/2014/main" id="{868A5C00-1B1F-F523-21E7-F4E93A76AE0B}"/>
+              </a:ext>
+            </a:extLst>
+          </p:cNvPr>
+          <p:cNvSpPr>
+            <a:spLocks noGrp="1"/>
+          </p:cNvSpPr>
+          <p:nvPr>
+            <p:ph type="body" idx="1"/>
+          </p:nvPr>
+        </p:nvSpPr>
+        <p:spPr>
+          <a:xfrm>
+            <a:off x="446049" y="838200"/>
+            <a:ext cx="8251200" cy="640080"/>
+          </a:xfrm>
+        </p:spPr>
+        <p:txBody>
+          <a:bodyPr>
+            <a:normAutofit/>
+          </a:bodyPr>
+          <a:lstStyle/>
+          <a:p>
+            <a:pPr marL="0" indent="0">
+              <a:buNone/>
+            </a:pPr>
+            <a:r>
+              <a:rPr lang="en-US" sz="1500" b="1" dirty="0"/>
+              <a:t>Pipeline:  </a:t>
+            </a:r>
+            <a:r>
+              <a:rPr lang="en-US" sz="1500" dirty="0"/>
+              <a:t>uav-vanet → master_buffer_trace.csv → uav-to-leo  (validated on the TA scheduler trace)</a:t>
+            </a:r>
+          </a:p>
+        </p:txBody>
+      </p:sp>
+      <p:sp>
+        <p:nvSpPr>
+          <p:cNvPr id="4" name="投影片編號版面配置區 3">
+            <a:extLst>
+              <a:ext uri="{FF2B5EF4-FFF2-40B4-BE49-F238E27FC236}">
+                <a16:creationId xmlns:a16="http://schemas.microsoft.com/office/drawing/2014/main" id="{E1D17B5B-DE2B-B14A-C68C-CA77207B71F2}"/>
+              </a:ext>
+            </a:extLst>
+          </p:cNvPr>
+          <p:cNvSpPr>
+            <a:spLocks noGrp="1"/>
+          </p:cNvSpPr>
+          <p:nvPr>
+            <p:ph type="sldNum" idx="12"/>
+          </p:nvPr>
+        </p:nvSpPr>
+        <p:spPr/>
+        <p:txBody>
+          <a:bodyPr/>
+          <a:lstStyle/>
+          <a:p>
+            <a:pPr marL="0" lvl="0" indent="0" algn="r" rtl="0">
+              <a:spcBef>
+                <a:spcPts val="0"/>
+              </a:spcBef>
+              <a:spcAft>
+                <a:spcPts val="0"/>
+              </a:spcAft>
+              <a:buNone/>
+            </a:pPr>
+            <a:fld id="{00000000-1234-1234-1234-123412341234}" type="slidenum">
+              <a:rPr lang="en-US" smtClean="0"/>
+              <a:t>12</a:t>
+            </a:fld>
+            <a:endParaRPr lang="en-US"/>
+          </a:p>
+        </p:txBody>
+      </p:sp>
+      <p:sp>
+        <p:nvSpPr>
+          <p:cNvPr id="70" name="stat70"/>
+          <p:cNvSpPr/>
+          <p:nvPr/>
+        </p:nvSpPr>
+        <p:spPr>
+          <a:xfrm>
+            <a:off x="457200" y="1607821"/>
+            <a:ext cx="2697480" cy="2057400"/>
+          </a:xfrm>
+          <a:prstGeom prst="roundRect">
+            <a:avLst>
+              <a:gd name="adj" fmla="val 6000"/>
+            </a:avLst>
+          </a:prstGeom>
+          <a:solidFill>
+            <a:srgbClr val="E7F4E9"/>
+          </a:solidFill>
+          <a:ln w="15875">
+            <a:solidFill>
+              <a:srgbClr val="7DBF86"/>
+            </a:solidFill>
+          </a:ln>
+        </p:spPr>
+        <p:txBody>
+          <a:bodyPr rtlCol="0" anchor="ctr"/>
+          <a:lstStyle/>
+          <a:p>
+            <a:pPr algn="ctr"/>
+            <a:r>
+              <a:rPr lang="en-US" sz="2600" b="1" dirty="0">
+                <a:solidFill>
+                  <a:srgbClr val="2E7D32"/>
+                </a:solidFill>
+              </a:rPr>
+              <a:t>619</a:t>
+            </a:r>
+            <a:r>
+              <a:rPr lang="en-US" sz="2600" b="1" dirty="0">
+                <a:solidFill>
+                  <a:srgbClr val="2E7D32"/>
+                </a:solidFill>
+                <a:latin typeface="Arial"/>
+                <a:cs typeface="Arial"/>
+              </a:rPr>
+              <a:t> / 619</a:t>
+            </a:r>
+          </a:p>
+          <a:p>
+            <a:pPr algn="ctr">
+              <a:spcBef>
+                <a:spcPts val="300"/>
+              </a:spcBef>
+            </a:pPr>
+            <a:r>
+              <a:rPr lang="en-US" sz="1300" b="1" dirty="0">
+                <a:solidFill>
+                  <a:srgbClr val="404040"/>
+                </a:solidFill>
+                <a:latin typeface="Arial"/>
+                <a:cs typeface="Arial"/>
+              </a:rPr>
+              <a:t>tasks met deadline</a:t>
+            </a:r>
+          </a:p>
+          <a:p>
+            <a:pPr algn="ctr">
+              <a:spcBef>
+                <a:spcPts val="200"/>
+              </a:spcBef>
+            </a:pPr>
+            <a:r>
+              <a:rPr lang="en-US" sz="1050" i="1" dirty="0">
+                <a:solidFill>
+                  <a:srgbClr val="595959"/>
+                </a:solidFill>
+                <a:latin typeface="Arial"/>
+                <a:cs typeface="Arial"/>
+              </a:rPr>
+              <a:t>finish 3486.36 s  &lt;  3600 s</a:t>
+            </a:r>
+          </a:p>
+        </p:txBody>
+      </p:sp>
+      <p:sp>
+        <p:nvSpPr>
+          <p:cNvPr id="71" name="stat71"/>
+          <p:cNvSpPr/>
+          <p:nvPr/>
+        </p:nvSpPr>
+        <p:spPr>
+          <a:xfrm>
+            <a:off x="3246120" y="1607821"/>
+            <a:ext cx="2697480" cy="2057400"/>
+          </a:xfrm>
+          <a:prstGeom prst="roundRect">
+            <a:avLst>
+              <a:gd name="adj" fmla="val 6000"/>
+            </a:avLst>
+          </a:prstGeom>
+          <a:solidFill>
+            <a:srgbClr val="E8F1FA"/>
+          </a:solidFill>
+          <a:ln w="15875">
+            <a:solidFill>
+              <a:srgbClr val="6FA8DC"/>
+            </a:solidFill>
+          </a:ln>
+        </p:spPr>
+        <p:txBody>
+          <a:bodyPr rtlCol="0" anchor="ctr"/>
+          <a:lstStyle/>
+          <a:p>
+            <a:pPr algn="ctr"/>
+            <a:r>
+              <a:rPr lang="en-US" sz="2600" b="1" dirty="0">
+                <a:solidFill>
+                  <a:srgbClr val="1F5FA8"/>
+                </a:solidFill>
+                <a:latin typeface="Arial"/>
+                <a:cs typeface="Arial"/>
+              </a:rPr>
+              <a:t>1,238,529 B</a:t>
+            </a:r>
+          </a:p>
+          <a:p>
+            <a:pPr algn="ctr">
+              <a:spcBef>
+                <a:spcPts val="300"/>
+              </a:spcBef>
+            </a:pPr>
+            <a:r>
+              <a:rPr lang="en-US" sz="1300" b="1" dirty="0">
+                <a:solidFill>
+                  <a:srgbClr val="404040"/>
+                </a:solidFill>
+                <a:latin typeface="Arial"/>
+                <a:cs typeface="Arial"/>
+              </a:rPr>
+              <a:t>handed off to CH UAV</a:t>
+            </a:r>
+          </a:p>
+          <a:p>
+            <a:pPr algn="ctr">
+              <a:spcBef>
+                <a:spcPts val="200"/>
+              </a:spcBef>
+            </a:pPr>
+            <a:r>
+              <a:rPr lang="en-US" sz="1050" i="1" dirty="0">
+                <a:solidFill>
+                  <a:srgbClr val="595959"/>
+                </a:solidFill>
+                <a:latin typeface="Arial"/>
+                <a:cs typeface="Arial"/>
+              </a:rPr>
+              <a:t>via master_buffer_trace.csv</a:t>
+            </a:r>
+          </a:p>
+        </p:txBody>
+      </p:sp>
+      <p:sp>
+        <p:nvSpPr>
+          <p:cNvPr id="72" name="stat72"/>
+          <p:cNvSpPr/>
+          <p:nvPr/>
+        </p:nvSpPr>
+        <p:spPr>
+          <a:xfrm>
+            <a:off x="6035040" y="1607821"/>
+            <a:ext cx="2697480" cy="2057400"/>
+          </a:xfrm>
+          <a:prstGeom prst="roundRect">
+            <a:avLst>
+              <a:gd name="adj" fmla="val 6000"/>
+            </a:avLst>
+          </a:prstGeom>
+          <a:solidFill>
+            <a:srgbClr val="FFF3DC"/>
+          </a:solidFill>
+          <a:ln w="15875">
+            <a:solidFill>
+              <a:srgbClr val="E0A93C"/>
+            </a:solidFill>
+          </a:ln>
+        </p:spPr>
+        <p:txBody>
+          <a:bodyPr rtlCol="0" anchor="ctr"/>
+          <a:lstStyle/>
+          <a:p>
+            <a:pPr algn="ctr"/>
+            <a:r>
+              <a:rPr lang="en-US" sz="2600" b="1" dirty="0">
+                <a:solidFill>
+                  <a:srgbClr val="B5781C"/>
+                </a:solidFill>
+                <a:latin typeface="Arial"/>
+                <a:cs typeface="Arial"/>
+              </a:rPr>
+              <a:t>leo_done = YES</a:t>
+            </a:r>
+          </a:p>
+          <a:p>
+            <a:pPr algn="ctr">
+              <a:spcBef>
+                <a:spcPts val="300"/>
+              </a:spcBef>
+            </a:pPr>
+            <a:r>
+              <a:rPr lang="en-US" sz="1300" b="1" dirty="0">
+                <a:solidFill>
+                  <a:srgbClr val="404040"/>
+                </a:solidFill>
+                <a:latin typeface="Arial"/>
+                <a:cs typeface="Arial"/>
+              </a:rPr>
+              <a:t>uploaded to LEO</a:t>
+            </a:r>
+          </a:p>
+        </p:txBody>
+      </p:sp>
+      <p:sp>
+        <p:nvSpPr>
+          <p:cNvPr id="73" name="takeaway"/>
+          <p:cNvSpPr/>
+          <p:nvPr/>
+        </p:nvSpPr>
+        <p:spPr>
+          <a:xfrm>
+            <a:off x="457200" y="3816190"/>
+            <a:ext cx="8275320" cy="548640"/>
+          </a:xfrm>
+          <a:prstGeom prst="rect">
+            <a:avLst/>
+          </a:prstGeom>
+          <a:noFill/>
+        </p:spPr>
+        <p:txBody>
+          <a:bodyPr rtlCol="0" anchor="ctr"/>
+          <a:lstStyle/>
+          <a:p>
+            <a:pPr algn="ctr"/>
+            <a:r>
+              <a:rPr lang="en-US" sz="1350" b="1" dirty="0">
+                <a:solidFill>
+                  <a:srgbClr val="E87722"/>
+                </a:solidFill>
+                <a:latin typeface="Arial"/>
+                <a:cs typeface="Arial"/>
+              </a:rPr>
+              <a:t>One CSV decouples the two simulators — a reusable framework for any schedule</a:t>
+            </a:r>
+          </a:p>
+        </p:txBody>
+      </p:sp>
+    </p:spTree>
+    <p:extLst>
+      <p:ext uri="{BB962C8B-B14F-4D97-AF65-F5344CB8AC3E}">
+        <p14:creationId xmlns:p14="http://schemas.microsoft.com/office/powerpoint/2010/main" val="600383062"/>
+      </p:ext>
+    </p:extLst>
+  </p:cSld>
+  <p:clrMapOvr>
+    <a:masterClrMapping/>
+  </p:clrMapOvr>
+</p:sld>
+</file>
+
+<file path=ppt/slides/slide13.xml><?xml version="1.0" encoding="utf-8"?>
 <p:sld xmlns:a="http://schemas.openxmlformats.org/drawingml/2006/main" xmlns:r="http://schemas.openxmlformats.org/officeDocument/2006/relationships" xmlns:p="http://schemas.openxmlformats.org/presentationml/2006/main">
   <p:cSld>
     <p:spTree>
@@ -14605,36 +15508,93 @@
             <p:ph type="body" idx="1"/>
           </p:nvPr>
         </p:nvSpPr>
-        <p:spPr/>
+        <p:spPr>
+          <a:xfrm>
+            <a:off x="628650" y="1354931"/>
+            <a:ext cx="7886700" cy="2971800"/>
+          </a:xfrm>
+        </p:spPr>
         <p:txBody>
           <a:bodyPr>
             <a:normAutofit/>
           </a:bodyPr>
           <a:lstStyle/>
           <a:p>
-            <a:r>
-              <a:rPr lang="en-US" altLang="zh-TW" dirty="0"/>
-              <a:t>Built an NS-3 framework for link probing, schedule replay, and end-to-end performance measurement in SAGIN</a:t>
+            <a:pPr>
+              <a:lnSpc>
+                <a:spcPct val="150000"/>
+              </a:lnSpc>
+            </a:pPr>
+            <a:r>
+              <a:rPr lang="en-US" altLang="zh-TW" sz="2000" b="1" dirty="0"/>
+              <a:t>Framework:</a:t>
+            </a:r>
+            <a:r>
+              <a:rPr lang="zh-TW" altLang="en-US" sz="2000" dirty="0"/>
+              <a:t>  </a:t>
+            </a:r>
+            <a:r>
+              <a:rPr lang="en-US" altLang="zh-TW" sz="2000" dirty="0"/>
+              <a:t>NS-3 platform for SAGIN: probing, replay, end-to-end measurement</a:t>
             </a:r>
           </a:p>
           <a:p>
-            <a:r>
-              <a:rPr lang="en-US" altLang="zh-TW" dirty="0"/>
-              <a:t>Decoupled design: UAV-to-UAV probe, schedule verification, and UAV-to-LEO uplink linked by a CSV handoff</a:t>
+            <a:pPr>
+              <a:lnSpc>
+                <a:spcPct val="150000"/>
+              </a:lnSpc>
+            </a:pPr>
+            <a:r>
+              <a:rPr lang="en-US" altLang="zh-TW" sz="2000" b="1" dirty="0"/>
+              <a:t>Modular:</a:t>
+            </a:r>
+            <a:r>
+              <a:rPr lang="zh-TW" altLang="en-US" sz="2000" dirty="0"/>
+              <a:t>  </a:t>
+            </a:r>
+            <a:r>
+              <a:rPr lang="en-US" altLang="zh-TW" sz="2000" dirty="0"/>
+              <a:t>Three decoupled modules linked by a CSV handoff</a:t>
             </a:r>
           </a:p>
           <a:p>
-            <a:r>
-              <a:rPr lang="en-US" altLang="zh-TW" dirty="0"/>
-              <a:t>Provides a platform to evaluate different scheduling decisions under realistic channel conditions</a:t>
+            <a:pPr>
+              <a:lnSpc>
+                <a:spcPct val="150000"/>
+              </a:lnSpc>
+            </a:pPr>
+            <a:r>
+              <a:rPr lang="en-US" altLang="zh-TW" sz="2000" b="1" dirty="0"/>
+              <a:t>Reusable:</a:t>
+            </a:r>
+            <a:r>
+              <a:rPr lang="zh-TW" altLang="en-US" sz="2000" dirty="0"/>
+              <a:t>  </a:t>
+            </a:r>
+            <a:r>
+              <a:rPr lang="en-US" altLang="zh-TW" sz="2000" dirty="0"/>
+              <a:t>Evaluate any schedule under realistic channel conditions</a:t>
             </a:r>
           </a:p>
           <a:p>
-            <a:r>
-              <a:rPr lang="en-US" altLang="zh-TW" dirty="0"/>
-              <a:t>Future work: integrate the scheduler into the loop for interactive network planning</a:t>
-            </a:r>
-            <a:endParaRPr lang="zh-TW" altLang="en-US" dirty="0"/>
+            <a:pPr>
+              <a:lnSpc>
+                <a:spcPct val="150000"/>
+              </a:lnSpc>
+            </a:pPr>
+            <a:r>
+              <a:rPr lang="en-US" altLang="zh-TW" sz="2000" b="1" dirty="0"/>
+              <a:t>Future work:</a:t>
+            </a:r>
+            <a:r>
+              <a:rPr lang="zh-TW" altLang="en-US" sz="2000" dirty="0"/>
+              <a:t>  </a:t>
+            </a:r>
+            <a:r>
+              <a:rPr lang="en-US" altLang="zh-TW" sz="2000" dirty="0"/>
+              <a:t>Scheduler in the loop for interactive planning</a:t>
+            </a:r>
+            <a:endParaRPr lang="zh-TW" altLang="en-US" sz="2000" dirty="0"/>
           </a:p>
         </p:txBody>
       </p:sp>
@@ -14670,7 +15630,7 @@
             </a:pPr>
             <a:fld id="{00000000-1234-1234-1234-123412341234}" type="slidenum">
               <a:rPr lang="en-US" smtClean="0"/>
-              <a:t>11</a:t>
+              <a:t>13</a:t>
             </a:fld>
             <a:endParaRPr lang="en-US"/>
           </a:p>
@@ -14758,7 +15718,7 @@
           <a:p>
             <a:r>
               <a:rPr lang="en-US" altLang="zh-TW" sz="2400" dirty="0"/>
-              <a:t>Background and Motivation</a:t>
+              <a:t>Background</a:t>
             </a:r>
           </a:p>
           <a:p>
@@ -14776,10 +15736,9 @@
           </a:p>
           <a:p>
             <a:r>
-              <a:rPr lang="en-US" altLang="zh-TW" sz="2400"/>
+              <a:rPr lang="en-US" altLang="zh-TW" sz="2400" dirty="0"/>
               <a:t>Evaluation</a:t>
             </a:r>
-            <a:endParaRPr lang="en-US" altLang="zh-TW" sz="2400" dirty="0"/>
           </a:p>
           <a:p>
             <a:r>
@@ -14886,7 +15845,7 @@
           <a:p>
             <a:r>
               <a:rPr lang="en-US" altLang="zh-TW" dirty="0"/>
-              <a:t>Background &amp; Motivation</a:t>
+              <a:t>Background</a:t>
             </a:r>
             <a:endParaRPr lang="zh-TW" altLang="en-US" dirty="0"/>
           </a:p>
@@ -15033,7 +15992,7 @@
     </p:spTree>
     <p:extLst>
       <p:ext uri="{BB962C8B-B14F-4D97-AF65-F5344CB8AC3E}">
-        <p14:creationId xmlns:p14="http://schemas.microsoft.com/office/powerpoint/2010/main" val="611824814"/>
+        <p14:creationId xmlns:p14="http://schemas.microsoft.com/office/powerpoint/2010/main" val="1187666096"/>
       </p:ext>
     </p:extLst>
   </p:cSld>
@@ -16946,7 +17905,7 @@
         </p:nvGrpSpPr>
         <p:grpSpPr>
           <a:xfrm>
-            <a:off x="6452700" y="2076900"/>
+            <a:off x="6452700" y="2451336"/>
             <a:ext cx="2062650" cy="1527861"/>
             <a:chOff x="11169062" y="9292519"/>
             <a:chExt cx="2960539" cy="2124130"/>
@@ -17721,8 +18680,8 @@
         </p:nvSpPr>
         <p:spPr>
           <a:xfrm>
-            <a:off x="628650" y="914399"/>
-            <a:ext cx="8163658" cy="3718323"/>
+            <a:off x="628650" y="1320352"/>
+            <a:ext cx="8163658" cy="883413"/>
           </a:xfrm>
           <a:prstGeom prst="rect">
             <a:avLst/>
@@ -19068,7 +20027,7 @@
         <p:spPr>
           <a:xfrm>
             <a:off x="446049" y="838199"/>
-            <a:ext cx="8251200" cy="2081349"/>
+            <a:ext cx="8251200" cy="1733551"/>
           </a:xfrm>
         </p:spPr>
         <p:txBody>
@@ -20489,8 +21448,8 @@
         </p:nvSpPr>
         <p:spPr>
           <a:xfrm>
-            <a:off x="411481" y="914399"/>
-            <a:ext cx="4160520" cy="3718323"/>
+            <a:off x="668458" y="1025235"/>
+            <a:ext cx="3855050" cy="3242241"/>
           </a:xfrm>
         </p:spPr>
         <p:txBody>
@@ -20621,7 +21580,7 @@
         </p:nvSpPr>
         <p:spPr>
           <a:xfrm>
-            <a:off x="4957354" y="896112"/>
+            <a:off x="4523510" y="1094508"/>
             <a:ext cx="3775166" cy="1234440"/>
           </a:xfrm>
           <a:prstGeom prst="roundRect">
@@ -20697,13 +21656,13 @@
           <p:nvPr>
             <p:extLst>
               <p:ext uri="{D42A27DB-BD31-4B8C-83A1-F6EECF244321}">
-                <p14:modId xmlns:p14="http://schemas.microsoft.com/office/powerpoint/2010/main" val="858887790"/>
+                <p14:modId xmlns:p14="http://schemas.microsoft.com/office/powerpoint/2010/main" val="1435795628"/>
               </p:ext>
             </p:extLst>
           </p:nvPr>
         </p:nvGraphicFramePr>
         <p:xfrm>
-          <a:off x="4957352" y="2514600"/>
+          <a:off x="4523508" y="2712996"/>
           <a:ext cx="3775166" cy="1097280"/>
         </p:xfrm>
         <a:graphic>
@@ -21301,7 +22260,7 @@
         </p:nvSpPr>
         <p:spPr>
           <a:xfrm>
-            <a:off x="4957352" y="3611880"/>
+            <a:off x="4523508" y="3810276"/>
             <a:ext cx="3775166" cy="457200"/>
           </a:xfrm>
           <a:prstGeom prst="rect">
@@ -21341,14 +22300,14 @@
 </file>
 
 <file path=ppt/slides/slide9.xml><?xml version="1.0" encoding="utf-8"?>
-<p:sld xmlns:a="http://schemas.openxmlformats.org/drawingml/2006/main" xmlns:r="http://schemas.openxmlformats.org/officeDocument/2006/relationships" xmlns:p="http://schemas.openxmlformats.org/presentationml/2006/main" show="0">
+<p:sld xmlns:a="http://schemas.openxmlformats.org/drawingml/2006/main" xmlns:r="http://schemas.openxmlformats.org/officeDocument/2006/relationships" xmlns:p="http://schemas.openxmlformats.org/presentationml/2006/main">
   <p:cSld>
     <p:spTree>
       <p:nvGrpSpPr>
         <p:cNvPr id="1" name="">
           <a:extLst>
             <a:ext uri="{FF2B5EF4-FFF2-40B4-BE49-F238E27FC236}">
-              <a16:creationId xmlns:a16="http://schemas.microsoft.com/office/drawing/2014/main" id="{44A1C439-22A6-EC30-115E-2B4684CA13F2}"/>
+              <a16:creationId xmlns:a16="http://schemas.microsoft.com/office/drawing/2014/main" id="{73843AB9-F164-B994-FBDF-61FD16A1998A}"/>
             </a:ext>
           </a:extLst>
         </p:cNvPr>
@@ -21368,7 +22327,7 @@
           <p:cNvPr id="2" name="標題 1">
             <a:extLst>
               <a:ext uri="{FF2B5EF4-FFF2-40B4-BE49-F238E27FC236}">
-                <a16:creationId xmlns:a16="http://schemas.microsoft.com/office/drawing/2014/main" id="{78F6394E-5B91-EC03-17BC-34B4487EA42F}"/>
+                <a16:creationId xmlns:a16="http://schemas.microsoft.com/office/drawing/2014/main" id="{E8733EBE-1DC2-D22A-4701-8575B80526E3}"/>
               </a:ext>
             </a:extLst>
           </p:cNvPr>
@@ -21392,7 +22351,7 @@
                 <a:ea typeface="標楷體" panose="03000509000000000000" pitchFamily="65" charset="-120"/>
                 <a:cs typeface="Times New Roman" panose="02020603050405020304" pitchFamily="18" charset="0"/>
               </a:rPr>
-              <a:t>End-to-End Pipeline Result</a:t>
+              <a:t>Topo Evaluation: Scheduler Trace Replay</a:t>
             </a:r>
             <a:endParaRPr lang="zh-TW" altLang="en-US" sz="3200" dirty="0">
               <a:latin typeface="Times New Roman" panose="02020603050405020304" pitchFamily="18" charset="0"/>
@@ -21404,52 +22363,10 @@
       </p:sp>
       <p:sp>
         <p:nvSpPr>
-          <p:cNvPr id="3" name="文字版面配置區 2">
-            <a:extLst>
-              <a:ext uri="{FF2B5EF4-FFF2-40B4-BE49-F238E27FC236}">
-                <a16:creationId xmlns:a16="http://schemas.microsoft.com/office/drawing/2014/main" id="{868A5C00-1B1F-F523-21E7-F4E93A76AE0B}"/>
-              </a:ext>
-            </a:extLst>
-          </p:cNvPr>
-          <p:cNvSpPr>
-            <a:spLocks noGrp="1"/>
-          </p:cNvSpPr>
-          <p:nvPr>
-            <p:ph type="body" idx="1"/>
-          </p:nvPr>
-        </p:nvSpPr>
-        <p:spPr>
-          <a:xfrm>
-            <a:off x="446049" y="838200"/>
-            <a:ext cx="8251200" cy="640080"/>
-          </a:xfrm>
-        </p:spPr>
-        <p:txBody>
-          <a:bodyPr>
-            <a:normAutofit/>
-          </a:bodyPr>
-          <a:lstStyle/>
-          <a:p>
-            <a:pPr marL="0" indent="0">
-              <a:buNone/>
-            </a:pPr>
-            <a:r>
-              <a:rPr lang="en-US" sz="1500" b="1" dirty="0"/>
-              <a:t>Pipeline:  </a:t>
-            </a:r>
-            <a:r>
-              <a:rPr lang="en-US" sz="1500" dirty="0"/>
-              <a:t>uav-vanet → master_buffer_trace.csv → uav-to-leo  (validated on the TA scheduler trace)</a:t>
-            </a:r>
-          </a:p>
-        </p:txBody>
-      </p:sp>
-      <p:sp>
-        <p:nvSpPr>
           <p:cNvPr id="4" name="投影片編號版面配置區 3">
             <a:extLst>
               <a:ext uri="{FF2B5EF4-FFF2-40B4-BE49-F238E27FC236}">
-                <a16:creationId xmlns:a16="http://schemas.microsoft.com/office/drawing/2014/main" id="{E1D17B5B-DE2B-B14A-C68C-CA77207B71F2}"/>
+                <a16:creationId xmlns:a16="http://schemas.microsoft.com/office/drawing/2014/main" id="{73C2D0EC-FE9C-D63F-F3BB-83BD56A022E1}"/>
               </a:ext>
             </a:extLst>
           </p:cNvPr>
@@ -21482,275 +22399,463 @@
           </a:p>
         </p:txBody>
       </p:sp>
+      <p:pic>
+        <p:nvPicPr>
+          <p:cNvPr id="11" name="圖片 10">
+            <a:extLst>
+              <a:ext uri="{FF2B5EF4-FFF2-40B4-BE49-F238E27FC236}">
+                <a16:creationId xmlns:a16="http://schemas.microsoft.com/office/drawing/2014/main" id="{933DA310-1FC1-7003-2993-B2C9FEBE21A6}"/>
+              </a:ext>
+            </a:extLst>
+          </p:cNvPr>
+          <p:cNvPicPr>
+            <a:picLocks noChangeAspect="1"/>
+          </p:cNvPicPr>
+          <p:nvPr/>
+        </p:nvPicPr>
+        <p:blipFill>
+          <a:blip r:embed="rId2"/>
+          <a:stretch>
+            <a:fillRect/>
+          </a:stretch>
+        </p:blipFill>
+        <p:spPr>
+          <a:xfrm>
+            <a:off x="1949957" y="3792219"/>
+            <a:ext cx="5244083" cy="1026161"/>
+          </a:xfrm>
+          <a:prstGeom prst="rect">
+            <a:avLst/>
+          </a:prstGeom>
+        </p:spPr>
+      </p:pic>
       <p:sp>
         <p:nvSpPr>
-          <p:cNvPr id="70" name="stat70"/>
-          <p:cNvSpPr/>
+          <p:cNvPr id="10" name="文字版面配置區 2">
+            <a:extLst>
+              <a:ext uri="{FF2B5EF4-FFF2-40B4-BE49-F238E27FC236}">
+                <a16:creationId xmlns:a16="http://schemas.microsoft.com/office/drawing/2014/main" id="{1A291BAB-928A-7194-A2CB-247FEB2B4E99}"/>
+              </a:ext>
+            </a:extLst>
+          </p:cNvPr>
+          <p:cNvSpPr txBox="1">
+            <a:spLocks/>
+          </p:cNvSpPr>
           <p:nvPr/>
         </p:nvSpPr>
         <p:spPr>
           <a:xfrm>
-            <a:off x="457200" y="1600200"/>
-            <a:ext cx="2697480" cy="2057400"/>
-          </a:xfrm>
-          <a:prstGeom prst="roundRect">
-            <a:avLst>
-              <a:gd name="adj" fmla="val 6000"/>
-            </a:avLst>
-          </a:prstGeom>
-          <a:solidFill>
-            <a:srgbClr val="E7F4E9"/>
-          </a:solidFill>
-          <a:ln w="15875">
-            <a:solidFill>
-              <a:srgbClr val="7DBF86"/>
-            </a:solidFill>
-          </a:ln>
-        </p:spPr>
-        <p:txBody>
-          <a:bodyPr rtlCol="0" anchor="ctr"/>
-          <a:lstStyle/>
-          <a:p>
-            <a:pPr algn="ctr"/>
-            <a:r>
-              <a:rPr lang="en-US" sz="2600" b="1" dirty="0">
-                <a:solidFill>
-                  <a:srgbClr val="2E7D32"/>
-                </a:solidFill>
-                <a:latin typeface="Arial"/>
-                <a:cs typeface="Arial"/>
-              </a:rPr>
-              <a:t>104 / 104</a:t>
-            </a:r>
-          </a:p>
-          <a:p>
-            <a:pPr algn="ctr">
-              <a:spcBef>
-                <a:spcPts val="300"/>
-              </a:spcBef>
-            </a:pPr>
-            <a:r>
-              <a:rPr lang="en-US" sz="1300" b="1" dirty="0">
-                <a:solidFill>
-                  <a:srgbClr val="404040"/>
-                </a:solidFill>
-                <a:latin typeface="Arial"/>
-                <a:cs typeface="Arial"/>
-              </a:rPr>
-              <a:t>tasks met deadline</a:t>
-            </a:r>
-          </a:p>
-          <a:p>
-            <a:pPr algn="ctr">
-              <a:spcBef>
-                <a:spcPts val="200"/>
-              </a:spcBef>
-            </a:pPr>
-            <a:r>
-              <a:rPr lang="en-US" sz="1050" i="1" dirty="0">
-                <a:solidFill>
-                  <a:srgbClr val="595959"/>
-                </a:solidFill>
-                <a:latin typeface="Arial"/>
-                <a:cs typeface="Arial"/>
-              </a:rPr>
-              <a:t>finish 476.6 s  ≪  5400 s</a:t>
-            </a:r>
-          </a:p>
-        </p:txBody>
-      </p:sp>
-      <p:sp>
-        <p:nvSpPr>
-          <p:cNvPr id="71" name="stat71"/>
-          <p:cNvSpPr/>
-          <p:nvPr/>
-        </p:nvSpPr>
-        <p:spPr>
-          <a:xfrm>
-            <a:off x="3246120" y="1600200"/>
-            <a:ext cx="2697480" cy="2057400"/>
-          </a:xfrm>
-          <a:prstGeom prst="roundRect">
-            <a:avLst>
-              <a:gd name="adj" fmla="val 6000"/>
-            </a:avLst>
-          </a:prstGeom>
-          <a:solidFill>
-            <a:srgbClr val="E8F1FA"/>
-          </a:solidFill>
-          <a:ln w="15875">
-            <a:solidFill>
-              <a:srgbClr val="6FA8DC"/>
-            </a:solidFill>
-          </a:ln>
-        </p:spPr>
-        <p:txBody>
-          <a:bodyPr rtlCol="0" anchor="ctr"/>
-          <a:lstStyle/>
-          <a:p>
-            <a:pPr algn="ctr"/>
-            <a:r>
-              <a:rPr lang="en-US" sz="2600" b="1" dirty="0">
-                <a:solidFill>
-                  <a:srgbClr val="1F5FA8"/>
-                </a:solidFill>
-                <a:latin typeface="Arial"/>
-                <a:cs typeface="Arial"/>
-              </a:rPr>
-              <a:t>149,618 B</a:t>
-            </a:r>
-          </a:p>
-          <a:p>
-            <a:pPr algn="ctr">
-              <a:spcBef>
-                <a:spcPts val="300"/>
-              </a:spcBef>
-            </a:pPr>
-            <a:r>
-              <a:rPr lang="en-US" sz="1300" b="1" dirty="0">
-                <a:solidFill>
-                  <a:srgbClr val="404040"/>
-                </a:solidFill>
-                <a:latin typeface="Arial"/>
-                <a:cs typeface="Arial"/>
-              </a:rPr>
-              <a:t>handed off to CH UAV</a:t>
-            </a:r>
-          </a:p>
-          <a:p>
-            <a:pPr algn="ctr">
-              <a:spcBef>
-                <a:spcPts val="200"/>
-              </a:spcBef>
-            </a:pPr>
-            <a:r>
-              <a:rPr lang="en-US" sz="1050" i="1" dirty="0">
-                <a:solidFill>
-                  <a:srgbClr val="595959"/>
-                </a:solidFill>
-                <a:latin typeface="Arial"/>
-                <a:cs typeface="Arial"/>
-              </a:rPr>
-              <a:t>via master_buffer_trace.csv</a:t>
-            </a:r>
-          </a:p>
-        </p:txBody>
-      </p:sp>
-      <p:sp>
-        <p:nvSpPr>
-          <p:cNvPr id="72" name="stat72"/>
-          <p:cNvSpPr/>
-          <p:nvPr/>
-        </p:nvSpPr>
-        <p:spPr>
-          <a:xfrm>
-            <a:off x="6035040" y="1600200"/>
-            <a:ext cx="2697480" cy="2057400"/>
-          </a:xfrm>
-          <a:prstGeom prst="roundRect">
-            <a:avLst>
-              <a:gd name="adj" fmla="val 6000"/>
-            </a:avLst>
-          </a:prstGeom>
-          <a:solidFill>
-            <a:srgbClr val="FFF3DC"/>
-          </a:solidFill>
-          <a:ln w="15875">
-            <a:solidFill>
-              <a:srgbClr val="E0A93C"/>
-            </a:solidFill>
-          </a:ln>
-        </p:spPr>
-        <p:txBody>
-          <a:bodyPr rtlCol="0" anchor="ctr"/>
-          <a:lstStyle/>
-          <a:p>
-            <a:pPr algn="ctr"/>
-            <a:r>
-              <a:rPr lang="en-US" sz="2600" b="1" dirty="0">
-                <a:solidFill>
-                  <a:srgbClr val="B5781C"/>
-                </a:solidFill>
-                <a:latin typeface="Arial"/>
-                <a:cs typeface="Arial"/>
-              </a:rPr>
-              <a:t>leo_done = YES</a:t>
-            </a:r>
-          </a:p>
-          <a:p>
-            <a:pPr algn="ctr">
-              <a:spcBef>
-                <a:spcPts val="300"/>
-              </a:spcBef>
-            </a:pPr>
-            <a:r>
-              <a:rPr lang="en-US" sz="1300" b="1" dirty="0">
-                <a:solidFill>
-                  <a:srgbClr val="404040"/>
-                </a:solidFill>
-                <a:latin typeface="Arial"/>
-                <a:cs typeface="Arial"/>
-              </a:rPr>
-              <a:t>uploaded to LEO</a:t>
-            </a:r>
-          </a:p>
-          <a:p>
-            <a:pPr algn="ctr">
-              <a:spcBef>
-                <a:spcPts val="200"/>
-              </a:spcBef>
-            </a:pPr>
-            <a:r>
-              <a:rPr lang="en-US" sz="1050" i="1" dirty="0">
-                <a:solidFill>
-                  <a:srgbClr val="595959"/>
-                </a:solidFill>
-                <a:latin typeface="Arial"/>
-                <a:cs typeface="Arial"/>
-              </a:rPr>
-              <a:t>handoff Sat[38] → Sat[142]</a:t>
-            </a:r>
-          </a:p>
-        </p:txBody>
-      </p:sp>
-      <p:sp>
-        <p:nvSpPr>
-          <p:cNvPr id="73" name="takeaway"/>
-          <p:cNvSpPr/>
-          <p:nvPr/>
-        </p:nvSpPr>
-        <p:spPr>
-          <a:xfrm>
-            <a:off x="457200" y="3977639"/>
-            <a:ext cx="8275320" cy="548640"/>
+            <a:off x="446049" y="838200"/>
+            <a:ext cx="8213042" cy="2930236"/>
           </a:xfrm>
           <a:prstGeom prst="rect">
             <a:avLst/>
           </a:prstGeom>
           <a:noFill/>
+          <a:ln>
+            <a:noFill/>
+          </a:ln>
         </p:spPr>
         <p:txBody>
-          <a:bodyPr rtlCol="0" anchor="ctr"/>
-          <a:lstStyle/>
+          <a:bodyPr spcFirstLastPara="1" wrap="square" lIns="68575" tIns="34275" rIns="68575" bIns="34275" anchor="t" anchorCtr="0">
+            <a:normAutofit/>
+          </a:bodyPr>
+          <a:lstStyle>
+            <a:defPPr marR="0" lvl="0" algn="l" rtl="0">
+              <a:lnSpc>
+                <a:spcPct val="100000"/>
+              </a:lnSpc>
+              <a:spcBef>
+                <a:spcPts val="0"/>
+              </a:spcBef>
+              <a:spcAft>
+                <a:spcPts val="0"/>
+              </a:spcAft>
+            </a:defPPr>
+            <a:lvl1pPr marL="396000" marR="0" lvl="0" indent="-248400" algn="l" rtl="0">
+              <a:lnSpc>
+                <a:spcPct val="100000"/>
+              </a:lnSpc>
+              <a:spcBef>
+                <a:spcPts val="600"/>
+              </a:spcBef>
+              <a:spcAft>
+                <a:spcPts val="0"/>
+              </a:spcAft>
+              <a:buClr>
+                <a:schemeClr val="dk1"/>
+              </a:buClr>
+              <a:buSzPts val="2200"/>
+              <a:buFont typeface="Arial"/>
+              <a:buChar char="•"/>
+              <a:defRPr sz="2400" b="0" i="0" u="none" strike="noStrike" cap="none">
+                <a:solidFill>
+                  <a:schemeClr val="dk1"/>
+                </a:solidFill>
+                <a:latin typeface="Calibri"/>
+                <a:ea typeface="Calibri"/>
+                <a:cs typeface="Calibri"/>
+                <a:sym typeface="Calibri"/>
+              </a:defRPr>
+            </a:lvl1pPr>
+            <a:lvl2pPr marL="914400" marR="0" lvl="1" indent="-252000" algn="l" rtl="0">
+              <a:lnSpc>
+                <a:spcPct val="100000"/>
+              </a:lnSpc>
+              <a:spcBef>
+                <a:spcPts val="600"/>
+              </a:spcBef>
+              <a:spcAft>
+                <a:spcPts val="0"/>
+              </a:spcAft>
+              <a:buClr>
+                <a:schemeClr val="dk1"/>
+              </a:buClr>
+              <a:buSzPts val="1050"/>
+              <a:buFont typeface="Noto Sans Symbols"/>
+              <a:buChar char="■"/>
+              <a:defRPr sz="2200" b="0" i="0" u="none" strike="noStrike" cap="none">
+                <a:solidFill>
+                  <a:schemeClr val="dk1"/>
+                </a:solidFill>
+                <a:latin typeface="Calibri"/>
+                <a:ea typeface="Calibri"/>
+                <a:cs typeface="Calibri"/>
+                <a:sym typeface="Calibri"/>
+              </a:defRPr>
+            </a:lvl2pPr>
+            <a:lvl3pPr marL="1371600" marR="0" lvl="2" indent="-317500" algn="l" rtl="0">
+              <a:lnSpc>
+                <a:spcPct val="100000"/>
+              </a:lnSpc>
+              <a:spcBef>
+                <a:spcPts val="600"/>
+              </a:spcBef>
+              <a:spcAft>
+                <a:spcPts val="0"/>
+              </a:spcAft>
+              <a:buClr>
+                <a:schemeClr val="dk1"/>
+              </a:buClr>
+              <a:buSzPts val="1400"/>
+              <a:buFont typeface="Arial"/>
+              <a:buChar char="○"/>
+              <a:defRPr sz="1800" b="0" i="0" u="none" strike="noStrike" cap="none">
+                <a:solidFill>
+                  <a:schemeClr val="dk1"/>
+                </a:solidFill>
+                <a:latin typeface="Calibri"/>
+                <a:ea typeface="Calibri"/>
+                <a:cs typeface="Calibri"/>
+                <a:sym typeface="Calibri"/>
+              </a:defRPr>
+            </a:lvl3pPr>
+            <a:lvl4pPr marL="1828800" marR="0" lvl="3" indent="-317500" algn="l" rtl="0">
+              <a:lnSpc>
+                <a:spcPct val="90000"/>
+              </a:lnSpc>
+              <a:spcBef>
+                <a:spcPts val="400"/>
+              </a:spcBef>
+              <a:spcAft>
+                <a:spcPts val="0"/>
+              </a:spcAft>
+              <a:buClr>
+                <a:schemeClr val="dk1"/>
+              </a:buClr>
+              <a:buSzPts val="1400"/>
+              <a:buFont typeface="Arial"/>
+              <a:buChar char="•"/>
+              <a:defRPr sz="1400" b="0" i="0" u="none" strike="noStrike" cap="none">
+                <a:solidFill>
+                  <a:schemeClr val="dk1"/>
+                </a:solidFill>
+                <a:latin typeface="Calibri"/>
+                <a:ea typeface="Calibri"/>
+                <a:cs typeface="Calibri"/>
+                <a:sym typeface="Calibri"/>
+              </a:defRPr>
+            </a:lvl4pPr>
+            <a:lvl5pPr marL="2286000" marR="0" lvl="4" indent="-317500" algn="l" rtl="0">
+              <a:lnSpc>
+                <a:spcPct val="90000"/>
+              </a:lnSpc>
+              <a:spcBef>
+                <a:spcPts val="400"/>
+              </a:spcBef>
+              <a:spcAft>
+                <a:spcPts val="0"/>
+              </a:spcAft>
+              <a:buClr>
+                <a:schemeClr val="dk1"/>
+              </a:buClr>
+              <a:buSzPts val="1400"/>
+              <a:buFont typeface="Arial"/>
+              <a:buChar char="•"/>
+              <a:defRPr sz="1400" b="0" i="0" u="none" strike="noStrike" cap="none">
+                <a:solidFill>
+                  <a:schemeClr val="dk1"/>
+                </a:solidFill>
+                <a:latin typeface="Calibri"/>
+                <a:ea typeface="Calibri"/>
+                <a:cs typeface="Calibri"/>
+                <a:sym typeface="Calibri"/>
+              </a:defRPr>
+            </a:lvl5pPr>
+            <a:lvl6pPr marL="2743200" marR="0" lvl="5" indent="-317500" algn="l" rtl="0">
+              <a:lnSpc>
+                <a:spcPct val="90000"/>
+              </a:lnSpc>
+              <a:spcBef>
+                <a:spcPts val="400"/>
+              </a:spcBef>
+              <a:spcAft>
+                <a:spcPts val="0"/>
+              </a:spcAft>
+              <a:buClr>
+                <a:schemeClr val="dk1"/>
+              </a:buClr>
+              <a:buSzPts val="1400"/>
+              <a:buFont typeface="Arial"/>
+              <a:buChar char="•"/>
+              <a:defRPr sz="1400" b="0" i="0" u="none" strike="noStrike" cap="none">
+                <a:solidFill>
+                  <a:schemeClr val="dk1"/>
+                </a:solidFill>
+                <a:latin typeface="Calibri"/>
+                <a:ea typeface="Calibri"/>
+                <a:cs typeface="Calibri"/>
+                <a:sym typeface="Calibri"/>
+              </a:defRPr>
+            </a:lvl6pPr>
+            <a:lvl7pPr marL="3200400" marR="0" lvl="6" indent="-317500" algn="l" rtl="0">
+              <a:lnSpc>
+                <a:spcPct val="90000"/>
+              </a:lnSpc>
+              <a:spcBef>
+                <a:spcPts val="400"/>
+              </a:spcBef>
+              <a:spcAft>
+                <a:spcPts val="0"/>
+              </a:spcAft>
+              <a:buClr>
+                <a:schemeClr val="dk1"/>
+              </a:buClr>
+              <a:buSzPts val="1400"/>
+              <a:buFont typeface="Arial"/>
+              <a:buChar char="•"/>
+              <a:defRPr sz="1400" b="0" i="0" u="none" strike="noStrike" cap="none">
+                <a:solidFill>
+                  <a:schemeClr val="dk1"/>
+                </a:solidFill>
+                <a:latin typeface="Calibri"/>
+                <a:ea typeface="Calibri"/>
+                <a:cs typeface="Calibri"/>
+                <a:sym typeface="Calibri"/>
+              </a:defRPr>
+            </a:lvl7pPr>
+            <a:lvl8pPr marL="3657600" marR="0" lvl="7" indent="-317500" algn="l" rtl="0">
+              <a:lnSpc>
+                <a:spcPct val="90000"/>
+              </a:lnSpc>
+              <a:spcBef>
+                <a:spcPts val="400"/>
+              </a:spcBef>
+              <a:spcAft>
+                <a:spcPts val="0"/>
+              </a:spcAft>
+              <a:buClr>
+                <a:schemeClr val="dk1"/>
+              </a:buClr>
+              <a:buSzPts val="1400"/>
+              <a:buFont typeface="Arial"/>
+              <a:buChar char="•"/>
+              <a:defRPr sz="1400" b="0" i="0" u="none" strike="noStrike" cap="none">
+                <a:solidFill>
+                  <a:schemeClr val="dk1"/>
+                </a:solidFill>
+                <a:latin typeface="Calibri"/>
+                <a:ea typeface="Calibri"/>
+                <a:cs typeface="Calibri"/>
+                <a:sym typeface="Calibri"/>
+              </a:defRPr>
+            </a:lvl8pPr>
+            <a:lvl9pPr marL="4114800" marR="0" lvl="8" indent="-317500" algn="l" rtl="0">
+              <a:lnSpc>
+                <a:spcPct val="90000"/>
+              </a:lnSpc>
+              <a:spcBef>
+                <a:spcPts val="400"/>
+              </a:spcBef>
+              <a:spcAft>
+                <a:spcPts val="0"/>
+              </a:spcAft>
+              <a:buClr>
+                <a:schemeClr val="dk1"/>
+              </a:buClr>
+              <a:buSzPts val="1400"/>
+              <a:buFont typeface="Arial"/>
+              <a:buChar char="•"/>
+              <a:defRPr sz="1400" b="0" i="0" u="none" strike="noStrike" cap="none">
+                <a:solidFill>
+                  <a:schemeClr val="dk1"/>
+                </a:solidFill>
+                <a:latin typeface="Calibri"/>
+                <a:ea typeface="Calibri"/>
+                <a:cs typeface="Calibri"/>
+                <a:sym typeface="Calibri"/>
+              </a:defRPr>
+            </a:lvl9pPr>
+          </a:lstStyle>
           <a:p>
-            <a:pPr algn="ctr"/>
-            <a:r>
-              <a:rPr lang="en-US" sz="1350" b="1" dirty="0">
+            <a:pPr marL="0" indent="0">
+              <a:buNone/>
+            </a:pPr>
+            <a:r>
+              <a:rPr lang="en-US" sz="2000" b="1" dirty="0">
+                <a:latin typeface="Calibri" panose="020F0502020204030204" pitchFamily="34" charset="0"/>
+                <a:ea typeface="Calibri" panose="020F0502020204030204" pitchFamily="34" charset="0"/>
+                <a:cs typeface="Calibri" panose="020F0502020204030204" pitchFamily="34" charset="0"/>
+              </a:rPr>
+              <a:t>Pipeline:  </a:t>
+            </a:r>
+            <a:r>
+              <a:rPr lang="en-US" altLang="zh-TW" sz="2000" dirty="0">
                 <a:solidFill>
-                  <a:srgbClr val="E87722"/>
+                  <a:schemeClr val="tx1"/>
                 </a:solidFill>
-                <a:latin typeface="Arial"/>
-                <a:cs typeface="Arial"/>
+                <a:latin typeface="Calibri" panose="020F0502020204030204" pitchFamily="34" charset="0"/>
+                <a:ea typeface="Calibri" panose="020F0502020204030204" pitchFamily="34" charset="0"/>
+                <a:cs typeface="Calibri" panose="020F0502020204030204" pitchFamily="34" charset="0"/>
               </a:rPr>
-              <a:t>One CSV decouples the two simulators — a reusable framework for any schedule</a:t>
-            </a:r>
+              <a:t>(validated on the TA scheduler trace)</a:t>
+            </a:r>
+            <a:endParaRPr lang="en-US" sz="2000" dirty="0">
+              <a:solidFill>
+                <a:schemeClr val="tx1"/>
+              </a:solidFill>
+              <a:latin typeface="Calibri" panose="020F0502020204030204" pitchFamily="34" charset="0"/>
+              <a:ea typeface="Calibri" panose="020F0502020204030204" pitchFamily="34" charset="0"/>
+              <a:cs typeface="Calibri" panose="020F0502020204030204" pitchFamily="34" charset="0"/>
+            </a:endParaRPr>
+          </a:p>
+          <a:p>
+            <a:pPr marL="0" indent="0" algn="ctr">
+              <a:buNone/>
+            </a:pPr>
+            <a:r>
+              <a:rPr lang="en-US" sz="2000" b="1" dirty="0">
+                <a:solidFill>
+                  <a:schemeClr val="accent2"/>
+                </a:solidFill>
+                <a:latin typeface="Calibri" panose="020F0502020204030204" pitchFamily="34" charset="0"/>
+                <a:ea typeface="Calibri" panose="020F0502020204030204" pitchFamily="34" charset="0"/>
+                <a:cs typeface="Calibri" panose="020F0502020204030204" pitchFamily="34" charset="0"/>
+              </a:rPr>
+              <a:t>uav-vanet.cc → master_buffer_trace.csv → uav-to-leo.cc</a:t>
+            </a:r>
+          </a:p>
+          <a:p>
+            <a:pPr marL="0" indent="0">
+              <a:buNone/>
+            </a:pPr>
+            <a:r>
+              <a:rPr lang="zh-TW" altLang="zh-TW" sz="2000" b="1" dirty="0">
+                <a:latin typeface="Calibri" panose="020F0502020204030204" pitchFamily="34" charset="0"/>
+                <a:cs typeface="Calibri" panose="020F0502020204030204" pitchFamily="34" charset="0"/>
+              </a:rPr>
+              <a:t>Input trace</a:t>
+            </a:r>
+            <a:r>
+              <a:rPr lang="en-US" altLang="zh-TW" sz="2000" b="1" dirty="0">
+                <a:latin typeface="Calibri" panose="020F0502020204030204" pitchFamily="34" charset="0"/>
+                <a:cs typeface="Calibri" panose="020F0502020204030204" pitchFamily="34" charset="0"/>
+              </a:rPr>
+              <a:t>:</a:t>
+            </a:r>
+            <a:endParaRPr lang="en-US" altLang="zh-TW" sz="2000" b="1" dirty="0">
+              <a:latin typeface="Calibri" panose="020F0502020204030204" pitchFamily="34" charset="0"/>
+              <a:ea typeface="Calibri" panose="020F0502020204030204" pitchFamily="34" charset="0"/>
+              <a:cs typeface="Calibri" panose="020F0502020204030204" pitchFamily="34" charset="0"/>
+            </a:endParaRPr>
+          </a:p>
+          <a:p>
+            <a:pPr marL="324000" indent="-342900"/>
+            <a:r>
+              <a:rPr lang="zh-TW" altLang="zh-TW" sz="2000" dirty="0">
+                <a:latin typeface="Calibri" panose="020F0502020204030204" pitchFamily="34" charset="0"/>
+                <a:cs typeface="Calibri" panose="020F0502020204030204" pitchFamily="34" charset="0"/>
+              </a:rPr>
+              <a:t>UAVs: 4</a:t>
+            </a:r>
+            <a:endParaRPr lang="en-US" altLang="zh-TW" sz="2000" dirty="0">
+              <a:latin typeface="Calibri" panose="020F0502020204030204" pitchFamily="34" charset="0"/>
+              <a:ea typeface="Calibri" panose="020F0502020204030204" pitchFamily="34" charset="0"/>
+              <a:cs typeface="Calibri" panose="020F0502020204030204" pitchFamily="34" charset="0"/>
+            </a:endParaRPr>
+          </a:p>
+          <a:p>
+            <a:pPr marL="324000" indent="-342900"/>
+            <a:r>
+              <a:rPr lang="zh-TW" altLang="zh-TW" sz="2000" dirty="0">
+                <a:latin typeface="Calibri" panose="020F0502020204030204" pitchFamily="34" charset="0"/>
+                <a:cs typeface="Calibri" panose="020F0502020204030204" pitchFamily="34" charset="0"/>
+              </a:rPr>
+              <a:t>Tasks: 619</a:t>
+            </a:r>
+            <a:endParaRPr lang="en-US" altLang="zh-TW" sz="2000" dirty="0">
+              <a:latin typeface="Calibri" panose="020F0502020204030204" pitchFamily="34" charset="0"/>
+              <a:ea typeface="Calibri" panose="020F0502020204030204" pitchFamily="34" charset="0"/>
+              <a:cs typeface="Calibri" panose="020F0502020204030204" pitchFamily="34" charset="0"/>
+            </a:endParaRPr>
+          </a:p>
+          <a:p>
+            <a:pPr marL="324000" indent="-342900"/>
+            <a:r>
+              <a:rPr lang="en-US" altLang="zh-TW" sz="2000" dirty="0">
+                <a:latin typeface="Calibri" panose="020F0502020204030204" pitchFamily="34" charset="0"/>
+                <a:ea typeface="Calibri" panose="020F0502020204030204" pitchFamily="34" charset="0"/>
+                <a:cs typeface="Calibri" panose="020F0502020204030204" pitchFamily="34" charset="0"/>
+              </a:rPr>
+              <a:t>Total Bytes: 1,902,141 Bytes</a:t>
+            </a:r>
+          </a:p>
+          <a:p>
+            <a:pPr marL="342900" indent="-342900"/>
+            <a:r>
+              <a:rPr lang="zh-TW" altLang="zh-TW" sz="2000" dirty="0">
+                <a:latin typeface="Calibri" panose="020F0502020204030204" pitchFamily="34" charset="0"/>
+                <a:cs typeface="Calibri" panose="020F0502020204030204" pitchFamily="34" charset="0"/>
+              </a:rPr>
+              <a:t>Mission deadline: </a:t>
+            </a:r>
+            <a:r>
+              <a:rPr lang="en-US" altLang="zh-TW" sz="2000" dirty="0">
+                <a:latin typeface="Calibri" panose="020F0502020204030204" pitchFamily="34" charset="0"/>
+                <a:ea typeface="Calibri" panose="020F0502020204030204" pitchFamily="34" charset="0"/>
+                <a:cs typeface="Calibri" panose="020F0502020204030204" pitchFamily="34" charset="0"/>
+              </a:rPr>
+              <a:t>36</a:t>
+            </a:r>
+            <a:r>
+              <a:rPr lang="zh-TW" altLang="zh-TW" sz="2000" dirty="0">
+                <a:latin typeface="Calibri" panose="020F0502020204030204" pitchFamily="34" charset="0"/>
+                <a:cs typeface="Calibri" panose="020F0502020204030204" pitchFamily="34" charset="0"/>
+              </a:rPr>
+              <a:t>00 s</a:t>
+            </a:r>
+            <a:endParaRPr lang="en-US" altLang="zh-TW" sz="2000" dirty="0">
+              <a:latin typeface="Calibri" panose="020F0502020204030204" pitchFamily="34" charset="0"/>
+              <a:ea typeface="Calibri" panose="020F0502020204030204" pitchFamily="34" charset="0"/>
+              <a:cs typeface="Calibri" panose="020F0502020204030204" pitchFamily="34" charset="0"/>
+            </a:endParaRPr>
           </a:p>
         </p:txBody>
       </p:sp>
     </p:spTree>
     <p:extLst>
       <p:ext uri="{BB962C8B-B14F-4D97-AF65-F5344CB8AC3E}">
-        <p14:creationId xmlns:p14="http://schemas.microsoft.com/office/powerpoint/2010/main" val="600383062"/>
+        <p14:creationId xmlns:p14="http://schemas.microsoft.com/office/powerpoint/2010/main" val="1131897745"/>
       </p:ext>
     </p:extLst>
   </p:cSld>

--- a/docs/專題期末報告.pptx
+++ b/docs/專題期末報告.pptx
@@ -20,7 +20,7 @@
     <p:sldId id="375" r:id="rId8"/>
     <p:sldId id="377" r:id="rId9"/>
     <p:sldId id="379" r:id="rId10"/>
-    <p:sldId id="381" r:id="rId11"/>
+    <p:sldId id="385" r:id="rId11"/>
     <p:sldId id="382" r:id="rId12"/>
     <p:sldId id="378" r:id="rId13"/>
     <p:sldId id="351" r:id="rId14"/>
@@ -296,7 +296,7 @@
       <p15:notesGuideLst xmlns:p15="http://schemas.microsoft.com/office/powerpoint/2012/main"/>
     </p:ext>
     <p:ext uri="GoogleSlidesCustomDataVersion2">
-      <go:slidesCustomData xmlns:go="http://customooxmlschemas.google.com/" xmlns:ahyp="http://schemas.microsoft.com/office/drawing/2018/hyperlinkcolor" xmlns:p15="http://schemas.microsoft.com/office/powerpoint/2012/main" xmlns:p14="http://schemas.microsoft.com/office/powerpoint/2010/main" xmlns:com="http://schemas.openxmlformats.org/drawingml/2006/compatibility" xmlns:pvml="urn:schemas-microsoft-com:office:powerpoint" xmlns:v="urn:schemas-microsoft-com:vml" xmlns:o="urn:schemas-microsoft-com:office:office" xmlns:dgm="http://schemas.openxmlformats.org/drawingml/2006/diagram" xmlns:c="http://schemas.openxmlformats.org/drawingml/2006/chart" xmlns:mv="urn:schemas-microsoft-com:mac:vml" xmlns:mc="http://schemas.openxmlformats.org/markup-compatibility/2006" xmlns="" r:id="rId64" roundtripDataSignature="AMtx7mgNlel+ZygXPW1yK/LuWkbTK5rvsg=="/>
+      <go:slidesCustomData xmlns="" xmlns:mc="http://schemas.openxmlformats.org/markup-compatibility/2006" xmlns:mv="urn:schemas-microsoft-com:mac:vml" xmlns:c="http://schemas.openxmlformats.org/drawingml/2006/chart" xmlns:dgm="http://schemas.openxmlformats.org/drawingml/2006/diagram" xmlns:o="urn:schemas-microsoft-com:office:office" xmlns:v="urn:schemas-microsoft-com:vml" xmlns:pvml="urn:schemas-microsoft-com:office:powerpoint" xmlns:com="http://schemas.openxmlformats.org/drawingml/2006/compatibility" xmlns:p14="http://schemas.microsoft.com/office/powerpoint/2010/main" xmlns:p15="http://schemas.microsoft.com/office/powerpoint/2012/main" xmlns:ahyp="http://schemas.microsoft.com/office/drawing/2018/hyperlinkcolor" xmlns:go="http://customooxmlschemas.google.com/" r:id="rId64" roundtripDataSignature="AMtx7mgNlel+ZygXPW1yK/LuWkbTK5rvsg=="/>
     </p:ext>
   </p:extLst>
 </p:presentation>
@@ -13980,7 +13980,7 @@
         <p:cNvPr id="1" name="">
           <a:extLst>
             <a:ext uri="{FF2B5EF4-FFF2-40B4-BE49-F238E27FC236}">
-              <a16:creationId xmlns:a16="http://schemas.microsoft.com/office/drawing/2014/main" id="{D5FAAFED-2AC9-8410-C3B8-BC5523F4E365}"/>
+              <a16:creationId xmlns:a16="http://schemas.microsoft.com/office/drawing/2014/main" id="{44A1C439-22A6-EC30-115E-2B4684CA13F2}"/>
             </a:ext>
           </a:extLst>
         </p:cNvPr>
@@ -14000,7 +14000,7 @@
           <p:cNvPr id="2" name="標題 1">
             <a:extLst>
               <a:ext uri="{FF2B5EF4-FFF2-40B4-BE49-F238E27FC236}">
-                <a16:creationId xmlns:a16="http://schemas.microsoft.com/office/drawing/2014/main" id="{33F4EED2-97E1-FDA4-BD2A-1EDAAC915656}"/>
+                <a16:creationId xmlns:a16="http://schemas.microsoft.com/office/drawing/2014/main" id="{78F6394E-5B91-EC03-17BC-34B4487EA42F}"/>
               </a:ext>
             </a:extLst>
           </p:cNvPr>
@@ -14020,14 +14020,14 @@
           <a:p>
             <a:r>
               <a:rPr lang="en-US" altLang="zh-TW" sz="3200" dirty="0">
-                <a:latin typeface="Times New Roman" panose="02020603050405020304" pitchFamily="18" charset="0"/>
+                <a:latin typeface="Helvetica Neue" panose="02020500000000000000" charset="0"/>
                 <a:ea typeface="標楷體" panose="03000509000000000000" pitchFamily="65" charset="-120"/>
                 <a:cs typeface="Times New Roman" panose="02020603050405020304" pitchFamily="18" charset="0"/>
               </a:rPr>
-              <a:t>Topo Evaluation: Result</a:t>
+              <a:t>Simulation Result: Scheduler vs. NS-3</a:t>
             </a:r>
             <a:endParaRPr lang="zh-TW" altLang="en-US" sz="3200" dirty="0">
-              <a:latin typeface="Times New Roman" panose="02020603050405020304" pitchFamily="18" charset="0"/>
+              <a:latin typeface="Helvetica Neue" panose="02020500000000000000" charset="0"/>
               <a:ea typeface="標楷體" panose="03000509000000000000" pitchFamily="65" charset="-120"/>
               <a:cs typeface="Times New Roman" panose="02020603050405020304" pitchFamily="18" charset="0"/>
             </a:endParaRPr>
@@ -14036,10 +14036,10 @@
       </p:sp>
       <p:sp>
         <p:nvSpPr>
-          <p:cNvPr id="4" name="投影片編號版面配置區 3">
+          <p:cNvPr id="3" name="文字版面配置區 2">
             <a:extLst>
               <a:ext uri="{FF2B5EF4-FFF2-40B4-BE49-F238E27FC236}">
-                <a16:creationId xmlns:a16="http://schemas.microsoft.com/office/drawing/2014/main" id="{A6BCF61D-FEDA-C171-AA05-C157F7887EB9}"/>
+                <a16:creationId xmlns:a16="http://schemas.microsoft.com/office/drawing/2014/main" id="{868A5C00-1B1F-F523-21E7-F4E93A76AE0B}"/>
               </a:ext>
             </a:extLst>
           </p:cNvPr>
@@ -14047,336 +14047,45 @@
             <a:spLocks noGrp="1"/>
           </p:cNvSpPr>
           <p:nvPr>
-            <p:ph type="sldNum" idx="12"/>
+            <p:ph type="body" idx="1"/>
           </p:nvPr>
         </p:nvSpPr>
-        <p:spPr/>
+        <p:spPr>
+          <a:xfrm>
+            <a:off x="446049" y="838200"/>
+            <a:ext cx="8251200" cy="500000"/>
+          </a:xfrm>
+        </p:spPr>
         <p:txBody>
-          <a:bodyPr/>
+          <a:bodyPr>
+            <a:normAutofit/>
+          </a:bodyPr>
           <a:lstStyle/>
           <a:p>
-            <a:pPr marL="0" lvl="0" indent="0" algn="r" rtl="0">
-              <a:spcBef>
-                <a:spcPts val="0"/>
-              </a:spcBef>
-              <a:spcAft>
-                <a:spcPts val="0"/>
-              </a:spcAft>
+            <a:pPr marL="0" indent="0">
               <a:buNone/>
             </a:pPr>
-            <a:fld id="{00000000-1234-1234-1234-123412341234}" type="slidenum">
-              <a:rPr lang="en-US" smtClean="0"/>
-              <a:t>10</a:t>
-            </a:fld>
-            <a:endParaRPr lang="en-US"/>
+            <a:r>
+              <a:rPr lang="en-US" sz="1600" b="1" dirty="0"/>
+              <a:t>Pipeline:  </a:t>
+            </a:r>
+            <a:r>
+              <a:rPr lang="en-US" sz="1600" dirty="0"/>
+              <a:t>TA scheduler trace  ·  405 sensors  ·  619 tasks  ·  mission deadline 3600 s</a:t>
+            </a:r>
           </a:p>
         </p:txBody>
       </p:sp>
       <p:sp>
         <p:nvSpPr>
-          <p:cNvPr id="70" name="stat70">
-            <a:extLst>
-              <a:ext uri="{FF2B5EF4-FFF2-40B4-BE49-F238E27FC236}">
-                <a16:creationId xmlns:a16="http://schemas.microsoft.com/office/drawing/2014/main" id="{EC8862A8-BA9C-4356-3B50-D3619D52F49B}"/>
-              </a:ext>
-            </a:extLst>
-          </p:cNvPr>
+          <p:cNvPr id="81" name="lbl81"/>
           <p:cNvSpPr/>
           <p:nvPr/>
         </p:nvSpPr>
         <p:spPr>
           <a:xfrm>
-            <a:off x="457200" y="1921386"/>
-            <a:ext cx="2697480" cy="2057400"/>
-          </a:xfrm>
-          <a:prstGeom prst="roundRect">
-            <a:avLst>
-              <a:gd name="adj" fmla="val 6000"/>
-            </a:avLst>
-          </a:prstGeom>
-          <a:solidFill>
-            <a:srgbClr val="E7F4E9"/>
-          </a:solidFill>
-          <a:ln w="15875">
-            <a:solidFill>
-              <a:srgbClr val="7DBF86"/>
-            </a:solidFill>
-          </a:ln>
-        </p:spPr>
-        <p:txBody>
-          <a:bodyPr rtlCol="0" anchor="ctr"/>
-          <a:lstStyle/>
-          <a:p>
-            <a:pPr algn="ctr"/>
-            <a:r>
-              <a:rPr lang="en-US" sz="2600" b="1" dirty="0">
-                <a:solidFill>
-                  <a:srgbClr val="2E7D32"/>
-                </a:solidFill>
-              </a:rPr>
-              <a:t>619</a:t>
-            </a:r>
-            <a:r>
-              <a:rPr lang="en-US" sz="2600" b="1" dirty="0">
-                <a:solidFill>
-                  <a:srgbClr val="2E7D32"/>
-                </a:solidFill>
-                <a:latin typeface="Arial"/>
-                <a:cs typeface="Arial"/>
-              </a:rPr>
-              <a:t> / 619</a:t>
-            </a:r>
-          </a:p>
-          <a:p>
-            <a:pPr algn="ctr">
-              <a:spcBef>
-                <a:spcPts val="300"/>
-              </a:spcBef>
-            </a:pPr>
-            <a:r>
-              <a:rPr lang="en-US" sz="1300" b="1" dirty="0">
-                <a:solidFill>
-                  <a:srgbClr val="404040"/>
-                </a:solidFill>
-                <a:latin typeface="Arial"/>
-                <a:cs typeface="Arial"/>
-              </a:rPr>
-              <a:t>tasks met deadline</a:t>
-            </a:r>
-          </a:p>
-          <a:p>
-            <a:pPr algn="ctr">
-              <a:spcBef>
-                <a:spcPts val="200"/>
-              </a:spcBef>
-            </a:pPr>
-            <a:r>
-              <a:rPr lang="en-US" sz="1050" i="1" dirty="0">
-                <a:solidFill>
-                  <a:srgbClr val="595959"/>
-                </a:solidFill>
-                <a:latin typeface="Arial"/>
-                <a:cs typeface="Arial"/>
-              </a:rPr>
-              <a:t>finish 3486.36 s  &lt;  3600 s</a:t>
-            </a:r>
-          </a:p>
-        </p:txBody>
-      </p:sp>
-      <p:sp>
-        <p:nvSpPr>
-          <p:cNvPr id="71" name="stat71">
-            <a:extLst>
-              <a:ext uri="{FF2B5EF4-FFF2-40B4-BE49-F238E27FC236}">
-                <a16:creationId xmlns:a16="http://schemas.microsoft.com/office/drawing/2014/main" id="{A114D7E4-F046-59AD-90AC-BF1A18054107}"/>
-              </a:ext>
-            </a:extLst>
-          </p:cNvPr>
-          <p:cNvSpPr/>
-          <p:nvPr/>
-        </p:nvSpPr>
-        <p:spPr>
-          <a:xfrm>
-            <a:off x="3246120" y="1921386"/>
-            <a:ext cx="2697480" cy="2057400"/>
-          </a:xfrm>
-          <a:prstGeom prst="roundRect">
-            <a:avLst>
-              <a:gd name="adj" fmla="val 6000"/>
-            </a:avLst>
-          </a:prstGeom>
-          <a:solidFill>
-            <a:srgbClr val="E8F1FA"/>
-          </a:solidFill>
-          <a:ln w="15875">
-            <a:solidFill>
-              <a:srgbClr val="6FA8DC"/>
-            </a:solidFill>
-          </a:ln>
-        </p:spPr>
-        <p:txBody>
-          <a:bodyPr rtlCol="0" anchor="ctr"/>
-          <a:lstStyle/>
-          <a:p>
-            <a:pPr algn="ctr"/>
-            <a:r>
-              <a:rPr lang="en-US" sz="2600" b="1" dirty="0">
-                <a:solidFill>
-                  <a:srgbClr val="1F5FA8"/>
-                </a:solidFill>
-                <a:latin typeface="Arial"/>
-                <a:cs typeface="Arial"/>
-              </a:rPr>
-              <a:t>1,238,529 B</a:t>
-            </a:r>
-          </a:p>
-          <a:p>
-            <a:pPr algn="ctr">
-              <a:spcBef>
-                <a:spcPts val="300"/>
-              </a:spcBef>
-            </a:pPr>
-            <a:r>
-              <a:rPr lang="en-US" sz="1300" b="1" dirty="0">
-                <a:solidFill>
-                  <a:srgbClr val="404040"/>
-                </a:solidFill>
-                <a:latin typeface="Arial"/>
-                <a:cs typeface="Arial"/>
-              </a:rPr>
-              <a:t>handed off to CH UAV</a:t>
-            </a:r>
-          </a:p>
-          <a:p>
-            <a:pPr algn="ctr">
-              <a:spcBef>
-                <a:spcPts val="200"/>
-              </a:spcBef>
-            </a:pPr>
-            <a:r>
-              <a:rPr lang="en-US" sz="1050" i="1" dirty="0">
-                <a:solidFill>
-                  <a:srgbClr val="595959"/>
-                </a:solidFill>
-                <a:latin typeface="Arial"/>
-                <a:cs typeface="Arial"/>
-              </a:rPr>
-              <a:t>via master_buffer_trace.csv</a:t>
-            </a:r>
-          </a:p>
-        </p:txBody>
-      </p:sp>
-      <p:sp>
-        <p:nvSpPr>
-          <p:cNvPr id="72" name="stat72">
-            <a:extLst>
-              <a:ext uri="{FF2B5EF4-FFF2-40B4-BE49-F238E27FC236}">
-                <a16:creationId xmlns:a16="http://schemas.microsoft.com/office/drawing/2014/main" id="{E49C843F-1FF4-0E41-A284-B299875D6043}"/>
-              </a:ext>
-            </a:extLst>
-          </p:cNvPr>
-          <p:cNvSpPr/>
-          <p:nvPr/>
-        </p:nvSpPr>
-        <p:spPr>
-          <a:xfrm>
-            <a:off x="6035040" y="1921386"/>
-            <a:ext cx="2697480" cy="2057400"/>
-          </a:xfrm>
-          <a:prstGeom prst="roundRect">
-            <a:avLst>
-              <a:gd name="adj" fmla="val 6000"/>
-            </a:avLst>
-          </a:prstGeom>
-          <a:solidFill>
-            <a:srgbClr val="FFF3DC"/>
-          </a:solidFill>
-          <a:ln w="15875">
-            <a:solidFill>
-              <a:srgbClr val="E0A93C"/>
-            </a:solidFill>
-          </a:ln>
-        </p:spPr>
-        <p:txBody>
-          <a:bodyPr rtlCol="0" anchor="ctr"/>
-          <a:lstStyle/>
-          <a:p>
-            <a:pPr algn="ctr"/>
-            <a:r>
-              <a:rPr lang="en-US" sz="2600" b="1" dirty="0">
-                <a:solidFill>
-                  <a:srgbClr val="B5781C"/>
-                </a:solidFill>
-                <a:latin typeface="Arial"/>
-                <a:cs typeface="Arial"/>
-              </a:rPr>
-              <a:t>leo_done = YES</a:t>
-            </a:r>
-          </a:p>
-          <a:p>
-            <a:pPr algn="ctr">
-              <a:spcBef>
-                <a:spcPts val="300"/>
-              </a:spcBef>
-            </a:pPr>
-            <a:r>
-              <a:rPr lang="en-US" sz="1300" b="1" dirty="0">
-                <a:solidFill>
-                  <a:srgbClr val="404040"/>
-                </a:solidFill>
-                <a:latin typeface="Arial"/>
-                <a:cs typeface="Arial"/>
-              </a:rPr>
-              <a:t>uploaded to LEO</a:t>
-            </a:r>
-          </a:p>
-          <a:p>
-            <a:pPr algn="ctr">
-              <a:spcBef>
-                <a:spcPts val="300"/>
-              </a:spcBef>
-            </a:pPr>
-            <a:r>
-              <a:rPr lang="en-US" altLang="zh-TW" sz="1050" i="1" dirty="0">
-                <a:solidFill>
-                  <a:srgbClr val="595959"/>
-                </a:solidFill>
-              </a:rPr>
-              <a:t>Effective throughput = 121.048 Mbps</a:t>
-            </a:r>
-          </a:p>
-          <a:p>
-            <a:pPr algn="ctr">
-              <a:spcBef>
-                <a:spcPts val="300"/>
-              </a:spcBef>
-            </a:pPr>
-            <a:r>
-              <a:rPr lang="en-US" sz="1050" i="1" dirty="0">
-                <a:solidFill>
-                  <a:srgbClr val="595959"/>
-                </a:solidFill>
-                <a:latin typeface="Arial"/>
-                <a:cs typeface="Arial"/>
-              </a:rPr>
-              <a:t>Duration = 81.854 </a:t>
-            </a:r>
-            <a:r>
-              <a:rPr lang="en-US" sz="1050" i="1" dirty="0" err="1">
-                <a:solidFill>
-                  <a:srgbClr val="595959"/>
-                </a:solidFill>
-                <a:latin typeface="Arial"/>
-                <a:cs typeface="Arial"/>
-              </a:rPr>
-              <a:t>ms</a:t>
-            </a:r>
-            <a:endParaRPr lang="en-US" sz="1050" dirty="0">
-              <a:solidFill>
-                <a:srgbClr val="404040"/>
-              </a:solidFill>
-              <a:latin typeface="Arial"/>
-              <a:cs typeface="Arial"/>
-            </a:endParaRPr>
-          </a:p>
-        </p:txBody>
-      </p:sp>
-      <p:sp>
-        <p:nvSpPr>
-          <p:cNvPr id="73" name="takeaway">
-            <a:extLst>
-              <a:ext uri="{FF2B5EF4-FFF2-40B4-BE49-F238E27FC236}">
-                <a16:creationId xmlns:a16="http://schemas.microsoft.com/office/drawing/2014/main" id="{D972EE02-F075-697E-E64E-F9BFDA10FE9C}"/>
-              </a:ext>
-            </a:extLst>
-          </p:cNvPr>
-          <p:cNvSpPr/>
-          <p:nvPr/>
-        </p:nvSpPr>
-        <p:spPr>
-          <a:xfrm>
-            <a:off x="457200" y="978508"/>
-            <a:ext cx="8275320" cy="548640"/>
+            <a:off x="365760" y="1143000"/>
+            <a:ext cx="5212080" cy="347472"/>
           </a:xfrm>
           <a:prstGeom prst="rect">
             <a:avLst/>
@@ -14387,72 +14096,1777 @@
           <a:bodyPr rtlCol="0" anchor="ctr"/>
           <a:lstStyle/>
           <a:p>
-            <a:pPr algn="ctr"/>
-            <a:r>
-              <a:rPr lang="en-US" sz="2000" dirty="0">
+            <a:r>
+              <a:rPr lang="en-US" sz="1300" b="1" dirty="0">
                 <a:solidFill>
-                  <a:schemeClr val="tx1"/>
+                  <a:srgbClr val="E87722"/>
                 </a:solidFill>
-                <a:latin typeface="Calibri" panose="020F0502020204030204" pitchFamily="34" charset="0"/>
-                <a:ea typeface="Calibri" panose="020F0502020204030204" pitchFamily="34" charset="0"/>
-                <a:cs typeface="Calibri" panose="020F0502020204030204" pitchFamily="34" charset="0"/>
+                <a:latin typeface="Arial"/>
               </a:rPr>
-              <a:t>One CSV decouples the two simulators</a:t>
-            </a:r>
-            <a:r>
-              <a:rPr lang="en-US" altLang="zh-TW" sz="2000" dirty="0">
-                <a:solidFill>
-                  <a:schemeClr val="tx1"/>
-                </a:solidFill>
-                <a:latin typeface="Calibri" panose="020F0502020204030204" pitchFamily="34" charset="0"/>
-                <a:ea typeface="Calibri" panose="020F0502020204030204" pitchFamily="34" charset="0"/>
-                <a:cs typeface="Calibri" panose="020F0502020204030204" pitchFamily="34" charset="0"/>
-              </a:rPr>
-              <a:t>:</a:t>
-            </a:r>
-          </a:p>
-          <a:p>
-            <a:pPr algn="ctr"/>
-            <a:r>
-              <a:rPr lang="en-US" sz="2000" dirty="0">
-                <a:solidFill>
-                  <a:schemeClr val="tx1"/>
-                </a:solidFill>
-                <a:latin typeface="Calibri" panose="020F0502020204030204" pitchFamily="34" charset="0"/>
-                <a:ea typeface="Calibri" panose="020F0502020204030204" pitchFamily="34" charset="0"/>
-                <a:cs typeface="Calibri" panose="020F0502020204030204" pitchFamily="34" charset="0"/>
-              </a:rPr>
-              <a:t> a </a:t>
-            </a:r>
-            <a:r>
-              <a:rPr lang="en-US" sz="2000" b="1" dirty="0">
-                <a:solidFill>
-                  <a:schemeClr val="accent2"/>
-                </a:solidFill>
-                <a:latin typeface="Calibri" panose="020F0502020204030204" pitchFamily="34" charset="0"/>
-                <a:ea typeface="Calibri" panose="020F0502020204030204" pitchFamily="34" charset="0"/>
-                <a:cs typeface="Calibri" panose="020F0502020204030204" pitchFamily="34" charset="0"/>
-              </a:rPr>
-              <a:t>reusable framework</a:t>
-            </a:r>
-            <a:r>
-              <a:rPr lang="en-US" sz="2000" dirty="0">
-                <a:solidFill>
-                  <a:schemeClr val="tx1"/>
-                </a:solidFill>
-                <a:latin typeface="Calibri" panose="020F0502020204030204" pitchFamily="34" charset="0"/>
-                <a:ea typeface="Calibri" panose="020F0502020204030204" pitchFamily="34" charset="0"/>
-                <a:cs typeface="Calibri" panose="020F0502020204030204" pitchFamily="34" charset="0"/>
-              </a:rPr>
-              <a:t> for any schedule</a:t>
+              <a:t>■  Intra-fleet Collection (vanet)</a:t>
             </a:r>
           </a:p>
         </p:txBody>
       </p:sp>
+      <p:graphicFrame>
+        <p:nvGraphicFramePr>
+          <p:cNvPr id="80" name="CmpTable"/>
+          <p:cNvGraphicFramePr/>
+          <p:nvPr>
+            <p:extLst>
+              <p:ext uri="{D42A27DB-BD31-4B8C-83A1-F6EECF244321}">
+                <p14:modId xmlns:p14="http://schemas.microsoft.com/office/powerpoint/2010/main" val="3177324051"/>
+              </p:ext>
+            </p:extLst>
+          </p:nvPr>
+        </p:nvGraphicFramePr>
+        <p:xfrm>
+          <a:off x="365760" y="1463040"/>
+          <a:ext cx="3931920" cy="1965960"/>
+        </p:xfrm>
+        <a:graphic>
+          <a:graphicData uri="http://schemas.openxmlformats.org/drawingml/2006/table">
+            <a:tbl>
+              <a:tblPr firstRow="1"/>
+              <a:tblGrid>
+                <a:gridCol w="1737360">
+                  <a:extLst>
+                    <a:ext uri="{9D8B030D-6E8A-4147-A177-3AD203B41FA5}">
+                      <a16:colId xmlns:a16="http://schemas.microsoft.com/office/drawing/2014/main" val="20000"/>
+                    </a:ext>
+                  </a:extLst>
+                </a:gridCol>
+                <a:gridCol w="1097280">
+                  <a:extLst>
+                    <a:ext uri="{9D8B030D-6E8A-4147-A177-3AD203B41FA5}">
+                      <a16:colId xmlns:a16="http://schemas.microsoft.com/office/drawing/2014/main" val="20001"/>
+                    </a:ext>
+                  </a:extLst>
+                </a:gridCol>
+                <a:gridCol w="1097280">
+                  <a:extLst>
+                    <a:ext uri="{9D8B030D-6E8A-4147-A177-3AD203B41FA5}">
+                      <a16:colId xmlns:a16="http://schemas.microsoft.com/office/drawing/2014/main" val="20002"/>
+                    </a:ext>
+                  </a:extLst>
+                </a:gridCol>
+              </a:tblGrid>
+              <a:tr h="393192">
+                <a:tc>
+                  <a:txBody>
+                    <a:bodyPr/>
+                    <a:lstStyle/>
+                    <a:p>
+                      <a:pPr algn="ctr"/>
+                      <a:r>
+                        <a:rPr lang="en-US" sz="1100" b="1" dirty="0">
+                          <a:solidFill>
+                            <a:srgbClr val="FFFFFF"/>
+                          </a:solidFill>
+                          <a:latin typeface="Arial"/>
+                          <a:cs typeface="Arial"/>
+                        </a:rPr>
+                        <a:t>Stage</a:t>
+                      </a:r>
+                    </a:p>
+                  </a:txBody>
+                  <a:tcPr marL="36000" marR="36000" marT="18000" marB="18000" anchor="ctr">
+                    <a:lnL w="6350">
+                      <a:solidFill>
+                        <a:srgbClr val="BFBFBF"/>
+                      </a:solidFill>
+                    </a:lnL>
+                    <a:lnR w="6350">
+                      <a:solidFill>
+                        <a:srgbClr val="BFBFBF"/>
+                      </a:solidFill>
+                    </a:lnR>
+                    <a:lnT w="6350">
+                      <a:solidFill>
+                        <a:srgbClr val="BFBFBF"/>
+                      </a:solidFill>
+                    </a:lnT>
+                    <a:lnB w="6350">
+                      <a:solidFill>
+                        <a:srgbClr val="BFBFBF"/>
+                      </a:solidFill>
+                    </a:lnB>
+                    <a:solidFill>
+                      <a:srgbClr val="E87722"/>
+                    </a:solidFill>
+                  </a:tcPr>
+                </a:tc>
+                <a:tc>
+                  <a:txBody>
+                    <a:bodyPr/>
+                    <a:lstStyle/>
+                    <a:p>
+                      <a:pPr algn="ctr"/>
+                      <a:r>
+                        <a:rPr lang="en-US" sz="1100" b="1" dirty="0">
+                          <a:solidFill>
+                            <a:srgbClr val="FFFFFF"/>
+                          </a:solidFill>
+                          <a:latin typeface="Arial"/>
+                          <a:cs typeface="Arial"/>
+                        </a:rPr>
+                        <a:t>Scheduler</a:t>
+                      </a:r>
+                    </a:p>
+                  </a:txBody>
+                  <a:tcPr marL="36000" marR="36000" marT="18000" marB="18000" anchor="ctr">
+                    <a:lnL w="6350">
+                      <a:solidFill>
+                        <a:srgbClr val="BFBFBF"/>
+                      </a:solidFill>
+                    </a:lnL>
+                    <a:lnR w="6350">
+                      <a:solidFill>
+                        <a:srgbClr val="BFBFBF"/>
+                      </a:solidFill>
+                    </a:lnR>
+                    <a:lnT w="6350">
+                      <a:solidFill>
+                        <a:srgbClr val="BFBFBF"/>
+                      </a:solidFill>
+                    </a:lnT>
+                    <a:lnB w="6350">
+                      <a:solidFill>
+                        <a:srgbClr val="BFBFBF"/>
+                      </a:solidFill>
+                    </a:lnB>
+                    <a:solidFill>
+                      <a:srgbClr val="E87722"/>
+                    </a:solidFill>
+                  </a:tcPr>
+                </a:tc>
+                <a:tc>
+                  <a:txBody>
+                    <a:bodyPr/>
+                    <a:lstStyle/>
+                    <a:p>
+                      <a:pPr algn="ctr"/>
+                      <a:r>
+                        <a:rPr lang="en-US" sz="1100" b="1" dirty="0">
+                          <a:solidFill>
+                            <a:srgbClr val="FFFFFF"/>
+                          </a:solidFill>
+                          <a:latin typeface="Arial"/>
+                          <a:cs typeface="Arial"/>
+                        </a:rPr>
+                        <a:t>NS-3</a:t>
+                      </a:r>
+                    </a:p>
+                  </a:txBody>
+                  <a:tcPr marL="36000" marR="36000" marT="18000" marB="18000" anchor="ctr">
+                    <a:lnL w="6350">
+                      <a:solidFill>
+                        <a:srgbClr val="BFBFBF"/>
+                      </a:solidFill>
+                    </a:lnL>
+                    <a:lnR w="6350">
+                      <a:solidFill>
+                        <a:srgbClr val="BFBFBF"/>
+                      </a:solidFill>
+                    </a:lnR>
+                    <a:lnT w="6350">
+                      <a:solidFill>
+                        <a:srgbClr val="BFBFBF"/>
+                      </a:solidFill>
+                    </a:lnT>
+                    <a:lnB w="6350">
+                      <a:solidFill>
+                        <a:srgbClr val="BFBFBF"/>
+                      </a:solidFill>
+                    </a:lnB>
+                    <a:solidFill>
+                      <a:srgbClr val="E87722"/>
+                    </a:solidFill>
+                  </a:tcPr>
+                </a:tc>
+                <a:extLst>
+                  <a:ext uri="{0D108BD9-81ED-4DB2-BD59-A6C34878D82A}">
+                    <a16:rowId xmlns:a16="http://schemas.microsoft.com/office/drawing/2014/main" val="10000"/>
+                  </a:ext>
+                </a:extLst>
+              </a:tr>
+              <a:tr h="393192">
+                <a:tc>
+                  <a:txBody>
+                    <a:bodyPr/>
+                    <a:lstStyle/>
+                    <a:p>
+                      <a:pPr algn="l"/>
+                      <a:r>
+                        <a:rPr lang="en-US" sz="1100" b="1" dirty="0">
+                          <a:solidFill>
+                            <a:srgbClr val="000000"/>
+                          </a:solidFill>
+                          <a:latin typeface="Arial"/>
+                          <a:cs typeface="Arial"/>
+                        </a:rPr>
+                        <a:t>Sensor → UAV  finish</a:t>
+                      </a:r>
+                    </a:p>
+                  </a:txBody>
+                  <a:tcPr marL="36000" marR="36000" marT="18000" marB="18000" anchor="ctr">
+                    <a:lnL w="6350">
+                      <a:solidFill>
+                        <a:srgbClr val="BFBFBF"/>
+                      </a:solidFill>
+                    </a:lnL>
+                    <a:lnR w="6350">
+                      <a:solidFill>
+                        <a:srgbClr val="BFBFBF"/>
+                      </a:solidFill>
+                    </a:lnR>
+                    <a:lnT w="6350">
+                      <a:solidFill>
+                        <a:srgbClr val="BFBFBF"/>
+                      </a:solidFill>
+                    </a:lnT>
+                    <a:lnB w="6350">
+                      <a:solidFill>
+                        <a:srgbClr val="BFBFBF"/>
+                      </a:solidFill>
+                    </a:lnB>
+                    <a:solidFill>
+                      <a:srgbClr val="FFFFFF"/>
+                    </a:solidFill>
+                  </a:tcPr>
+                </a:tc>
+                <a:tc>
+                  <a:txBody>
+                    <a:bodyPr/>
+                    <a:lstStyle/>
+                    <a:p>
+                      <a:pPr algn="ctr"/>
+                      <a:r>
+                        <a:rPr lang="en-US" sz="1100" b="0" dirty="0">
+                          <a:solidFill>
+                            <a:srgbClr val="000000"/>
+                          </a:solidFill>
+                          <a:latin typeface="Arial"/>
+                          <a:cs typeface="Arial"/>
+                        </a:rPr>
+                        <a:t>3400.6 s</a:t>
+                      </a:r>
+                    </a:p>
+                  </a:txBody>
+                  <a:tcPr marL="36000" marR="36000" marT="18000" marB="18000" anchor="ctr">
+                    <a:lnL w="6350">
+                      <a:solidFill>
+                        <a:srgbClr val="BFBFBF"/>
+                      </a:solidFill>
+                    </a:lnL>
+                    <a:lnR w="6350">
+                      <a:solidFill>
+                        <a:srgbClr val="BFBFBF"/>
+                      </a:solidFill>
+                    </a:lnR>
+                    <a:lnT w="6350">
+                      <a:solidFill>
+                        <a:srgbClr val="BFBFBF"/>
+                      </a:solidFill>
+                    </a:lnT>
+                    <a:lnB w="6350">
+                      <a:solidFill>
+                        <a:srgbClr val="BFBFBF"/>
+                      </a:solidFill>
+                    </a:lnB>
+                    <a:solidFill>
+                      <a:srgbClr val="FFFFFF"/>
+                    </a:solidFill>
+                  </a:tcPr>
+                </a:tc>
+                <a:tc>
+                  <a:txBody>
+                    <a:bodyPr/>
+                    <a:lstStyle/>
+                    <a:p>
+                      <a:pPr algn="ctr"/>
+                      <a:r>
+                        <a:rPr lang="en-US" sz="1100" b="0" dirty="0">
+                          <a:solidFill>
+                            <a:srgbClr val="000000"/>
+                          </a:solidFill>
+                          <a:latin typeface="Arial"/>
+                          <a:cs typeface="Arial"/>
+                        </a:rPr>
+                        <a:t>3486.4 s</a:t>
+                      </a:r>
+                    </a:p>
+                  </a:txBody>
+                  <a:tcPr marL="36000" marR="36000" marT="18000" marB="18000" anchor="ctr">
+                    <a:lnL w="6350">
+                      <a:solidFill>
+                        <a:srgbClr val="BFBFBF"/>
+                      </a:solidFill>
+                    </a:lnL>
+                    <a:lnR w="6350">
+                      <a:solidFill>
+                        <a:srgbClr val="BFBFBF"/>
+                      </a:solidFill>
+                    </a:lnR>
+                    <a:lnT w="6350">
+                      <a:solidFill>
+                        <a:srgbClr val="BFBFBF"/>
+                      </a:solidFill>
+                    </a:lnT>
+                    <a:lnB w="6350">
+                      <a:solidFill>
+                        <a:srgbClr val="BFBFBF"/>
+                      </a:solidFill>
+                    </a:lnB>
+                    <a:solidFill>
+                      <a:srgbClr val="FFFFFF"/>
+                    </a:solidFill>
+                  </a:tcPr>
+                </a:tc>
+                <a:extLst>
+                  <a:ext uri="{0D108BD9-81ED-4DB2-BD59-A6C34878D82A}">
+                    <a16:rowId xmlns:a16="http://schemas.microsoft.com/office/drawing/2014/main" val="10001"/>
+                  </a:ext>
+                </a:extLst>
+              </a:tr>
+              <a:tr h="393192">
+                <a:tc>
+                  <a:txBody>
+                    <a:bodyPr/>
+                    <a:lstStyle/>
+                    <a:p>
+                      <a:pPr algn="l"/>
+                      <a:r>
+                        <a:rPr lang="en-US" sz="1100" b="1" dirty="0">
+                          <a:solidFill>
+                            <a:srgbClr val="000000"/>
+                          </a:solidFill>
+                          <a:latin typeface="Arial"/>
+                          <a:cs typeface="Arial"/>
+                        </a:rPr>
+                        <a:t>Slave → Master  finish</a:t>
+                      </a:r>
+                    </a:p>
+                  </a:txBody>
+                  <a:tcPr marL="36000" marR="36000" marT="18000" marB="18000" anchor="ctr">
+                    <a:lnL w="6350">
+                      <a:solidFill>
+                        <a:srgbClr val="BFBFBF"/>
+                      </a:solidFill>
+                    </a:lnL>
+                    <a:lnR w="6350">
+                      <a:solidFill>
+                        <a:srgbClr val="BFBFBF"/>
+                      </a:solidFill>
+                    </a:lnR>
+                    <a:lnT w="6350">
+                      <a:solidFill>
+                        <a:srgbClr val="BFBFBF"/>
+                      </a:solidFill>
+                    </a:lnT>
+                    <a:lnB w="6350">
+                      <a:solidFill>
+                        <a:srgbClr val="BFBFBF"/>
+                      </a:solidFill>
+                    </a:lnB>
+                    <a:solidFill>
+                      <a:srgbClr val="F4F4F4"/>
+                    </a:solidFill>
+                  </a:tcPr>
+                </a:tc>
+                <a:tc>
+                  <a:txBody>
+                    <a:bodyPr/>
+                    <a:lstStyle/>
+                    <a:p>
+                      <a:pPr algn="ctr"/>
+                      <a:r>
+                        <a:rPr lang="en-US" sz="1100" b="0" dirty="0">
+                          <a:solidFill>
+                            <a:srgbClr val="000000"/>
+                          </a:solidFill>
+                          <a:latin typeface="Arial"/>
+                          <a:cs typeface="Arial"/>
+                        </a:rPr>
+                        <a:t>3395.7 s</a:t>
+                      </a:r>
+                    </a:p>
+                  </a:txBody>
+                  <a:tcPr marL="36000" marR="36000" marT="18000" marB="18000" anchor="ctr">
+                    <a:lnL w="6350">
+                      <a:solidFill>
+                        <a:srgbClr val="BFBFBF"/>
+                      </a:solidFill>
+                    </a:lnL>
+                    <a:lnR w="6350">
+                      <a:solidFill>
+                        <a:srgbClr val="BFBFBF"/>
+                      </a:solidFill>
+                    </a:lnR>
+                    <a:lnT w="6350">
+                      <a:solidFill>
+                        <a:srgbClr val="BFBFBF"/>
+                      </a:solidFill>
+                    </a:lnT>
+                    <a:lnB w="6350">
+                      <a:solidFill>
+                        <a:srgbClr val="BFBFBF"/>
+                      </a:solidFill>
+                    </a:lnB>
+                    <a:solidFill>
+                      <a:srgbClr val="F4F4F4"/>
+                    </a:solidFill>
+                  </a:tcPr>
+                </a:tc>
+                <a:tc>
+                  <a:txBody>
+                    <a:bodyPr/>
+                    <a:lstStyle/>
+                    <a:p>
+                      <a:pPr algn="ctr"/>
+                      <a:r>
+                        <a:rPr lang="en-US" sz="1100" b="0" dirty="0">
+                          <a:solidFill>
+                            <a:srgbClr val="000000"/>
+                          </a:solidFill>
+                          <a:latin typeface="Arial"/>
+                          <a:cs typeface="Arial"/>
+                        </a:rPr>
+                        <a:t>3396.6 s</a:t>
+                      </a:r>
+                    </a:p>
+                  </a:txBody>
+                  <a:tcPr marL="36000" marR="36000" marT="18000" marB="18000" anchor="ctr">
+                    <a:lnL w="6350">
+                      <a:solidFill>
+                        <a:srgbClr val="BFBFBF"/>
+                      </a:solidFill>
+                    </a:lnL>
+                    <a:lnR w="6350">
+                      <a:solidFill>
+                        <a:srgbClr val="BFBFBF"/>
+                      </a:solidFill>
+                    </a:lnR>
+                    <a:lnT w="6350">
+                      <a:solidFill>
+                        <a:srgbClr val="BFBFBF"/>
+                      </a:solidFill>
+                    </a:lnT>
+                    <a:lnB w="6350">
+                      <a:solidFill>
+                        <a:srgbClr val="BFBFBF"/>
+                      </a:solidFill>
+                    </a:lnB>
+                    <a:solidFill>
+                      <a:srgbClr val="F4F4F4"/>
+                    </a:solidFill>
+                  </a:tcPr>
+                </a:tc>
+                <a:extLst>
+                  <a:ext uri="{0D108BD9-81ED-4DB2-BD59-A6C34878D82A}">
+                    <a16:rowId xmlns:a16="http://schemas.microsoft.com/office/drawing/2014/main" val="10002"/>
+                  </a:ext>
+                </a:extLst>
+              </a:tr>
+              <a:tr h="393192">
+                <a:tc>
+                  <a:txBody>
+                    <a:bodyPr/>
+                    <a:lstStyle/>
+                    <a:p>
+                      <a:pPr algn="l"/>
+                      <a:r>
+                        <a:rPr lang="en-US" sz="1100" b="1" dirty="0">
+                          <a:solidFill>
+                            <a:srgbClr val="000000"/>
+                          </a:solidFill>
+                          <a:latin typeface="Arial"/>
+                          <a:cs typeface="Arial"/>
+                        </a:rPr>
+                        <a:t>Mission finish</a:t>
+                      </a:r>
+                    </a:p>
+                  </a:txBody>
+                  <a:tcPr marL="36000" marR="36000" marT="18000" marB="18000" anchor="ctr">
+                    <a:lnL w="6350">
+                      <a:solidFill>
+                        <a:srgbClr val="BFBFBF"/>
+                      </a:solidFill>
+                    </a:lnL>
+                    <a:lnR w="6350">
+                      <a:solidFill>
+                        <a:srgbClr val="BFBFBF"/>
+                      </a:solidFill>
+                    </a:lnR>
+                    <a:lnT w="6350">
+                      <a:solidFill>
+                        <a:srgbClr val="BFBFBF"/>
+                      </a:solidFill>
+                    </a:lnT>
+                    <a:lnB w="6350">
+                      <a:solidFill>
+                        <a:srgbClr val="BFBFBF"/>
+                      </a:solidFill>
+                    </a:lnB>
+                    <a:solidFill>
+                      <a:srgbClr val="FFFFFF"/>
+                    </a:solidFill>
+                  </a:tcPr>
+                </a:tc>
+                <a:tc>
+                  <a:txBody>
+                    <a:bodyPr/>
+                    <a:lstStyle/>
+                    <a:p>
+                      <a:pPr algn="ctr"/>
+                      <a:r>
+                        <a:rPr lang="en-US" sz="1100" b="0" dirty="0">
+                          <a:solidFill>
+                            <a:srgbClr val="000000"/>
+                          </a:solidFill>
+                          <a:latin typeface="Arial"/>
+                          <a:cs typeface="Arial"/>
+                        </a:rPr>
+                        <a:t>3584.0 s</a:t>
+                      </a:r>
+                    </a:p>
+                  </a:txBody>
+                  <a:tcPr marL="36000" marR="36000" marT="18000" marB="18000" anchor="ctr">
+                    <a:lnL w="6350">
+                      <a:solidFill>
+                        <a:srgbClr val="BFBFBF"/>
+                      </a:solidFill>
+                    </a:lnL>
+                    <a:lnR w="6350">
+                      <a:solidFill>
+                        <a:srgbClr val="BFBFBF"/>
+                      </a:solidFill>
+                    </a:lnR>
+                    <a:lnT w="6350">
+                      <a:solidFill>
+                        <a:srgbClr val="BFBFBF"/>
+                      </a:solidFill>
+                    </a:lnT>
+                    <a:lnB w="6350">
+                      <a:solidFill>
+                        <a:srgbClr val="BFBFBF"/>
+                      </a:solidFill>
+                    </a:lnB>
+                    <a:solidFill>
+                      <a:srgbClr val="FFFFFF"/>
+                    </a:solidFill>
+                  </a:tcPr>
+                </a:tc>
+                <a:tc>
+                  <a:txBody>
+                    <a:bodyPr/>
+                    <a:lstStyle/>
+                    <a:p>
+                      <a:pPr algn="ctr"/>
+                      <a:r>
+                        <a:rPr lang="en-US" sz="1100" b="0" dirty="0">
+                          <a:solidFill>
+                            <a:srgbClr val="000000"/>
+                          </a:solidFill>
+                          <a:latin typeface="Arial"/>
+                          <a:cs typeface="Arial"/>
+                        </a:rPr>
+                        <a:t>3580.8 s</a:t>
+                      </a:r>
+                    </a:p>
+                  </a:txBody>
+                  <a:tcPr marL="36000" marR="36000" marT="18000" marB="18000" anchor="ctr">
+                    <a:lnL w="6350">
+                      <a:solidFill>
+                        <a:srgbClr val="BFBFBF"/>
+                      </a:solidFill>
+                    </a:lnL>
+                    <a:lnR w="6350">
+                      <a:solidFill>
+                        <a:srgbClr val="BFBFBF"/>
+                      </a:solidFill>
+                    </a:lnR>
+                    <a:lnT w="6350">
+                      <a:solidFill>
+                        <a:srgbClr val="BFBFBF"/>
+                      </a:solidFill>
+                    </a:lnT>
+                    <a:lnB w="6350">
+                      <a:solidFill>
+                        <a:srgbClr val="BFBFBF"/>
+                      </a:solidFill>
+                    </a:lnB>
+                    <a:solidFill>
+                      <a:srgbClr val="FFFFFF"/>
+                    </a:solidFill>
+                  </a:tcPr>
+                </a:tc>
+                <a:extLst>
+                  <a:ext uri="{0D108BD9-81ED-4DB2-BD59-A6C34878D82A}">
+                    <a16:rowId xmlns:a16="http://schemas.microsoft.com/office/drawing/2014/main" val="10003"/>
+                  </a:ext>
+                </a:extLst>
+              </a:tr>
+              <a:tr h="393192">
+                <a:tc>
+                  <a:txBody>
+                    <a:bodyPr/>
+                    <a:lstStyle/>
+                    <a:p>
+                      <a:pPr algn="l"/>
+                      <a:r>
+                        <a:rPr lang="en-US" sz="1100" b="1" dirty="0">
+                          <a:solidFill>
+                            <a:srgbClr val="000000"/>
+                          </a:solidFill>
+                          <a:latin typeface="Arial"/>
+                          <a:cs typeface="Arial"/>
+                        </a:rPr>
+                        <a:t>Task deadline pass</a:t>
+                      </a:r>
+                    </a:p>
+                  </a:txBody>
+                  <a:tcPr marL="36000" marR="36000" marT="18000" marB="18000" anchor="ctr">
+                    <a:lnL w="6350">
+                      <a:solidFill>
+                        <a:srgbClr val="BFBFBF"/>
+                      </a:solidFill>
+                    </a:lnL>
+                    <a:lnR w="6350">
+                      <a:solidFill>
+                        <a:srgbClr val="BFBFBF"/>
+                      </a:solidFill>
+                    </a:lnR>
+                    <a:lnT w="6350">
+                      <a:solidFill>
+                        <a:srgbClr val="BFBFBF"/>
+                      </a:solidFill>
+                    </a:lnT>
+                    <a:lnB w="6350">
+                      <a:solidFill>
+                        <a:srgbClr val="BFBFBF"/>
+                      </a:solidFill>
+                    </a:lnB>
+                    <a:solidFill>
+                      <a:srgbClr val="F4F4F4"/>
+                    </a:solidFill>
+                  </a:tcPr>
+                </a:tc>
+                <a:tc>
+                  <a:txBody>
+                    <a:bodyPr/>
+                    <a:lstStyle/>
+                    <a:p>
+                      <a:pPr algn="ctr"/>
+                      <a:r>
+                        <a:rPr lang="en-US" sz="1100" b="0" dirty="0">
+                          <a:solidFill>
+                            <a:srgbClr val="000000"/>
+                          </a:solidFill>
+                          <a:latin typeface="Arial"/>
+                          <a:cs typeface="Arial"/>
+                        </a:rPr>
+                        <a:t>619 / 619</a:t>
+                      </a:r>
+                    </a:p>
+                  </a:txBody>
+                  <a:tcPr marL="36000" marR="36000" marT="18000" marB="18000" anchor="ctr">
+                    <a:lnL w="6350">
+                      <a:solidFill>
+                        <a:srgbClr val="BFBFBF"/>
+                      </a:solidFill>
+                    </a:lnL>
+                    <a:lnR w="6350">
+                      <a:solidFill>
+                        <a:srgbClr val="BFBFBF"/>
+                      </a:solidFill>
+                    </a:lnR>
+                    <a:lnT w="6350">
+                      <a:solidFill>
+                        <a:srgbClr val="BFBFBF"/>
+                      </a:solidFill>
+                    </a:lnT>
+                    <a:lnB w="6350">
+                      <a:solidFill>
+                        <a:srgbClr val="BFBFBF"/>
+                      </a:solidFill>
+                    </a:lnB>
+                    <a:solidFill>
+                      <a:srgbClr val="F4F4F4"/>
+                    </a:solidFill>
+                  </a:tcPr>
+                </a:tc>
+                <a:tc>
+                  <a:txBody>
+                    <a:bodyPr/>
+                    <a:lstStyle/>
+                    <a:p>
+                      <a:pPr algn="ctr"/>
+                      <a:r>
+                        <a:rPr lang="en-US" sz="1100" b="0" dirty="0">
+                          <a:solidFill>
+                            <a:srgbClr val="000000"/>
+                          </a:solidFill>
+                          <a:latin typeface="Arial"/>
+                          <a:cs typeface="Arial"/>
+                        </a:rPr>
+                        <a:t>619 / 619</a:t>
+                      </a:r>
+                    </a:p>
+                  </a:txBody>
+                  <a:tcPr marL="36000" marR="36000" marT="18000" marB="18000" anchor="ctr">
+                    <a:lnL w="6350">
+                      <a:solidFill>
+                        <a:srgbClr val="BFBFBF"/>
+                      </a:solidFill>
+                    </a:lnL>
+                    <a:lnR w="6350">
+                      <a:solidFill>
+                        <a:srgbClr val="BFBFBF"/>
+                      </a:solidFill>
+                    </a:lnR>
+                    <a:lnT w="6350">
+                      <a:solidFill>
+                        <a:srgbClr val="BFBFBF"/>
+                      </a:solidFill>
+                    </a:lnT>
+                    <a:lnB w="6350">
+                      <a:solidFill>
+                        <a:srgbClr val="BFBFBF"/>
+                      </a:solidFill>
+                    </a:lnB>
+                    <a:solidFill>
+                      <a:srgbClr val="F4F4F4"/>
+                    </a:solidFill>
+                  </a:tcPr>
+                </a:tc>
+                <a:extLst>
+                  <a:ext uri="{0D108BD9-81ED-4DB2-BD59-A6C34878D82A}">
+                    <a16:rowId xmlns:a16="http://schemas.microsoft.com/office/drawing/2014/main" val="10004"/>
+                  </a:ext>
+                </a:extLst>
+              </a:tr>
+            </a:tbl>
+          </a:graphicData>
+        </a:graphic>
+      </p:graphicFrame>
+      <p:sp>
+        <p:nvSpPr>
+          <p:cNvPr id="83" name="lbl83"/>
+          <p:cNvSpPr/>
+          <p:nvPr/>
+        </p:nvSpPr>
+        <p:spPr>
+          <a:xfrm>
+            <a:off x="4571649" y="1143000"/>
+            <a:ext cx="3063240" cy="347472"/>
+          </a:xfrm>
+          <a:prstGeom prst="rect">
+            <a:avLst/>
+          </a:prstGeom>
+          <a:noFill/>
+        </p:spPr>
+        <p:txBody>
+          <a:bodyPr rtlCol="0" anchor="ctr"/>
+          <a:lstStyle/>
+          <a:p>
+            <a:r>
+              <a:rPr lang="en-US" sz="1300" b="1" dirty="0">
+                <a:solidFill>
+                  <a:srgbClr val="E87722"/>
+                </a:solidFill>
+                <a:latin typeface="Arial"/>
+              </a:rPr>
+              <a:t>■  Master → LEO Uplink</a:t>
+            </a:r>
+          </a:p>
+        </p:txBody>
+      </p:sp>
+      <p:graphicFrame>
+        <p:nvGraphicFramePr>
+          <p:cNvPr id="5" name="CmpTable">
+            <a:extLst>
+              <a:ext uri="{FF2B5EF4-FFF2-40B4-BE49-F238E27FC236}">
+                <a16:creationId xmlns:a16="http://schemas.microsoft.com/office/drawing/2014/main" id="{8D04BA0E-6CD4-17A1-EF3B-600A3FB16841}"/>
+              </a:ext>
+            </a:extLst>
+          </p:cNvPr>
+          <p:cNvGraphicFramePr/>
+          <p:nvPr>
+            <p:extLst>
+              <p:ext uri="{D42A27DB-BD31-4B8C-83A1-F6EECF244321}">
+                <p14:modId xmlns:p14="http://schemas.microsoft.com/office/powerpoint/2010/main" val="3342992562"/>
+              </p:ext>
+            </p:extLst>
+          </p:nvPr>
+        </p:nvGraphicFramePr>
+        <p:xfrm>
+          <a:off x="4571649" y="1463040"/>
+          <a:ext cx="3931920" cy="3145536"/>
+        </p:xfrm>
+        <a:graphic>
+          <a:graphicData uri="http://schemas.openxmlformats.org/drawingml/2006/table">
+            <a:tbl>
+              <a:tblPr firstRow="1"/>
+              <a:tblGrid>
+                <a:gridCol w="1737360">
+                  <a:extLst>
+                    <a:ext uri="{9D8B030D-6E8A-4147-A177-3AD203B41FA5}">
+                      <a16:colId xmlns:a16="http://schemas.microsoft.com/office/drawing/2014/main" val="20000"/>
+                    </a:ext>
+                  </a:extLst>
+                </a:gridCol>
+                <a:gridCol w="2194560">
+                  <a:extLst>
+                    <a:ext uri="{9D8B030D-6E8A-4147-A177-3AD203B41FA5}">
+                      <a16:colId xmlns:a16="http://schemas.microsoft.com/office/drawing/2014/main" val="20001"/>
+                    </a:ext>
+                  </a:extLst>
+                </a:gridCol>
+              </a:tblGrid>
+              <a:tr h="393192">
+                <a:tc>
+                  <a:txBody>
+                    <a:bodyPr/>
+                    <a:lstStyle/>
+                    <a:p>
+                      <a:pPr algn="ctr"/>
+                      <a:r>
+                        <a:rPr lang="en-US" sz="1100" b="1" dirty="0">
+                          <a:solidFill>
+                            <a:srgbClr val="FFFFFF"/>
+                          </a:solidFill>
+                          <a:latin typeface="Arial"/>
+                          <a:cs typeface="Arial"/>
+                        </a:rPr>
+                        <a:t>Stage</a:t>
+                      </a:r>
+                    </a:p>
+                  </a:txBody>
+                  <a:tcPr marL="36000" marR="36000" marT="18000" marB="18000" anchor="ctr">
+                    <a:lnL w="6350">
+                      <a:solidFill>
+                        <a:srgbClr val="BFBFBF"/>
+                      </a:solidFill>
+                    </a:lnL>
+                    <a:lnR w="6350">
+                      <a:solidFill>
+                        <a:srgbClr val="BFBFBF"/>
+                      </a:solidFill>
+                    </a:lnR>
+                    <a:lnT w="6350">
+                      <a:solidFill>
+                        <a:srgbClr val="BFBFBF"/>
+                      </a:solidFill>
+                    </a:lnT>
+                    <a:lnB w="6350" cap="flat" cmpd="sng" algn="ctr">
+                      <a:solidFill>
+                        <a:srgbClr val="BFBFBF"/>
+                      </a:solidFill>
+                      <a:prstDash val="solid"/>
+                      <a:round/>
+                      <a:headEnd type="none" w="med" len="med"/>
+                      <a:tailEnd type="none" w="med" len="med"/>
+                    </a:lnB>
+                    <a:solidFill>
+                      <a:srgbClr val="E87722"/>
+                    </a:solidFill>
+                  </a:tcPr>
+                </a:tc>
+                <a:tc>
+                  <a:txBody>
+                    <a:bodyPr/>
+                    <a:lstStyle/>
+                    <a:p>
+                      <a:pPr algn="ctr"/>
+                      <a:r>
+                        <a:rPr lang="en-US" sz="1100" b="1" dirty="0">
+                          <a:solidFill>
+                            <a:srgbClr val="FFFFFF"/>
+                          </a:solidFill>
+                          <a:latin typeface="Arial"/>
+                          <a:cs typeface="Arial"/>
+                        </a:rPr>
+                        <a:t>NS-3</a:t>
+                      </a:r>
+                    </a:p>
+                  </a:txBody>
+                  <a:tcPr marL="36000" marR="36000" marT="18000" marB="18000" anchor="ctr">
+                    <a:lnL w="6350">
+                      <a:solidFill>
+                        <a:srgbClr val="BFBFBF"/>
+                      </a:solidFill>
+                    </a:lnL>
+                    <a:lnR w="6350">
+                      <a:solidFill>
+                        <a:srgbClr val="BFBFBF"/>
+                      </a:solidFill>
+                    </a:lnR>
+                    <a:lnT w="6350">
+                      <a:solidFill>
+                        <a:srgbClr val="BFBFBF"/>
+                      </a:solidFill>
+                    </a:lnT>
+                    <a:lnB w="6350" cap="flat" cmpd="sng" algn="ctr">
+                      <a:solidFill>
+                        <a:srgbClr val="BFBFBF"/>
+                      </a:solidFill>
+                      <a:prstDash val="solid"/>
+                      <a:round/>
+                      <a:headEnd type="none" w="med" len="med"/>
+                      <a:tailEnd type="none" w="med" len="med"/>
+                    </a:lnB>
+                    <a:solidFill>
+                      <a:srgbClr val="E87722"/>
+                    </a:solidFill>
+                  </a:tcPr>
+                </a:tc>
+                <a:extLst>
+                  <a:ext uri="{0D108BD9-81ED-4DB2-BD59-A6C34878D82A}">
+                    <a16:rowId xmlns:a16="http://schemas.microsoft.com/office/drawing/2014/main" val="10000"/>
+                  </a:ext>
+                </a:extLst>
+              </a:tr>
+              <a:tr h="393192">
+                <a:tc>
+                  <a:txBody>
+                    <a:bodyPr/>
+                    <a:lstStyle/>
+                    <a:p>
+                      <a:pPr algn="l"/>
+                      <a:r>
+                        <a:rPr lang="en-US" sz="1100" b="1" dirty="0">
+                          <a:solidFill>
+                            <a:srgbClr val="000000"/>
+                          </a:solidFill>
+                          <a:latin typeface="Arial"/>
+                          <a:cs typeface="Arial"/>
+                        </a:rPr>
+                        <a:t>Total Bytes</a:t>
+                      </a:r>
+                    </a:p>
+                  </a:txBody>
+                  <a:tcPr marL="36000" marR="36000" marT="18000" marB="18000" anchor="ctr">
+                    <a:lnL w="6350">
+                      <a:solidFill>
+                        <a:srgbClr val="BFBFBF"/>
+                      </a:solidFill>
+                    </a:lnL>
+                    <a:lnR w="6350" cap="flat" cmpd="sng" algn="ctr">
+                      <a:solidFill>
+                        <a:srgbClr val="BFBFBF"/>
+                      </a:solidFill>
+                      <a:prstDash val="solid"/>
+                      <a:round/>
+                      <a:headEnd type="none" w="med" len="med"/>
+                      <a:tailEnd type="none" w="med" len="med"/>
+                    </a:lnR>
+                    <a:lnT w="6350">
+                      <a:solidFill>
+                        <a:srgbClr val="BFBFBF"/>
+                      </a:solidFill>
+                    </a:lnT>
+                    <a:lnB w="6350" cap="flat" cmpd="sng" algn="ctr">
+                      <a:solidFill>
+                        <a:srgbClr val="BFBFBF"/>
+                      </a:solidFill>
+                      <a:prstDash val="solid"/>
+                      <a:round/>
+                      <a:headEnd type="none" w="med" len="med"/>
+                      <a:tailEnd type="none" w="med" len="med"/>
+                    </a:lnB>
+                    <a:solidFill>
+                      <a:srgbClr val="FFFFFF"/>
+                    </a:solidFill>
+                  </a:tcPr>
+                </a:tc>
+                <a:tc>
+                  <a:txBody>
+                    <a:bodyPr/>
+                    <a:lstStyle/>
+                    <a:p>
+                      <a:pPr algn="ctr"/>
+                      <a:r>
+                        <a:rPr lang="en-US" sz="1100" b="0" dirty="0">
+                          <a:solidFill>
+                            <a:srgbClr val="000000"/>
+                          </a:solidFill>
+                          <a:latin typeface="Arial"/>
+                          <a:cs typeface="Arial"/>
+                        </a:rPr>
+                        <a:t>1,238,529 Bytes</a:t>
+                      </a:r>
+                    </a:p>
+                  </a:txBody>
+                  <a:tcPr marL="36000" marR="36000" marT="18000" marB="18000" anchor="ctr">
+                    <a:lnL w="6350" cap="flat" cmpd="sng" algn="ctr">
+                      <a:solidFill>
+                        <a:srgbClr val="BFBFBF"/>
+                      </a:solidFill>
+                      <a:prstDash val="solid"/>
+                      <a:round/>
+                      <a:headEnd type="none" w="med" len="med"/>
+                      <a:tailEnd type="none" w="med" len="med"/>
+                    </a:lnL>
+                    <a:lnR w="6350">
+                      <a:solidFill>
+                        <a:srgbClr val="BFBFBF"/>
+                      </a:solidFill>
+                    </a:lnR>
+                    <a:lnT w="6350">
+                      <a:solidFill>
+                        <a:srgbClr val="BFBFBF"/>
+                      </a:solidFill>
+                    </a:lnT>
+                    <a:lnB w="6350" cap="flat" cmpd="sng" algn="ctr">
+                      <a:solidFill>
+                        <a:srgbClr val="BFBFBF"/>
+                      </a:solidFill>
+                      <a:prstDash val="solid"/>
+                      <a:round/>
+                      <a:headEnd type="none" w="med" len="med"/>
+                      <a:tailEnd type="none" w="med" len="med"/>
+                    </a:lnB>
+                    <a:solidFill>
+                      <a:srgbClr val="FFFFFF"/>
+                    </a:solidFill>
+                  </a:tcPr>
+                </a:tc>
+                <a:extLst>
+                  <a:ext uri="{0D108BD9-81ED-4DB2-BD59-A6C34878D82A}">
+                    <a16:rowId xmlns:a16="http://schemas.microsoft.com/office/drawing/2014/main" val="28568765"/>
+                  </a:ext>
+                </a:extLst>
+              </a:tr>
+              <a:tr h="393192">
+                <a:tc>
+                  <a:txBody>
+                    <a:bodyPr/>
+                    <a:lstStyle/>
+                    <a:p>
+                      <a:pPr algn="l"/>
+                      <a:r>
+                        <a:rPr lang="en-US" sz="1100" b="1" dirty="0">
+                          <a:solidFill>
+                            <a:srgbClr val="000000"/>
+                          </a:solidFill>
+                          <a:latin typeface="Arial"/>
+                          <a:cs typeface="Arial"/>
+                        </a:rPr>
+                        <a:t>Miss</a:t>
+                      </a:r>
+                    </a:p>
+                  </a:txBody>
+                  <a:tcPr marL="36000" marR="36000" marT="18000" marB="18000" anchor="ctr">
+                    <a:lnL w="6350">
+                      <a:solidFill>
+                        <a:srgbClr val="BFBFBF"/>
+                      </a:solidFill>
+                    </a:lnL>
+                    <a:lnR w="6350">
+                      <a:solidFill>
+                        <a:srgbClr val="BFBFBF"/>
+                      </a:solidFill>
+                    </a:lnR>
+                    <a:lnT w="6350">
+                      <a:solidFill>
+                        <a:srgbClr val="BFBFBF"/>
+                      </a:solidFill>
+                    </a:lnT>
+                    <a:lnB w="6350" cap="flat" cmpd="sng" algn="ctr">
+                      <a:solidFill>
+                        <a:srgbClr val="BFBFBF"/>
+                      </a:solidFill>
+                      <a:prstDash val="solid"/>
+                      <a:round/>
+                      <a:headEnd type="none" w="med" len="med"/>
+                      <a:tailEnd type="none" w="med" len="med"/>
+                    </a:lnB>
+                    <a:solidFill>
+                      <a:srgbClr val="FFFFFF"/>
+                    </a:solidFill>
+                  </a:tcPr>
+                </a:tc>
+                <a:tc>
+                  <a:txBody>
+                    <a:bodyPr/>
+                    <a:lstStyle/>
+                    <a:p>
+                      <a:pPr algn="ctr"/>
+                      <a:r>
+                        <a:rPr lang="en-US" sz="1100" b="0" dirty="0">
+                          <a:solidFill>
+                            <a:srgbClr val="000000"/>
+                          </a:solidFill>
+                          <a:latin typeface="Arial"/>
+                          <a:cs typeface="Arial"/>
+                        </a:rPr>
+                        <a:t>0 Bytes</a:t>
+                      </a:r>
+                    </a:p>
+                  </a:txBody>
+                  <a:tcPr marL="36000" marR="36000" marT="18000" marB="18000" anchor="ctr">
+                    <a:lnL w="6350" cap="flat" cmpd="sng" algn="ctr">
+                      <a:solidFill>
+                        <a:srgbClr val="BFBFBF"/>
+                      </a:solidFill>
+                      <a:prstDash val="solid"/>
+                      <a:round/>
+                      <a:headEnd type="none" w="med" len="med"/>
+                      <a:tailEnd type="none" w="med" len="med"/>
+                    </a:lnL>
+                    <a:lnR w="6350">
+                      <a:solidFill>
+                        <a:srgbClr val="BFBFBF"/>
+                      </a:solidFill>
+                    </a:lnR>
+                    <a:lnT w="6350">
+                      <a:solidFill>
+                        <a:srgbClr val="BFBFBF"/>
+                      </a:solidFill>
+                    </a:lnT>
+                    <a:lnB w="6350">
+                      <a:solidFill>
+                        <a:srgbClr val="BFBFBF"/>
+                      </a:solidFill>
+                    </a:lnB>
+                    <a:solidFill>
+                      <a:srgbClr val="FFFFFF"/>
+                    </a:solidFill>
+                  </a:tcPr>
+                </a:tc>
+                <a:extLst>
+                  <a:ext uri="{0D108BD9-81ED-4DB2-BD59-A6C34878D82A}">
+                    <a16:rowId xmlns:a16="http://schemas.microsoft.com/office/drawing/2014/main" val="10001"/>
+                  </a:ext>
+                </a:extLst>
+              </a:tr>
+              <a:tr h="393192">
+                <a:tc>
+                  <a:txBody>
+                    <a:bodyPr/>
+                    <a:lstStyle/>
+                    <a:p>
+                      <a:pPr algn="l"/>
+                      <a:r>
+                        <a:rPr lang="en-US" sz="1100" b="1" dirty="0">
+                          <a:solidFill>
+                            <a:srgbClr val="000000"/>
+                          </a:solidFill>
+                          <a:latin typeface="Arial"/>
+                          <a:cs typeface="Arial"/>
+                        </a:rPr>
+                        <a:t>First Tx Time</a:t>
+                      </a:r>
+                    </a:p>
+                  </a:txBody>
+                  <a:tcPr marL="36000" marR="36000" marT="18000" marB="18000" anchor="ctr">
+                    <a:lnL w="6350">
+                      <a:solidFill>
+                        <a:srgbClr val="BFBFBF"/>
+                      </a:solidFill>
+                    </a:lnL>
+                    <a:lnR w="6350" cap="flat" cmpd="sng" algn="ctr">
+                      <a:solidFill>
+                        <a:srgbClr val="BFBFBF"/>
+                      </a:solidFill>
+                      <a:prstDash val="solid"/>
+                      <a:round/>
+                      <a:headEnd type="none" w="med" len="med"/>
+                      <a:tailEnd type="none" w="med" len="med"/>
+                    </a:lnR>
+                    <a:lnT w="6350" cap="flat" cmpd="sng" algn="ctr">
+                      <a:solidFill>
+                        <a:srgbClr val="BFBFBF"/>
+                      </a:solidFill>
+                      <a:prstDash val="solid"/>
+                      <a:round/>
+                      <a:headEnd type="none" w="med" len="med"/>
+                      <a:tailEnd type="none" w="med" len="med"/>
+                    </a:lnT>
+                    <a:lnB w="6350">
+                      <a:solidFill>
+                        <a:srgbClr val="BFBFBF"/>
+                      </a:solidFill>
+                    </a:lnB>
+                    <a:solidFill>
+                      <a:schemeClr val="bg1"/>
+                    </a:solidFill>
+                  </a:tcPr>
+                </a:tc>
+                <a:tc>
+                  <a:txBody>
+                    <a:bodyPr/>
+                    <a:lstStyle/>
+                    <a:p>
+                      <a:pPr algn="ctr"/>
+                      <a:r>
+                        <a:rPr lang="en-US" sz="1100" b="0" dirty="0">
+                          <a:solidFill>
+                            <a:srgbClr val="000000"/>
+                          </a:solidFill>
+                          <a:latin typeface="Arial"/>
+                          <a:cs typeface="Arial"/>
+                        </a:rPr>
+                        <a:t>124.043</a:t>
+                      </a:r>
+                    </a:p>
+                  </a:txBody>
+                  <a:tcPr marL="36000" marR="36000" marT="18000" marB="18000" anchor="ctr">
+                    <a:lnL w="6350" cap="flat" cmpd="sng" algn="ctr">
+                      <a:solidFill>
+                        <a:srgbClr val="BFBFBF"/>
+                      </a:solidFill>
+                      <a:prstDash val="solid"/>
+                      <a:round/>
+                      <a:headEnd type="none" w="med" len="med"/>
+                      <a:tailEnd type="none" w="med" len="med"/>
+                    </a:lnL>
+                    <a:lnR w="6350">
+                      <a:solidFill>
+                        <a:srgbClr val="BFBFBF"/>
+                      </a:solidFill>
+                    </a:lnR>
+                    <a:lnT w="6350" cap="flat" cmpd="sng" algn="ctr">
+                      <a:solidFill>
+                        <a:srgbClr val="BFBFBF"/>
+                      </a:solidFill>
+                      <a:prstDash val="solid"/>
+                      <a:round/>
+                      <a:headEnd type="none" w="med" len="med"/>
+                      <a:tailEnd type="none" w="med" len="med"/>
+                    </a:lnT>
+                    <a:lnB w="6350">
+                      <a:solidFill>
+                        <a:srgbClr val="BFBFBF"/>
+                      </a:solidFill>
+                    </a:lnB>
+                    <a:solidFill>
+                      <a:schemeClr val="bg1"/>
+                    </a:solidFill>
+                  </a:tcPr>
+                </a:tc>
+                <a:extLst>
+                  <a:ext uri="{0D108BD9-81ED-4DB2-BD59-A6C34878D82A}">
+                    <a16:rowId xmlns:a16="http://schemas.microsoft.com/office/drawing/2014/main" val="10002"/>
+                  </a:ext>
+                </a:extLst>
+              </a:tr>
+              <a:tr h="393192">
+                <a:tc>
+                  <a:txBody>
+                    <a:bodyPr/>
+                    <a:lstStyle/>
+                    <a:p>
+                      <a:pPr algn="l"/>
+                      <a:r>
+                        <a:rPr lang="en-US" sz="1100" b="1" dirty="0">
+                          <a:solidFill>
+                            <a:srgbClr val="000000"/>
+                          </a:solidFill>
+                          <a:latin typeface="Arial"/>
+                          <a:cs typeface="Arial"/>
+                        </a:rPr>
+                        <a:t>Last Rx Time</a:t>
+                      </a:r>
+                    </a:p>
+                  </a:txBody>
+                  <a:tcPr marL="36000" marR="36000" marT="18000" marB="18000" anchor="ctr">
+                    <a:lnL w="6350">
+                      <a:solidFill>
+                        <a:srgbClr val="BFBFBF"/>
+                      </a:solidFill>
+                    </a:lnL>
+                    <a:lnR w="6350" cap="flat" cmpd="sng" algn="ctr">
+                      <a:solidFill>
+                        <a:srgbClr val="BFBFBF"/>
+                      </a:solidFill>
+                      <a:prstDash val="solid"/>
+                      <a:round/>
+                      <a:headEnd type="none" w="med" len="med"/>
+                      <a:tailEnd type="none" w="med" len="med"/>
+                    </a:lnR>
+                    <a:lnT w="6350" cap="flat" cmpd="sng" algn="ctr">
+                      <a:solidFill>
+                        <a:srgbClr val="BFBFBF"/>
+                      </a:solidFill>
+                      <a:prstDash val="solid"/>
+                      <a:round/>
+                      <a:headEnd type="none" w="med" len="med"/>
+                      <a:tailEnd type="none" w="med" len="med"/>
+                    </a:lnT>
+                    <a:lnB w="6350">
+                      <a:solidFill>
+                        <a:srgbClr val="BFBFBF"/>
+                      </a:solidFill>
+                    </a:lnB>
+                    <a:solidFill>
+                      <a:srgbClr val="FFFFFF"/>
+                    </a:solidFill>
+                  </a:tcPr>
+                </a:tc>
+                <a:tc>
+                  <a:txBody>
+                    <a:bodyPr/>
+                    <a:lstStyle/>
+                    <a:p>
+                      <a:pPr algn="ctr"/>
+                      <a:r>
+                        <a:rPr lang="en-US" sz="1100" b="0" dirty="0">
+                          <a:solidFill>
+                            <a:srgbClr val="000000"/>
+                          </a:solidFill>
+                          <a:latin typeface="Arial"/>
+                          <a:cs typeface="Arial"/>
+                        </a:rPr>
+                        <a:t>124.152</a:t>
+                      </a:r>
+                    </a:p>
+                  </a:txBody>
+                  <a:tcPr marL="36000" marR="36000" marT="18000" marB="18000" anchor="ctr">
+                    <a:lnL w="6350" cap="flat" cmpd="sng" algn="ctr">
+                      <a:solidFill>
+                        <a:srgbClr val="BFBFBF"/>
+                      </a:solidFill>
+                      <a:prstDash val="solid"/>
+                      <a:round/>
+                      <a:headEnd type="none" w="med" len="med"/>
+                      <a:tailEnd type="none" w="med" len="med"/>
+                    </a:lnL>
+                    <a:lnR w="6350">
+                      <a:solidFill>
+                        <a:srgbClr val="BFBFBF"/>
+                      </a:solidFill>
+                    </a:lnR>
+                    <a:lnT w="6350" cap="flat" cmpd="sng" algn="ctr">
+                      <a:solidFill>
+                        <a:srgbClr val="BFBFBF"/>
+                      </a:solidFill>
+                      <a:prstDash val="solid"/>
+                      <a:round/>
+                      <a:headEnd type="none" w="med" len="med"/>
+                      <a:tailEnd type="none" w="med" len="med"/>
+                    </a:lnT>
+                    <a:lnB w="6350">
+                      <a:solidFill>
+                        <a:srgbClr val="BFBFBF"/>
+                      </a:solidFill>
+                    </a:lnB>
+                    <a:solidFill>
+                      <a:srgbClr val="FFFFFF"/>
+                    </a:solidFill>
+                  </a:tcPr>
+                </a:tc>
+                <a:extLst>
+                  <a:ext uri="{0D108BD9-81ED-4DB2-BD59-A6C34878D82A}">
+                    <a16:rowId xmlns:a16="http://schemas.microsoft.com/office/drawing/2014/main" val="10003"/>
+                  </a:ext>
+                </a:extLst>
+              </a:tr>
+              <a:tr h="393192">
+                <a:tc>
+                  <a:txBody>
+                    <a:bodyPr/>
+                    <a:lstStyle/>
+                    <a:p>
+                      <a:pPr algn="l"/>
+                      <a:r>
+                        <a:rPr lang="en-US" sz="1100" b="1" dirty="0">
+                          <a:solidFill>
+                            <a:srgbClr val="000000"/>
+                          </a:solidFill>
+                          <a:latin typeface="Arial"/>
+                          <a:cs typeface="Arial"/>
+                        </a:rPr>
+                        <a:t>Measure Duration</a:t>
+                      </a:r>
+                    </a:p>
+                  </a:txBody>
+                  <a:tcPr marL="36000" marR="36000" marT="18000" marB="18000" anchor="ctr">
+                    <a:lnL w="6350">
+                      <a:solidFill>
+                        <a:srgbClr val="BFBFBF"/>
+                      </a:solidFill>
+                    </a:lnL>
+                    <a:lnR w="6350" cap="flat" cmpd="sng" algn="ctr">
+                      <a:solidFill>
+                        <a:srgbClr val="BFBFBF"/>
+                      </a:solidFill>
+                      <a:prstDash val="solid"/>
+                      <a:round/>
+                      <a:headEnd type="none" w="med" len="med"/>
+                      <a:tailEnd type="none" w="med" len="med"/>
+                    </a:lnR>
+                    <a:lnT w="6350" cap="flat" cmpd="sng" algn="ctr">
+                      <a:solidFill>
+                        <a:srgbClr val="BFBFBF"/>
+                      </a:solidFill>
+                      <a:prstDash val="solid"/>
+                      <a:round/>
+                      <a:headEnd type="none" w="med" len="med"/>
+                      <a:tailEnd type="none" w="med" len="med"/>
+                    </a:lnT>
+                    <a:lnB w="6350" cap="flat" cmpd="sng" algn="ctr">
+                      <a:solidFill>
+                        <a:srgbClr val="BFBFBF"/>
+                      </a:solidFill>
+                      <a:prstDash val="solid"/>
+                      <a:round/>
+                      <a:headEnd type="none" w="med" len="med"/>
+                      <a:tailEnd type="none" w="med" len="med"/>
+                    </a:lnB>
+                    <a:solidFill>
+                      <a:schemeClr val="bg1"/>
+                    </a:solidFill>
+                  </a:tcPr>
+                </a:tc>
+                <a:tc>
+                  <a:txBody>
+                    <a:bodyPr/>
+                    <a:lstStyle/>
+                    <a:p>
+                      <a:pPr algn="ctr"/>
+                      <a:r>
+                        <a:rPr lang="en-US" sz="1100" b="0" dirty="0">
+                          <a:solidFill>
+                            <a:srgbClr val="000000"/>
+                          </a:solidFill>
+                          <a:latin typeface="Arial"/>
+                          <a:cs typeface="Arial"/>
+                        </a:rPr>
+                        <a:t>81.854</a:t>
+                      </a:r>
+                    </a:p>
+                  </a:txBody>
+                  <a:tcPr marL="36000" marR="36000" marT="18000" marB="18000" anchor="ctr">
+                    <a:lnL w="6350" cap="flat" cmpd="sng" algn="ctr">
+                      <a:solidFill>
+                        <a:srgbClr val="BFBFBF"/>
+                      </a:solidFill>
+                      <a:prstDash val="solid"/>
+                      <a:round/>
+                      <a:headEnd type="none" w="med" len="med"/>
+                      <a:tailEnd type="none" w="med" len="med"/>
+                    </a:lnL>
+                    <a:lnR w="6350">
+                      <a:solidFill>
+                        <a:srgbClr val="BFBFBF"/>
+                      </a:solidFill>
+                    </a:lnR>
+                    <a:lnT w="6350" cap="flat" cmpd="sng" algn="ctr">
+                      <a:solidFill>
+                        <a:srgbClr val="BFBFBF"/>
+                      </a:solidFill>
+                      <a:prstDash val="solid"/>
+                      <a:round/>
+                      <a:headEnd type="none" w="med" len="med"/>
+                      <a:tailEnd type="none" w="med" len="med"/>
+                    </a:lnT>
+                    <a:lnB w="6350" cap="flat" cmpd="sng" algn="ctr">
+                      <a:solidFill>
+                        <a:srgbClr val="BFBFBF"/>
+                      </a:solidFill>
+                      <a:prstDash val="solid"/>
+                      <a:round/>
+                      <a:headEnd type="none" w="med" len="med"/>
+                      <a:tailEnd type="none" w="med" len="med"/>
+                    </a:lnB>
+                    <a:solidFill>
+                      <a:schemeClr val="bg1"/>
+                    </a:solidFill>
+                  </a:tcPr>
+                </a:tc>
+                <a:extLst>
+                  <a:ext uri="{0D108BD9-81ED-4DB2-BD59-A6C34878D82A}">
+                    <a16:rowId xmlns:a16="http://schemas.microsoft.com/office/drawing/2014/main" val="10004"/>
+                  </a:ext>
+                </a:extLst>
+              </a:tr>
+              <a:tr h="393192">
+                <a:tc>
+                  <a:txBody>
+                    <a:bodyPr/>
+                    <a:lstStyle/>
+                    <a:p>
+                      <a:pPr algn="l"/>
+                      <a:r>
+                        <a:rPr lang="en-US" sz="1100" b="1" dirty="0">
+                          <a:solidFill>
+                            <a:srgbClr val="000000"/>
+                          </a:solidFill>
+                          <a:latin typeface="Arial"/>
+                          <a:cs typeface="Arial"/>
+                        </a:rPr>
+                        <a:t>Effective Throughput</a:t>
+                      </a:r>
+                    </a:p>
+                  </a:txBody>
+                  <a:tcPr marL="36000" marR="36000" marT="18000" marB="18000" anchor="ctr">
+                    <a:lnL w="6350">
+                      <a:solidFill>
+                        <a:srgbClr val="BFBFBF"/>
+                      </a:solidFill>
+                    </a:lnL>
+                    <a:lnR w="6350" cap="flat" cmpd="sng" algn="ctr">
+                      <a:solidFill>
+                        <a:srgbClr val="BFBFBF"/>
+                      </a:solidFill>
+                      <a:prstDash val="solid"/>
+                      <a:round/>
+                      <a:headEnd type="none" w="med" len="med"/>
+                      <a:tailEnd type="none" w="med" len="med"/>
+                    </a:lnR>
+                    <a:lnT w="6350" cap="flat" cmpd="sng" algn="ctr">
+                      <a:solidFill>
+                        <a:srgbClr val="BFBFBF"/>
+                      </a:solidFill>
+                      <a:prstDash val="solid"/>
+                      <a:round/>
+                      <a:headEnd type="none" w="med" len="med"/>
+                      <a:tailEnd type="none" w="med" len="med"/>
+                    </a:lnT>
+                    <a:lnB w="6350" cap="flat" cmpd="sng" algn="ctr">
+                      <a:solidFill>
+                        <a:srgbClr val="BFBFBF"/>
+                      </a:solidFill>
+                      <a:prstDash val="solid"/>
+                      <a:round/>
+                      <a:headEnd type="none" w="med" len="med"/>
+                      <a:tailEnd type="none" w="med" len="med"/>
+                    </a:lnB>
+                    <a:solidFill>
+                      <a:schemeClr val="bg1"/>
+                    </a:solidFill>
+                  </a:tcPr>
+                </a:tc>
+                <a:tc>
+                  <a:txBody>
+                    <a:bodyPr/>
+                    <a:lstStyle/>
+                    <a:p>
+                      <a:pPr algn="ctr"/>
+                      <a:r>
+                        <a:rPr lang="en-US" sz="1100" b="0" dirty="0">
+                          <a:solidFill>
+                            <a:srgbClr val="000000"/>
+                          </a:solidFill>
+                          <a:latin typeface="Arial"/>
+                          <a:cs typeface="Arial"/>
+                        </a:rPr>
+                        <a:t>121.048 Mbps</a:t>
+                      </a:r>
+                    </a:p>
+                  </a:txBody>
+                  <a:tcPr marL="36000" marR="36000" marT="18000" marB="18000" anchor="ctr">
+                    <a:lnL w="6350" cap="flat" cmpd="sng" algn="ctr">
+                      <a:solidFill>
+                        <a:srgbClr val="BFBFBF"/>
+                      </a:solidFill>
+                      <a:prstDash val="solid"/>
+                      <a:round/>
+                      <a:headEnd type="none" w="med" len="med"/>
+                      <a:tailEnd type="none" w="med" len="med"/>
+                    </a:lnL>
+                    <a:lnR w="6350">
+                      <a:solidFill>
+                        <a:srgbClr val="BFBFBF"/>
+                      </a:solidFill>
+                    </a:lnR>
+                    <a:lnT w="6350" cap="flat" cmpd="sng" algn="ctr">
+                      <a:solidFill>
+                        <a:srgbClr val="BFBFBF"/>
+                      </a:solidFill>
+                      <a:prstDash val="solid"/>
+                      <a:round/>
+                      <a:headEnd type="none" w="med" len="med"/>
+                      <a:tailEnd type="none" w="med" len="med"/>
+                    </a:lnT>
+                    <a:lnB w="6350" cap="flat" cmpd="sng" algn="ctr">
+                      <a:solidFill>
+                        <a:srgbClr val="BFBFBF"/>
+                      </a:solidFill>
+                      <a:prstDash val="solid"/>
+                      <a:round/>
+                      <a:headEnd type="none" w="med" len="med"/>
+                      <a:tailEnd type="none" w="med" len="med"/>
+                    </a:lnB>
+                    <a:solidFill>
+                      <a:schemeClr val="bg1"/>
+                    </a:solidFill>
+                  </a:tcPr>
+                </a:tc>
+                <a:extLst>
+                  <a:ext uri="{0D108BD9-81ED-4DB2-BD59-A6C34878D82A}">
+                    <a16:rowId xmlns:a16="http://schemas.microsoft.com/office/drawing/2014/main" val="2367445387"/>
+                  </a:ext>
+                </a:extLst>
+              </a:tr>
+              <a:tr h="393192">
+                <a:tc>
+                  <a:txBody>
+                    <a:bodyPr/>
+                    <a:lstStyle/>
+                    <a:p>
+                      <a:pPr algn="l"/>
+                      <a:r>
+                        <a:rPr lang="en-US" sz="1100" b="1" dirty="0">
+                          <a:solidFill>
+                            <a:srgbClr val="000000"/>
+                          </a:solidFill>
+                          <a:latin typeface="Arial"/>
+                          <a:cs typeface="Arial"/>
+                        </a:rPr>
+                        <a:t>Efficiency</a:t>
+                      </a:r>
+                      <a:br>
+                        <a:rPr lang="en-US" sz="1100" b="1" dirty="0">
+                          <a:solidFill>
+                            <a:srgbClr val="000000"/>
+                          </a:solidFill>
+                          <a:latin typeface="Arial"/>
+                          <a:cs typeface="Arial"/>
+                        </a:rPr>
+                      </a:br>
+                      <a:r>
+                        <a:rPr lang="en-US" sz="1100" b="1" dirty="0">
+                          <a:solidFill>
+                            <a:srgbClr val="000000"/>
+                          </a:solidFill>
+                          <a:latin typeface="Arial"/>
+                          <a:cs typeface="Arial"/>
+                        </a:rPr>
+                        <a:t>(</a:t>
+                      </a:r>
+                      <a:r>
+                        <a:rPr lang="en-US" sz="1100" b="1" dirty="0" err="1">
+                          <a:solidFill>
+                            <a:srgbClr val="000000"/>
+                          </a:solidFill>
+                          <a:latin typeface="Arial"/>
+                          <a:cs typeface="Arial"/>
+                        </a:rPr>
+                        <a:t>Eff_tpt</a:t>
+                      </a:r>
+                      <a:r>
+                        <a:rPr lang="en-US" sz="1100" b="1" dirty="0">
+                          <a:solidFill>
+                            <a:srgbClr val="000000"/>
+                          </a:solidFill>
+                          <a:latin typeface="Arial"/>
+                          <a:cs typeface="Arial"/>
+                        </a:rPr>
+                        <a:t> / Shannon)</a:t>
+                      </a:r>
+                    </a:p>
+                  </a:txBody>
+                  <a:tcPr marL="36000" marR="36000" marT="18000" marB="18000" anchor="ctr">
+                    <a:lnL w="6350">
+                      <a:solidFill>
+                        <a:srgbClr val="BFBFBF"/>
+                      </a:solidFill>
+                    </a:lnL>
+                    <a:lnR w="6350" cap="flat" cmpd="sng" algn="ctr">
+                      <a:solidFill>
+                        <a:srgbClr val="BFBFBF"/>
+                      </a:solidFill>
+                      <a:prstDash val="solid"/>
+                      <a:round/>
+                      <a:headEnd type="none" w="med" len="med"/>
+                      <a:tailEnd type="none" w="med" len="med"/>
+                    </a:lnR>
+                    <a:lnT w="6350" cap="flat" cmpd="sng" algn="ctr">
+                      <a:solidFill>
+                        <a:srgbClr val="BFBFBF"/>
+                      </a:solidFill>
+                      <a:prstDash val="solid"/>
+                      <a:round/>
+                      <a:headEnd type="none" w="med" len="med"/>
+                      <a:tailEnd type="none" w="med" len="med"/>
+                    </a:lnT>
+                    <a:lnB w="6350" cap="flat" cmpd="sng" algn="ctr">
+                      <a:solidFill>
+                        <a:srgbClr val="BFBFBF"/>
+                      </a:solidFill>
+                      <a:prstDash val="solid"/>
+                      <a:round/>
+                      <a:headEnd type="none" w="med" len="med"/>
+                      <a:tailEnd type="none" w="med" len="med"/>
+                    </a:lnB>
+                    <a:solidFill>
+                      <a:schemeClr val="bg1"/>
+                    </a:solidFill>
+                  </a:tcPr>
+                </a:tc>
+                <a:tc>
+                  <a:txBody>
+                    <a:bodyPr/>
+                    <a:lstStyle/>
+                    <a:p>
+                      <a:pPr algn="ctr"/>
+                      <a:r>
+                        <a:rPr lang="en-US" sz="1100" b="0" dirty="0">
+                          <a:solidFill>
+                            <a:srgbClr val="000000"/>
+                          </a:solidFill>
+                          <a:latin typeface="Arial"/>
+                          <a:cs typeface="Arial"/>
+                        </a:rPr>
+                        <a:t>5.7 %</a:t>
+                      </a:r>
+                    </a:p>
+                  </a:txBody>
+                  <a:tcPr marL="36000" marR="36000" marT="18000" marB="18000" anchor="ctr">
+                    <a:lnL w="6350" cap="flat" cmpd="sng" algn="ctr">
+                      <a:solidFill>
+                        <a:srgbClr val="BFBFBF"/>
+                      </a:solidFill>
+                      <a:prstDash val="solid"/>
+                      <a:round/>
+                      <a:headEnd type="none" w="med" len="med"/>
+                      <a:tailEnd type="none" w="med" len="med"/>
+                    </a:lnL>
+                    <a:lnR w="6350">
+                      <a:solidFill>
+                        <a:srgbClr val="BFBFBF"/>
+                      </a:solidFill>
+                    </a:lnR>
+                    <a:lnT w="6350" cap="flat" cmpd="sng" algn="ctr">
+                      <a:solidFill>
+                        <a:srgbClr val="BFBFBF"/>
+                      </a:solidFill>
+                      <a:prstDash val="solid"/>
+                      <a:round/>
+                      <a:headEnd type="none" w="med" len="med"/>
+                      <a:tailEnd type="none" w="med" len="med"/>
+                    </a:lnT>
+                    <a:lnB w="6350" cap="flat" cmpd="sng" algn="ctr">
+                      <a:solidFill>
+                        <a:srgbClr val="BFBFBF"/>
+                      </a:solidFill>
+                      <a:prstDash val="solid"/>
+                      <a:round/>
+                      <a:headEnd type="none" w="med" len="med"/>
+                      <a:tailEnd type="none" w="med" len="med"/>
+                    </a:lnB>
+                    <a:solidFill>
+                      <a:schemeClr val="bg1"/>
+                    </a:solidFill>
+                  </a:tcPr>
+                </a:tc>
+                <a:extLst>
+                  <a:ext uri="{0D108BD9-81ED-4DB2-BD59-A6C34878D82A}">
+                    <a16:rowId xmlns:a16="http://schemas.microsoft.com/office/drawing/2014/main" val="544648509"/>
+                  </a:ext>
+                </a:extLst>
+              </a:tr>
+            </a:tbl>
+          </a:graphicData>
+        </a:graphic>
+      </p:graphicFrame>
     </p:spTree>
     <p:extLst>
       <p:ext uri="{BB962C8B-B14F-4D97-AF65-F5344CB8AC3E}">
-        <p14:creationId xmlns:p14="http://schemas.microsoft.com/office/powerpoint/2010/main" val="1424956957"/>
+        <p14:creationId xmlns:p14="http://schemas.microsoft.com/office/powerpoint/2010/main" val="1876860107"/>
       </p:ext>
     </p:extLst>
   </p:cSld>
@@ -15481,14 +16895,16 @@
         </p:nvSpPr>
         <p:spPr/>
         <p:txBody>
-          <a:bodyPr/>
+          <a:bodyPr>
+            <a:normAutofit/>
+          </a:bodyPr>
           <a:lstStyle/>
           <a:p>
             <a:r>
-              <a:rPr lang="en-US" altLang="zh-TW" dirty="0"/>
+              <a:rPr lang="en-US" altLang="zh-TW" sz="3200" dirty="0"/>
               <a:t>Conclusion</a:t>
             </a:r>
-            <a:endParaRPr lang="zh-TW" altLang="en-US" dirty="0"/>
+            <a:endParaRPr lang="zh-TW" altLang="en-US" sz="3200" dirty="0"/>
           </a:p>
         </p:txBody>
       </p:sp>
@@ -15510,8 +16926,8 @@
         </p:nvSpPr>
         <p:spPr>
           <a:xfrm>
-            <a:off x="628650" y="1354931"/>
-            <a:ext cx="7886700" cy="2971800"/>
+            <a:off x="628650" y="910113"/>
+            <a:ext cx="7886700" cy="4130994"/>
           </a:xfrm>
         </p:spPr>
         <p:txBody>
@@ -15521,9 +16937,9 @@
           <a:lstStyle/>
           <a:p>
             <a:pPr>
-              <a:lnSpc>
-                <a:spcPct val="150000"/>
-              </a:lnSpc>
+              <a:spcBef>
+                <a:spcPts val="1800"/>
+              </a:spcBef>
             </a:pPr>
             <a:r>
               <a:rPr lang="en-US" altLang="zh-TW" sz="2000" b="1" dirty="0"/>
@@ -15540,9 +16956,9 @@
           </a:p>
           <a:p>
             <a:pPr>
-              <a:lnSpc>
-                <a:spcPct val="150000"/>
-              </a:lnSpc>
+              <a:spcBef>
+                <a:spcPts val="1800"/>
+              </a:spcBef>
             </a:pPr>
             <a:r>
               <a:rPr lang="en-US" altLang="zh-TW" sz="2000" b="1" dirty="0"/>
@@ -15559,28 +16975,43 @@
           </a:p>
           <a:p>
             <a:pPr>
-              <a:lnSpc>
-                <a:spcPct val="150000"/>
-              </a:lnSpc>
+              <a:spcBef>
+                <a:spcPts val="1800"/>
+              </a:spcBef>
             </a:pPr>
             <a:r>
               <a:rPr lang="en-US" altLang="zh-TW" sz="2000" b="1" dirty="0"/>
-              <a:t>Reusable:</a:t>
-            </a:r>
-            <a:r>
-              <a:rPr lang="zh-TW" altLang="en-US" sz="2000" dirty="0"/>
-              <a:t>  </a:t>
+              <a:t>Validates:  </a:t>
             </a:r>
             <a:r>
               <a:rPr lang="en-US" altLang="zh-TW" sz="2000" dirty="0"/>
-              <a:t>Evaluate any schedule under realistic channel conditions</a:t>
+              <a:t>Scheduler timing confirmed by NS-3 within 3.2 s over a 3584 s mission</a:t>
             </a:r>
           </a:p>
           <a:p>
             <a:pPr>
-              <a:lnSpc>
-                <a:spcPct val="150000"/>
-              </a:lnSpc>
+              <a:spcBef>
+                <a:spcPts val="1800"/>
+              </a:spcBef>
+            </a:pPr>
+            <a:r>
+              <a:rPr lang="en-US" altLang="zh-TW" sz="2000" b="1" dirty="0"/>
+              <a:t>Reusable:</a:t>
+            </a:r>
+            <a:r>
+              <a:rPr lang="zh-TW" altLang="en-US" sz="2000" dirty="0"/>
+              <a:t>  </a:t>
+            </a:r>
+            <a:r>
+              <a:rPr lang="en-US" altLang="zh-TW" sz="2000" dirty="0"/>
+              <a:t>Evaluate any schedule under realistic channel conditions</a:t>
+            </a:r>
+          </a:p>
+          <a:p>
+            <a:pPr>
+              <a:spcBef>
+                <a:spcPts val="1800"/>
+              </a:spcBef>
             </a:pPr>
             <a:r>
               <a:rPr lang="en-US" altLang="zh-TW" sz="2000" b="1" dirty="0"/>
@@ -15840,14 +17271,16 @@
         </p:nvSpPr>
         <p:spPr/>
         <p:txBody>
-          <a:bodyPr/>
+          <a:bodyPr>
+            <a:normAutofit/>
+          </a:bodyPr>
           <a:lstStyle/>
           <a:p>
             <a:r>
-              <a:rPr lang="en-US" altLang="zh-TW" dirty="0"/>
+              <a:rPr lang="en-US" altLang="zh-TW" sz="3200" dirty="0"/>
               <a:t>Background</a:t>
             </a:r>
-            <a:endParaRPr lang="zh-TW" altLang="en-US" dirty="0"/>
+            <a:endParaRPr lang="zh-TW" altLang="en-US" sz="3200" dirty="0"/>
           </a:p>
         </p:txBody>
       </p:sp>
@@ -16037,14 +17470,16 @@
         </p:nvSpPr>
         <p:spPr/>
         <p:txBody>
-          <a:bodyPr/>
+          <a:bodyPr>
+            <a:normAutofit/>
+          </a:bodyPr>
           <a:lstStyle/>
           <a:p>
             <a:r>
-              <a:rPr lang="en-US" altLang="zh-TW" dirty="0"/>
+              <a:rPr lang="en-US" altLang="zh-TW" sz="3200" dirty="0"/>
               <a:t>System Architecture</a:t>
             </a:r>
-            <a:endParaRPr lang="zh-TW" altLang="en-US" dirty="0"/>
+            <a:endParaRPr lang="zh-TW" altLang="en-US" sz="3200" dirty="0"/>
           </a:p>
         </p:txBody>
       </p:sp>
@@ -16078,41 +17513,41 @@
           <a:p>
             <a:r>
               <a:rPr lang="en-US" altLang="zh-TW" sz="2000" dirty="0"/>
-              <a:t>Uplink UAV-LEO</a:t>
+              <a:t>Form UAVs as a fleet</a:t>
             </a:r>
           </a:p>
           <a:p>
             <a:pPr lvl="1"/>
             <a:r>
-              <a:rPr lang="en-US" altLang="zh-TW" sz="1800" dirty="0"/>
-              <a:t>Master UAV: collect data from UAVs</a:t>
+              <a:rPr lang="en-US" altLang="zh-TW" sz="2000" dirty="0"/>
+              <a:t>Master: forward data to satellites</a:t>
             </a:r>
           </a:p>
           <a:p>
             <a:pPr lvl="1"/>
             <a:r>
-              <a:rPr lang="en-US" altLang="zh-TW" sz="1800" dirty="0"/>
-              <a:t>LEO: wait to receive data</a:t>
+              <a:rPr lang="en-US" altLang="zh-TW" sz="2000" dirty="0"/>
+              <a:t>Slaves: collect data from sensors</a:t>
             </a:r>
           </a:p>
           <a:p>
             <a:r>
               <a:rPr lang="en-US" altLang="zh-TW" sz="2000" dirty="0"/>
-              <a:t>Form UAVs as a fleet</a:t>
+              <a:t>Uplink UAV-LEO</a:t>
             </a:r>
           </a:p>
           <a:p>
             <a:pPr lvl="1"/>
             <a:r>
-              <a:rPr lang="en-US" altLang="zh-TW" sz="2000" dirty="0"/>
-              <a:t>Master: forward data to satellites</a:t>
+              <a:rPr lang="en-US" altLang="zh-TW" sz="1800" dirty="0"/>
+              <a:t>Master UAV: collect data from UAVs</a:t>
             </a:r>
           </a:p>
           <a:p>
             <a:pPr lvl="1"/>
             <a:r>
-              <a:rPr lang="en-US" altLang="zh-TW" sz="2000" dirty="0"/>
-              <a:t>Slaves: collect data from sensors</a:t>
+              <a:rPr lang="en-US" altLang="zh-TW" sz="1800" dirty="0"/>
+              <a:t>LEO: wait to receive data</a:t>
             </a:r>
           </a:p>
           <a:p>
@@ -17652,14 +19087,16 @@
         </p:nvSpPr>
         <p:spPr/>
         <p:txBody>
-          <a:bodyPr/>
+          <a:bodyPr>
+            <a:normAutofit/>
+          </a:bodyPr>
           <a:lstStyle/>
           <a:p>
             <a:r>
-              <a:rPr lang="en-US" dirty="0"/>
+              <a:rPr lang="en-US" sz="3200" dirty="0"/>
               <a:t>Data Flow</a:t>
             </a:r>
-            <a:endParaRPr lang="en-TW" dirty="0"/>
+            <a:endParaRPr lang="en-TW" sz="3200" dirty="0"/>
           </a:p>
         </p:txBody>
       </p:sp>
@@ -17729,8 +19166,8 @@
         </p:blipFill>
         <p:spPr>
           <a:xfrm>
-            <a:off x="1952785" y="1029115"/>
-            <a:ext cx="5238430" cy="3492285"/>
+            <a:off x="1350588" y="608972"/>
+            <a:ext cx="6442822" cy="4295213"/>
           </a:xfrm>
           <a:prstGeom prst="rect">
             <a:avLst/>
@@ -17798,13 +19235,15 @@
           <a:p>
             <a:r>
               <a:rPr lang="en-US" altLang="zh-TW" sz="3200" dirty="0">
-                <a:latin typeface="Times New Roman" panose="02020603050405020304" pitchFamily="18" charset="0"/>
+                <a:latin typeface="Helvetica Neue" panose="02020500000000000000" charset="0"/>
                 <a:ea typeface="標楷體" panose="03000509000000000000" pitchFamily="65" charset="-120"/>
                 <a:cs typeface="Times New Roman" panose="02020603050405020304" pitchFamily="18" charset="0"/>
               </a:rPr>
               <a:t>UAV-to-UAV Probe</a:t>
             </a:r>
-            <a:endParaRPr lang="zh-TW" altLang="en-US" dirty="0"/>
+            <a:endParaRPr lang="zh-TW" altLang="en-US" dirty="0">
+              <a:latin typeface="Helvetica Neue" panose="02020500000000000000" charset="0"/>
+            </a:endParaRPr>
           </a:p>
         </p:txBody>
       </p:sp>
@@ -19994,14 +21433,14 @@
           <a:p>
             <a:r>
               <a:rPr lang="en-US" altLang="zh-TW" sz="3200" dirty="0">
-                <a:latin typeface="Times New Roman" panose="02020603050405020304" pitchFamily="18" charset="0"/>
+                <a:latin typeface="Helvetica Neue" panose="02020500000000000000" charset="0"/>
                 <a:ea typeface="標楷體" panose="03000509000000000000" pitchFamily="65" charset="-120"/>
                 <a:cs typeface="Times New Roman" panose="02020603050405020304" pitchFamily="18" charset="0"/>
               </a:rPr>
               <a:t>NS-3 Schedule Replay / Verification</a:t>
             </a:r>
             <a:endParaRPr lang="zh-TW" altLang="en-US" sz="3200" dirty="0">
-              <a:latin typeface="Times New Roman" panose="02020603050405020304" pitchFamily="18" charset="0"/>
+              <a:latin typeface="Helvetica Neue" panose="02020500000000000000" charset="0"/>
               <a:ea typeface="標楷體" panose="03000509000000000000" pitchFamily="65" charset="-120"/>
               <a:cs typeface="Times New Roman" panose="02020603050405020304" pitchFamily="18" charset="0"/>
             </a:endParaRPr>
@@ -21420,13 +22859,15 @@
           <a:p>
             <a:r>
               <a:rPr lang="en-US" altLang="zh-TW" sz="3200" dirty="0">
-                <a:latin typeface="Times New Roman" panose="02020603050405020304" pitchFamily="18" charset="0"/>
+                <a:latin typeface="Helvetica Neue" panose="02020500000000000000" charset="0"/>
                 <a:ea typeface="標楷體" panose="03000509000000000000" pitchFamily="65" charset="-120"/>
                 <a:cs typeface="Times New Roman" panose="02020603050405020304" pitchFamily="18" charset="0"/>
               </a:rPr>
               <a:t>UAV-to-LEO Uplink</a:t>
             </a:r>
-            <a:endParaRPr lang="zh-TW" altLang="en-US" dirty="0"/>
+            <a:endParaRPr lang="zh-TW" altLang="en-US" dirty="0">
+              <a:latin typeface="Helvetica Neue" panose="02020500000000000000" charset="0"/>
+            </a:endParaRPr>
           </a:p>
         </p:txBody>
       </p:sp>
@@ -21627,15 +23068,16 @@
                 <a:latin typeface="Arial"/>
                 <a:cs typeface="Arial"/>
               </a:rPr>
-              <a:t>Elev 56.8°   ·   Dist 1389 km   ·   SNR 23.7 dB</a:t>
-            </a:r>
-          </a:p>
-          <a:p>
-            <a:pPr algn="ctr">
-              <a:spcBef>
-                <a:spcPts val="300"/>
-              </a:spcBef>
-            </a:pPr>
+              <a:t>Elev </a:t>
+            </a:r>
+            <a:r>
+              <a:rPr lang="en-US" sz="1150" dirty="0">
+                <a:solidFill>
+                  <a:srgbClr val="1F3864"/>
+                </a:solidFill>
+              </a:rPr>
+              <a:t>52.84</a:t>
+            </a:r>
             <a:r>
               <a:rPr lang="en-US" sz="1150" b="0" dirty="0">
                 <a:solidFill>
@@ -21644,7 +23086,80 @@
                 <a:latin typeface="Arial"/>
                 <a:cs typeface="Arial"/>
               </a:rPr>
-              <a:t>Beamforming +11.5 dB   ·   Shannon ≈ 1970 Mbps</a:t>
+              <a:t>°   ·   </a:t>
+            </a:r>
+            <a:r>
+              <a:rPr lang="en-US" sz="1150" b="0" dirty="0" err="1">
+                <a:solidFill>
+                  <a:srgbClr val="1F3864"/>
+                </a:solidFill>
+                <a:latin typeface="Arial"/>
+                <a:cs typeface="Arial"/>
+              </a:rPr>
+              <a:t>Dist</a:t>
+            </a:r>
+            <a:r>
+              <a:rPr lang="en-US" sz="1150" b="0" dirty="0">
+                <a:solidFill>
+                  <a:srgbClr val="1F3864"/>
+                </a:solidFill>
+                <a:latin typeface="Arial"/>
+                <a:cs typeface="Arial"/>
+              </a:rPr>
+              <a:t> </a:t>
+            </a:r>
+            <a:r>
+              <a:rPr lang="en-US" sz="1150" dirty="0">
+                <a:solidFill>
+                  <a:srgbClr val="1F3864"/>
+                </a:solidFill>
+              </a:rPr>
+              <a:t>1442.2</a:t>
+            </a:r>
+            <a:r>
+              <a:rPr lang="en-US" sz="1150" b="0" dirty="0">
+                <a:solidFill>
+                  <a:srgbClr val="1F3864"/>
+                </a:solidFill>
+                <a:latin typeface="Arial"/>
+                <a:cs typeface="Arial"/>
+              </a:rPr>
+              <a:t> km   ·   SNR 25.6 dB</a:t>
+            </a:r>
+          </a:p>
+          <a:p>
+            <a:pPr algn="ctr">
+              <a:spcBef>
+                <a:spcPts val="300"/>
+              </a:spcBef>
+            </a:pPr>
+            <a:r>
+              <a:rPr lang="en-US" sz="1150" b="0" dirty="0">
+                <a:solidFill>
+                  <a:srgbClr val="1F3864"/>
+                </a:solidFill>
+                <a:latin typeface="Arial"/>
+                <a:cs typeface="Arial"/>
+              </a:rPr>
+              <a:t>Beamforming +12.</a:t>
+            </a:r>
+            <a:r>
+              <a:rPr lang="en-US" sz="1150" dirty="0">
+                <a:solidFill>
+                  <a:srgbClr val="1F3864"/>
+                </a:solidFill>
+              </a:rPr>
+              <a:t>70</a:t>
+            </a:r>
+            <a:r>
+              <a:rPr lang="en-US" sz="1150" b="0" dirty="0">
+                <a:solidFill>
+                  <a:srgbClr val="1F3864"/>
+                </a:solidFill>
+                <a:latin typeface="Arial"/>
+                <a:cs typeface="Arial"/>
+              </a:rPr>
+              <a:t> dB   ·   Shannon ≈ 2128.6 Mbps</a:t>
             </a:r>
           </a:p>
         </p:txBody>
@@ -21656,7 +23171,7 @@
           <p:nvPr>
             <p:extLst>
               <p:ext uri="{D42A27DB-BD31-4B8C-83A1-F6EECF244321}">
-                <p14:modId xmlns:p14="http://schemas.microsoft.com/office/powerpoint/2010/main" val="1435795628"/>
+                <p14:modId xmlns:p14="http://schemas.microsoft.com/office/powerpoint/2010/main" val="1435267576"/>
               </p:ext>
             </p:extLst>
           </p:nvPr>
@@ -21978,14 +23493,14 @@
                     <a:p>
                       <a:pPr algn="ctr"/>
                       <a:r>
-                        <a:rPr lang="en-US" sz="1100" b="0" dirty="0">
+                        <a:rPr lang="en-US" altLang="zh-TW" sz="1100" b="0" dirty="0">
                           <a:solidFill>
                             <a:srgbClr val="000000"/>
                           </a:solidFill>
-                          <a:latin typeface="Arial"/>
+                          <a:latin typeface="+mn-lt"/>
                           <a:cs typeface="Arial"/>
                         </a:rPr>
-                        <a:t>78.9 – 140.9</a:t>
+                        <a:t>—</a:t>
                       </a:r>
                     </a:p>
                   </a:txBody>
@@ -22168,7 +23683,7 @@
                           <a:latin typeface="Arial"/>
                           <a:cs typeface="Arial"/>
                         </a:rPr>
-                        <a:t>140.9 – 219.8</a:t>
+                        <a:t>124.0 – 124.13</a:t>
                       </a:r>
                     </a:p>
                   </a:txBody>
@@ -22212,7 +23727,7 @@
                           <a:latin typeface="Arial"/>
                           <a:cs typeface="Arial"/>
                         </a:rPr>
-                        <a:t>149,618</a:t>
+                        <a:t>1,238,529</a:t>
                       </a:r>
                     </a:p>
                   </a:txBody>
@@ -22347,14 +23862,14 @@
           <a:p>
             <a:r>
               <a:rPr lang="en-US" altLang="zh-TW" sz="3200" dirty="0">
-                <a:latin typeface="Times New Roman" panose="02020603050405020304" pitchFamily="18" charset="0"/>
+                <a:latin typeface="Helvetica Neue" panose="02020500000000000000" charset="0"/>
                 <a:ea typeface="標楷體" panose="03000509000000000000" pitchFamily="65" charset="-120"/>
                 <a:cs typeface="Times New Roman" panose="02020603050405020304" pitchFamily="18" charset="0"/>
               </a:rPr>
               <a:t>Topo Evaluation: Scheduler Trace Replay</a:t>
             </a:r>
             <a:endParaRPr lang="zh-TW" altLang="en-US" sz="3200" dirty="0">
-              <a:latin typeface="Times New Roman" panose="02020603050405020304" pitchFamily="18" charset="0"/>
+              <a:latin typeface="Helvetica Neue" panose="02020500000000000000" charset="0"/>
               <a:ea typeface="標楷體" panose="03000509000000000000" pitchFamily="65" charset="-120"/>
               <a:cs typeface="Times New Roman" panose="02020603050405020304" pitchFamily="18" charset="0"/>
             </a:endParaRPr>
@@ -22399,36 +23914,6 @@
           </a:p>
         </p:txBody>
       </p:sp>
-      <p:pic>
-        <p:nvPicPr>
-          <p:cNvPr id="11" name="圖片 10">
-            <a:extLst>
-              <a:ext uri="{FF2B5EF4-FFF2-40B4-BE49-F238E27FC236}">
-                <a16:creationId xmlns:a16="http://schemas.microsoft.com/office/drawing/2014/main" id="{933DA310-1FC1-7003-2993-B2C9FEBE21A6}"/>
-              </a:ext>
-            </a:extLst>
-          </p:cNvPr>
-          <p:cNvPicPr>
-            <a:picLocks noChangeAspect="1"/>
-          </p:cNvPicPr>
-          <p:nvPr/>
-        </p:nvPicPr>
-        <p:blipFill>
-          <a:blip r:embed="rId2"/>
-          <a:stretch>
-            <a:fillRect/>
-          </a:stretch>
-        </p:blipFill>
-        <p:spPr>
-          <a:xfrm>
-            <a:off x="1949957" y="3792219"/>
-            <a:ext cx="5244083" cy="1026161"/>
-          </a:xfrm>
-          <a:prstGeom prst="rect">
-            <a:avLst/>
-          </a:prstGeom>
-        </p:spPr>
-      </p:pic>
       <p:sp>
         <p:nvSpPr>
           <p:cNvPr id="10" name="文字版面配置區 2">
